--- a/docs_/01_Planificacion/Cronograma_Actualizado_Presentacion_Gerencia_TI_2026-08-21.pptx
+++ b/docs_/01_Planificacion/Cronograma_Actualizado_Presentacion_Gerencia_TI_2026-08-21.pptx
@@ -4,6 +4,9 @@
   <p:sldMasterIdLst>
     <p:sldMasterId id="2147483648" r:id="rId1"/>
   </p:sldMasterIdLst>
+  <p:notesMasterIdLst>
+    <p:notesMasterId r:id="rId16"/>
+  </p:notesMasterIdLst>
   <p:sldIdLst>
     <p:sldId id="256" r:id="rId2"/>
     <p:sldId id="257" r:id="rId3"/>
@@ -20,9 +23,6 @@
     <p:sldId id="268" r:id="rId14"/>
     <p:sldId id="269" r:id="rId15"/>
   </p:sldIdLst>
-  <p:notesMasterIdLst>
-    <p:notesMasterId r:id="rId16"/>
-  </p:notesMasterIdLst>
   <p:sldSz cx="12192000" cy="6858000"/>
   <p:notesSz cx="6858000" cy="12192000"/>
   <p:defaultTextStyle>
@@ -117,13 +117,20 @@
       </a:defRPr>
     </a:lvl9pPr>
   </p:defaultTextStyle>
+  <p:extLst>
+    <p:ext uri="{EFAFB233-063F-42B5-8137-9DF3F51BA10A}">
+      <p15:sldGuideLst xmlns:p15="http://schemas.microsoft.com/office/powerpoint/2012/main"/>
+    </p:ext>
+  </p:extLst>
 </p:presentation>
 </file>
 
 <file path=ppt/charts/chart1.xml><?xml version="1.0" encoding="utf-8"?>
-<c:chartSpace xmlns:c="http://schemas.openxmlformats.org/drawingml/2006/chart" xmlns:a="http://schemas.openxmlformats.org/drawingml/2006/main" xmlns:r="http://schemas.openxmlformats.org/officeDocument/2006/relationships">
+<c:chartSpace xmlns:c="http://schemas.openxmlformats.org/drawingml/2006/chart" xmlns:a="http://schemas.openxmlformats.org/drawingml/2006/main" xmlns:r="http://schemas.openxmlformats.org/officeDocument/2006/relationships" xmlns:c16r2="http://schemas.microsoft.com/office/drawing/2015/06/chart">
   <c:date1904 val="0"/>
+  <c:lang val="es-ES"/>
   <c:roundedCorners val="1"/>
+  <c:style val="2"/>
   <c:chart>
     <c:autoTitleDeleted val="1"/>
     <c:plotArea>
@@ -155,18 +162,26 @@
           <c:invertIfNegative val="0"/>
           <c:dLbls>
             <c:numFmt formatCode="0.0" sourceLinked="0"/>
+            <c:spPr>
+              <a:noFill/>
+              <a:ln>
+                <a:noFill/>
+              </a:ln>
+              <a:effectLst/>
+            </c:spPr>
             <c:txPr>
               <a:bodyPr/>
               <a:lstStyle/>
               <a:p>
                 <a:pPr>
-                  <a:defRPr b="0" i="0" strike="noStrike" sz="1100" u="none">
+                  <a:defRPr sz="1100" b="0" i="0" u="none" strike="noStrike">
                     <a:solidFill>
                       <a:srgbClr val="1B2333"/>
                     </a:solidFill>
                     <a:latin typeface="Calibri"/>
                   </a:defRPr>
                 </a:pPr>
+                <a:endParaRPr lang="es-PE"/>
               </a:p>
             </c:txPr>
             <c:showLegendKey val="0"/>
@@ -176,40 +191,43 @@
             <c:showPercent val="0"/>
             <c:showBubbleSize val="0"/>
             <c:showLeaderLines val="0"/>
+            <c:extLst>
+              <c:ext xmlns:c15="http://schemas.microsoft.com/office/drawing/2012/chart" uri="{CE6537A1-D6FC-4f65-9D91-7224C49458BB}">
+                <c15:showLeaderLines val="0"/>
+              </c:ext>
+            </c:extLst>
           </c:dLbls>
           <c:cat>
-            <c:multiLvlStrRef>
+            <c:strRef>
               <c:f>Sheet1!$A$2:$A$7</c:f>
-              <c:multiLvlStrCache>
+              <c:strCache>
                 <c:ptCount val="6"/>
-                <c:lvl>
-                  <c:pt idx="0">
-                    <c:v>Junio
+                <c:pt idx="0">
+                  <c:v>Junio
 R1</c:v>
-                  </c:pt>
-                  <c:pt idx="1">
-                    <c:v>Julio
+                </c:pt>
+                <c:pt idx="1">
+                  <c:v>Julio
 R2</c:v>
-                  </c:pt>
-                  <c:pt idx="2">
-                    <c:v>Agosto
+                </c:pt>
+                <c:pt idx="2">
+                  <c:v>Agosto
 R3</c:v>
-                  </c:pt>
-                  <c:pt idx="3">
-                    <c:v>Septiembre
+                </c:pt>
+                <c:pt idx="3">
+                  <c:v>Septiembre
 R4</c:v>
-                  </c:pt>
-                  <c:pt idx="4">
-                    <c:v>Octubre
+                </c:pt>
+                <c:pt idx="4">
+                  <c:v>Octubre
 R5</c:v>
-                  </c:pt>
-                  <c:pt idx="5">
-                    <c:v>Noviembre
+                </c:pt>
+                <c:pt idx="5">
+                  <c:v>Noviembre
 R6*</c:v>
-                  </c:pt>
-                </c:lvl>
-              </c:multiLvlStrCache>
-            </c:multiLvlStrRef>
+                </c:pt>
+              </c:strCache>
+            </c:strRef>
           </c:cat>
           <c:val>
             <c:numRef>
@@ -230,7 +248,7 @@
                   <c:v>58.1</c:v>
                 </c:pt>
                 <c:pt idx="4">
-                  <c:v>37.7</c:v>
+                  <c:v>37.700000000000003</c:v>
                 </c:pt>
                 <c:pt idx="5">
                   <c:v>40</c:v>
@@ -238,36 +256,23 @@
               </c:numCache>
             </c:numRef>
           </c:val>
+          <c:extLst>
+            <c:ext xmlns:c16="http://schemas.microsoft.com/office/drawing/2014/chart" uri="{C3380CC4-5D6E-409C-BE32-E72D297353CC}">
+              <c16:uniqueId val="{00000000-4C5F-40E5-A8EC-FEA871851D15}"/>
+            </c:ext>
+          </c:extLst>
         </c:ser>
         <c:dLbls>
-          <c:numFmt formatCode="0.0" sourceLinked="0"/>
-          <c:txPr>
-            <a:bodyPr/>
-            <a:lstStyle/>
-            <a:p>
-              <a:pPr>
-                <a:defRPr b="0" i="0" strike="noStrike" sz="1100" u="none">
-                  <a:solidFill>
-                    <a:srgbClr val="1B2333"/>
-                  </a:solidFill>
-                  <a:latin typeface="Calibri"/>
-                </a:defRPr>
-              </a:pPr>
-            </a:p>
-          </c:txPr>
           <c:showLegendKey val="0"/>
           <c:showVal val="1"/>
           <c:showCatName val="0"/>
           <c:showSerName val="0"/>
           <c:showPercent val="0"/>
           <c:showBubbleSize val="0"/>
-          <c:showLeaderLines val="0"/>
         </c:dLbls>
         <c:gapWidth val="35"/>
-        <c:overlap val="0"/>
         <c:axId val="2094734554"/>
         <c:axId val="2094734552"/>
-        <c:axId val="2094734556"/>
       </c:barChart>
       <c:catAx>
         <c:axId val="2094734554"/>
@@ -308,6 +313,7 @@
         <c:crosses val="autoZero"/>
         <c:auto val="1"/>
         <c:lblAlgn val="ctr"/>
+        <c:lblOffset val="100"/>
         <c:noMultiLvlLbl val="1"/>
       </c:catAx>
       <c:valAx>
@@ -323,30 +329,6 @@
         <c:majorTickMark val="out"/>
         <c:minorTickMark val="none"/>
         <c:tickLblPos val="nextTo"/>
-        <c:spPr>
-          <a:ln w="12700" cap="flat">
-            <a:solidFill>
-              <a:srgbClr val="888888"/>
-            </a:solidFill>
-            <a:prstDash val="solid"/>
-            <a:round/>
-          </a:ln>
-        </c:spPr>
-        <c:txPr>
-          <a:bodyPr/>
-          <a:lstStyle/>
-          <a:p>
-            <a:pPr>
-              <a:defRPr sz="1200" b="0" i="0" u="none" strike="noStrike">
-                <a:solidFill>
-                  <a:srgbClr val="000000"/>
-                </a:solidFill>
-                <a:latin typeface="Arial"/>
-              </a:defRPr>
-            </a:pPr>
-            <a:endParaRPr lang="en-US"/>
-          </a:p>
-        </c:txPr>
         <c:crossAx val="2094734554"/>
         <c:crosses val="autoZero"/>
         <c:crossBetween val="between"/>
@@ -363,6 +345,7 @@
     </c:plotArea>
     <c:plotVisOnly val="1"/>
     <c:dispBlanksAs val="span"/>
+    <c:showDLblsOverMax val="1"/>
   </c:chart>
   <c:spPr>
     <a:solidFill>
@@ -401,234 +384,10 @@
           <a:chExt cx="0" cy="0"/>
         </a:xfrm>
       </p:grpSpPr>
-      <p:sp>
-        <p:nvSpPr>
-          <p:cNvPr id="2" name="Header Placeholder 1"/>
-          <p:cNvSpPr>
-            <a:spLocks noGrp="1"/>
-          </p:cNvSpPr>
-          <p:nvPr>
-            <p:ph type="hdr" sz="quarter"/>
-          </p:nvPr>
-        </p:nvSpPr>
-        <p:spPr>
-          <a:xfrm>
-            <a:off x="0" y="0"/>
-            <a:ext cx="2971800" cy="458788"/>
-          </a:xfrm>
-          <a:prstGeom prst="rect">
-            <a:avLst/>
-          </a:prstGeom>
-        </p:spPr>
-        <p:txBody>
-          <a:bodyPr vert="horz" lIns="91440" tIns="45720" rIns="91440" bIns="45720" rtlCol="0"/>
-          <a:lstStyle>
-            <a:lvl1pPr algn="l">
-              <a:defRPr sz="1200"/>
-            </a:lvl1pPr>
-          </a:lstStyle>
-          <a:p>
-            <a:endParaRPr lang="en-US"/>
-          </a:p>
-        </p:txBody>
-      </p:sp>
-      <p:sp>
-        <p:nvSpPr>
-          <p:cNvPr id="3" name="Date Placeholder 2"/>
-          <p:cNvSpPr>
-            <a:spLocks noGrp="1"/>
-          </p:cNvSpPr>
-          <p:nvPr>
-            <p:ph type="dt" idx="1"/>
-          </p:nvPr>
-        </p:nvSpPr>
-        <p:spPr>
-          <a:xfrm>
-            <a:off x="3884613" y="0"/>
-            <a:ext cx="2971800" cy="458788"/>
-          </a:xfrm>
-          <a:prstGeom prst="rect">
-            <a:avLst/>
-          </a:prstGeom>
-        </p:spPr>
-        <p:txBody>
-          <a:bodyPr vert="horz" lIns="91440" tIns="45720" rIns="91440" bIns="45720" rtlCol="0"/>
-          <a:lstStyle>
-            <a:lvl1pPr algn="r">
-              <a:defRPr sz="1200"/>
-            </a:lvl1pPr>
-          </a:lstStyle>
-          <a:p>
-            <a:fld id="{5282F153-3F37-0F45-9E97-73ACFA13230C}" type="datetimeFigureOut">
-              <a:rPr lang="en-US"/>
-              <a:t>7/23/19</a:t>
-            </a:fld>
-            <a:endParaRPr lang="en-US"/>
-          </a:p>
-        </p:txBody>
-      </p:sp>
-      <p:sp>
-        <p:nvSpPr>
-          <p:cNvPr id="4" name="Slide Image Placeholder 3"/>
-          <p:cNvSpPr>
-            <a:spLocks noGrp="1" noRot="1" noChangeAspect="1"/>
-          </p:cNvSpPr>
-          <p:nvPr>
-            <p:ph type="sldImg" idx="2"/>
-          </p:nvPr>
-        </p:nvSpPr>
-        <p:spPr>
-          <a:xfrm>
-            <a:off x="685800" y="1143000"/>
-            <a:ext cx="5486400" cy="3086100"/>
-          </a:xfrm>
-          <a:prstGeom prst="rect">
-            <a:avLst/>
-          </a:prstGeom>
-          <a:noFill/>
-          <a:ln w="12700">
-            <a:solidFill>
-              <a:prstClr val="black"/>
-            </a:solidFill>
-          </a:ln>
-        </p:spPr>
-        <p:txBody>
-          <a:bodyPr vert="horz" lIns="91440" tIns="45720" rIns="91440" bIns="45720" rtlCol="0" anchor="ctr"/>
-          <a:lstStyle/>
-          <a:p>
-            <a:endParaRPr lang="en-US"/>
-          </a:p>
-        </p:txBody>
-      </p:sp>
-      <p:sp>
-        <p:nvSpPr>
-          <p:cNvPr id="5" name="Notes Placeholder 4"/>
-          <p:cNvSpPr>
-            <a:spLocks noGrp="1"/>
-          </p:cNvSpPr>
-          <p:nvPr>
-            <p:ph type="body" sz="quarter" idx="3"/>
-          </p:nvPr>
-        </p:nvSpPr>
-        <p:spPr>
-          <a:xfrm>
-            <a:off x="685800" y="4400550"/>
-            <a:ext cx="5486400" cy="3600450"/>
-          </a:xfrm>
-          <a:prstGeom prst="rect">
-            <a:avLst/>
-          </a:prstGeom>
-        </p:spPr>
-        <p:txBody>
-          <a:bodyPr vert="horz" lIns="91440" tIns="45720" rIns="91440" bIns="45720" rtlCol="0"/>
-          <a:lstStyle/>
-          <a:p>
-            <a:pPr lvl="0"/>
-            <a:r>
-              <a:rPr lang="en-US"/>
-              <a:t>Click to edit Master text styles</a:t>
-            </a:r>
-          </a:p>
-          <a:p>
-            <a:pPr lvl="1"/>
-            <a:r>
-              <a:rPr lang="en-US"/>
-              <a:t>Second level</a:t>
-            </a:r>
-          </a:p>
-          <a:p>
-            <a:pPr lvl="2"/>
-            <a:r>
-              <a:rPr lang="en-US"/>
-              <a:t>Third level</a:t>
-            </a:r>
-          </a:p>
-          <a:p>
-            <a:pPr lvl="3"/>
-            <a:r>
-              <a:rPr lang="en-US"/>
-              <a:t>Fourth level</a:t>
-            </a:r>
-          </a:p>
-          <a:p>
-            <a:pPr lvl="4"/>
-            <a:r>
-              <a:rPr lang="en-US"/>
-              <a:t>Fifth level</a:t>
-            </a:r>
-          </a:p>
-        </p:txBody>
-      </p:sp>
-      <p:sp>
-        <p:nvSpPr>
-          <p:cNvPr id="6" name="Footer Placeholder 5"/>
-          <p:cNvSpPr>
-            <a:spLocks noGrp="1"/>
-          </p:cNvSpPr>
-          <p:nvPr>
-            <p:ph type="ftr" sz="quarter" idx="4"/>
-          </p:nvPr>
-        </p:nvSpPr>
-        <p:spPr>
-          <a:xfrm>
-            <a:off x="0" y="8685213"/>
-            <a:ext cx="2971800" cy="458787"/>
-          </a:xfrm>
-          <a:prstGeom prst="rect">
-            <a:avLst/>
-          </a:prstGeom>
-        </p:spPr>
-        <p:txBody>
-          <a:bodyPr vert="horz" lIns="91440" tIns="45720" rIns="91440" bIns="45720" rtlCol="0" anchor="b"/>
-          <a:lstStyle>
-            <a:lvl1pPr algn="l">
-              <a:defRPr sz="1200"/>
-            </a:lvl1pPr>
-          </a:lstStyle>
-          <a:p>
-            <a:endParaRPr lang="en-US"/>
-          </a:p>
-        </p:txBody>
-      </p:sp>
-      <p:sp>
-        <p:nvSpPr>
-          <p:cNvPr id="7" name="Slide Number Placeholder 6"/>
-          <p:cNvSpPr>
-            <a:spLocks noGrp="1"/>
-          </p:cNvSpPr>
-          <p:nvPr>
-            <p:ph type="sldNum" sz="quarter" idx="5"/>
-          </p:nvPr>
-        </p:nvSpPr>
-        <p:spPr>
-          <a:xfrm>
-            <a:off x="3884613" y="8685213"/>
-            <a:ext cx="2971800" cy="458787"/>
-          </a:xfrm>
-          <a:prstGeom prst="rect">
-            <a:avLst/>
-          </a:prstGeom>
-        </p:spPr>
-        <p:txBody>
-          <a:bodyPr vert="horz" lIns="91440" tIns="45720" rIns="91440" bIns="45720" rtlCol="0" anchor="b"/>
-          <a:lstStyle>
-            <a:lvl1pPr algn="r">
-              <a:defRPr sz="1200"/>
-            </a:lvl1pPr>
-          </a:lstStyle>
-          <a:p>
-            <a:fld id="{CE5E9CC1-C706-0F49-92D6-E571CC5EEA8F}" type="slidenum">
-              <a:rPr lang="en-US"/>
-              <a:t>‹#›</a:t>
-            </a:fld>
-            <a:endParaRPr lang="en-US"/>
-          </a:p>
-        </p:txBody>
-      </p:sp>
     </p:spTree>
     <p:extLst>
       <p:ext uri="{BB962C8B-B14F-4D97-AF65-F5344CB8AC3E}">
-        <p14:creationId xmlns:p14="http://schemas.microsoft.com/office/powerpoint/2010/main" val="1024086991"/>
+        <p14:creationId xmlns:p14="http://schemas.microsoft.com/office/powerpoint/2010/main" val="3600201313"/>
       </p:ext>
     </p:extLst>
   </p:cSld>
@@ -772,10 +531,6 @@
           <a:bodyPr/>
           <a:lstStyle/>
           <a:p>
-            <a:r>
-              <a:rPr lang="en-US" dirty="0"/>
-              <a:t/>
-            </a:r>
             <a:endParaRPr lang="en-US" dirty="0"/>
           </a:p>
         </p:txBody>
@@ -860,10 +615,6 @@
           <a:bodyPr/>
           <a:lstStyle/>
           <a:p>
-            <a:r>
-              <a:rPr lang="en-US" dirty="0"/>
-              <a:t/>
-            </a:r>
             <a:endParaRPr lang="en-US" dirty="0"/>
           </a:p>
         </p:txBody>
@@ -948,10 +699,6 @@
           <a:bodyPr/>
           <a:lstStyle/>
           <a:p>
-            <a:r>
-              <a:rPr lang="en-US" dirty="0"/>
-              <a:t/>
-            </a:r>
             <a:endParaRPr lang="en-US" dirty="0"/>
           </a:p>
         </p:txBody>
@@ -1036,10 +783,6 @@
           <a:bodyPr/>
           <a:lstStyle/>
           <a:p>
-            <a:r>
-              <a:rPr lang="en-US" dirty="0"/>
-              <a:t/>
-            </a:r>
             <a:endParaRPr lang="en-US" dirty="0"/>
           </a:p>
         </p:txBody>
@@ -1124,10 +867,6 @@
           <a:bodyPr/>
           <a:lstStyle/>
           <a:p>
-            <a:r>
-              <a:rPr lang="en-US" dirty="0"/>
-              <a:t/>
-            </a:r>
             <a:endParaRPr lang="en-US" dirty="0"/>
           </a:p>
         </p:txBody>
@@ -1212,10 +951,6 @@
           <a:bodyPr/>
           <a:lstStyle/>
           <a:p>
-            <a:r>
-              <a:rPr lang="en-US" dirty="0"/>
-              <a:t/>
-            </a:r>
             <a:endParaRPr lang="en-US" dirty="0"/>
           </a:p>
         </p:txBody>
@@ -1300,10 +1035,6 @@
           <a:bodyPr/>
           <a:lstStyle/>
           <a:p>
-            <a:r>
-              <a:rPr lang="en-US" dirty="0"/>
-              <a:t/>
-            </a:r>
             <a:endParaRPr lang="en-US" dirty="0"/>
           </a:p>
         </p:txBody>
@@ -1388,10 +1119,6 @@
           <a:bodyPr/>
           <a:lstStyle/>
           <a:p>
-            <a:r>
-              <a:rPr lang="en-US" dirty="0"/>
-              <a:t/>
-            </a:r>
             <a:endParaRPr lang="en-US" dirty="0"/>
           </a:p>
         </p:txBody>
@@ -1476,10 +1203,6 @@
           <a:bodyPr/>
           <a:lstStyle/>
           <a:p>
-            <a:r>
-              <a:rPr lang="en-US" dirty="0"/>
-              <a:t/>
-            </a:r>
             <a:endParaRPr lang="en-US" dirty="0"/>
           </a:p>
         </p:txBody>
@@ -1564,10 +1287,6 @@
           <a:bodyPr/>
           <a:lstStyle/>
           <a:p>
-            <a:r>
-              <a:rPr lang="en-US" dirty="0"/>
-              <a:t/>
-            </a:r>
             <a:endParaRPr lang="en-US" dirty="0"/>
           </a:p>
         </p:txBody>
@@ -1652,10 +1371,6 @@
           <a:bodyPr/>
           <a:lstStyle/>
           <a:p>
-            <a:r>
-              <a:rPr lang="en-US" dirty="0"/>
-              <a:t/>
-            </a:r>
             <a:endParaRPr lang="en-US" dirty="0"/>
           </a:p>
         </p:txBody>
@@ -1740,10 +1455,6 @@
           <a:bodyPr/>
           <a:lstStyle/>
           <a:p>
-            <a:r>
-              <a:rPr lang="en-US" dirty="0"/>
-              <a:t/>
-            </a:r>
             <a:endParaRPr lang="en-US" dirty="0"/>
           </a:p>
         </p:txBody>
@@ -1828,10 +1539,6 @@
           <a:bodyPr/>
           <a:lstStyle/>
           <a:p>
-            <a:r>
-              <a:rPr lang="en-US" dirty="0"/>
-              <a:t/>
-            </a:r>
             <a:endParaRPr lang="en-US" dirty="0"/>
           </a:p>
         </p:txBody>
@@ -1916,10 +1623,6 @@
           <a:bodyPr/>
           <a:lstStyle/>
           <a:p>
-            <a:r>
-              <a:rPr lang="en-US" dirty="0"/>
-              <a:t/>
-            </a:r>
             <a:endParaRPr lang="en-US" dirty="0"/>
           </a:p>
         </p:txBody>
@@ -1993,6 +1696,11 @@
 <file path=ppt/slideMasters/slideMaster1.xml><?xml version="1.0" encoding="utf-8"?>
 <p:sldMaster xmlns:a="http://schemas.openxmlformats.org/drawingml/2006/main" xmlns:r="http://schemas.openxmlformats.org/officeDocument/2006/relationships" xmlns:p="http://schemas.openxmlformats.org/presentationml/2006/main">
   <p:cSld>
+    <p:bg>
+      <p:bgRef idx="1001">
+        <a:schemeClr val="bg1"/>
+      </p:bgRef>
+    </p:bg>
     <p:spTree>
       <p:nvGrpSpPr>
         <p:cNvPr id="1" name=""/>
@@ -2275,6 +1983,7 @@
         <a:solidFill>
           <a:srgbClr val="1B2333"/>
         </a:solidFill>
+        <a:effectLst/>
       </p:bgPr>
     </p:bg>
     <p:spTree>
@@ -2310,6 +2019,13 @@
           </a:solidFill>
           <a:ln/>
         </p:spPr>
+        <p:txBody>
+          <a:bodyPr/>
+          <a:lstStyle/>
+          <a:p>
+            <a:endParaRPr lang="es-PE"/>
+          </a:p>
+        </p:txBody>
       </p:sp>
       <p:sp>
         <p:nvSpPr>
@@ -2330,6 +2046,13 @@
           </a:solidFill>
           <a:ln/>
         </p:spPr>
+        <p:txBody>
+          <a:bodyPr/>
+          <a:lstStyle/>
+          <a:p>
+            <a:endParaRPr lang="es-PE"/>
+          </a:p>
+        </p:txBody>
       </p:sp>
       <p:sp>
         <p:nvSpPr>
@@ -2350,6 +2073,13 @@
           </a:solidFill>
           <a:ln/>
         </p:spPr>
+        <p:txBody>
+          <a:bodyPr/>
+          <a:lstStyle/>
+          <a:p>
+            <a:endParaRPr lang="es-PE"/>
+          </a:p>
+        </p:txBody>
       </p:sp>
       <p:sp>
         <p:nvSpPr>
@@ -2372,11 +2102,11 @@
           <a:bodyPr wrap="square" rtlCol="0" anchor="ctr"/>
           <a:lstStyle/>
           <a:p>
-            <a:pPr indent="0" marL="0">
+            <a:pPr marL="0" indent="0">
               <a:buNone/>
             </a:pPr>
             <a:r>
-              <a:rPr lang="en-US" sz="1400" b="1" spc="300" kern="0" dirty="0">
+              <a:rPr lang="en-US" sz="1400" b="1" kern="0" spc="300" dirty="0">
                 <a:solidFill>
                   <a:srgbClr val="E8A33D"/>
                 </a:solidFill>
@@ -2411,7 +2141,7 @@
           <a:bodyPr wrap="square" rtlCol="0" anchor="ctr"/>
           <a:lstStyle/>
           <a:p>
-            <a:pPr indent="0" marL="0">
+            <a:pPr marL="0" indent="0">
               <a:lnSpc>
                 <a:spcPct val="102000"/>
               </a:lnSpc>
@@ -2453,7 +2183,7 @@
           <a:bodyPr wrap="square" rtlCol="0" anchor="ctr"/>
           <a:lstStyle/>
           <a:p>
-            <a:pPr indent="0" marL="0">
+            <a:pPr marL="0" indent="0">
               <a:buNone/>
             </a:pPr>
             <a:r>
@@ -2492,7 +2222,7 @@
           <a:bodyPr wrap="square" rtlCol="0" anchor="ctr"/>
           <a:lstStyle/>
           <a:p>
-            <a:pPr indent="0" marL="0">
+            <a:pPr marL="0" indent="0">
               <a:lnSpc>
                 <a:spcPct val="135000"/>
               </a:lnSpc>
@@ -2512,7 +2242,7 @@
             <a:endParaRPr lang="en-US" sz="1300" dirty="0"/>
           </a:p>
           <a:p>
-            <a:pPr indent="0" marL="0">
+            <a:pPr marL="0" indent="0">
               <a:lnSpc>
                 <a:spcPct val="135000"/>
               </a:lnSpc>
@@ -2527,12 +2257,12 @@
                 <a:ea typeface="Calibri" pitchFamily="34" charset="-122"/>
                 <a:cs typeface="Calibri" pitchFamily="34" charset="-120"/>
               </a:rPr>
-              <a:t>Base: ADR-000 a ADR-128 (129 registros) · SPEC-001 a SPEC-024 · Cronograma v36.1</a:t>
+              <a:t>Base: ADR-000 a ADR-129 (130 registros) · SPEC-001 a SPEC-024 · Cronograma v36.1</a:t>
             </a:r>
             <a:endParaRPr lang="en-US" sz="1300" dirty="0"/>
           </a:p>
           <a:p>
-            <a:pPr indent="0" marL="0">
+            <a:pPr marL="0" indent="0">
               <a:lnSpc>
                 <a:spcPct val="135000"/>
               </a:lnSpc>
@@ -2575,6 +2305,13 @@
             <a:prstDash val="solid"/>
           </a:ln>
         </p:spPr>
+        <p:txBody>
+          <a:bodyPr/>
+          <a:lstStyle/>
+          <a:p>
+            <a:endParaRPr lang="es-PE"/>
+          </a:p>
+        </p:txBody>
       </p:sp>
       <p:sp>
         <p:nvSpPr>
@@ -2597,7 +2334,7 @@
           <a:bodyPr wrap="square" rtlCol="0" anchor="ctr"/>
           <a:lstStyle/>
           <a:p>
-            <a:pPr indent="0" marL="0">
+            <a:pPr marL="0" indent="0">
               <a:buNone/>
             </a:pPr>
             <a:r>
@@ -2631,6 +2368,7 @@
         <a:solidFill>
           <a:srgbClr val="FFFFFF"/>
         </a:solidFill>
+        <a:effectLst/>
       </p:bgPr>
     </p:bg>
     <p:spTree>
@@ -2668,11 +2406,11 @@
           <a:bodyPr wrap="square" rtlCol="0" anchor="ctr"/>
           <a:lstStyle/>
           <a:p>
-            <a:pPr indent="0" marL="0">
+            <a:pPr marL="0" indent="0">
               <a:buNone/>
             </a:pPr>
             <a:r>
-              <a:rPr lang="en-US" sz="1200" b="1" spc="200" kern="0" dirty="0">
+              <a:rPr lang="en-US" sz="1200" b="1" kern="0" spc="200" dirty="0">
                 <a:solidFill>
                   <a:srgbClr val="B97E1F"/>
                 </a:solidFill>
@@ -2707,7 +2445,7 @@
           <a:bodyPr wrap="square" rtlCol="0" anchor="ctr"/>
           <a:lstStyle/>
           <a:p>
-            <a:pPr indent="0" marL="0">
+            <a:pPr marL="0" indent="0">
               <a:buNone/>
             </a:pPr>
             <a:r>
@@ -2751,6 +2489,13 @@
             <a:prstDash val="solid"/>
           </a:ln>
         </p:spPr>
+        <p:txBody>
+          <a:bodyPr/>
+          <a:lstStyle/>
+          <a:p>
+            <a:endParaRPr lang="es-PE"/>
+          </a:p>
+        </p:txBody>
       </p:sp>
       <p:sp>
         <p:nvSpPr>
@@ -2773,6 +2518,13 @@
           </a:solidFill>
           <a:ln/>
         </p:spPr>
+        <p:txBody>
+          <a:bodyPr/>
+          <a:lstStyle/>
+          <a:p>
+            <a:endParaRPr lang="es-PE"/>
+          </a:p>
+        </p:txBody>
       </p:sp>
       <p:sp>
         <p:nvSpPr>
@@ -2795,7 +2547,7 @@
           <a:bodyPr wrap="square" rtlCol="0" anchor="ctr"/>
           <a:lstStyle/>
           <a:p>
-            <a:pPr algn="ctr" indent="0" marL="0">
+            <a:pPr marL="0" indent="0" algn="ctr">
               <a:buNone/>
             </a:pPr>
             <a:r>
@@ -2834,7 +2586,7 @@
           <a:bodyPr wrap="square" rtlCol="0" anchor="ctr"/>
           <a:lstStyle/>
           <a:p>
-            <a:pPr indent="0" marL="0">
+            <a:pPr marL="0" indent="0">
               <a:buNone/>
             </a:pPr>
             <a:r>
@@ -2873,7 +2625,7 @@
           <a:bodyPr wrap="square" rtlCol="0" anchor="t"/>
           <a:lstStyle/>
           <a:p>
-            <a:pPr indent="0" marL="0">
+            <a:pPr marL="0" indent="0">
               <a:lnSpc>
                 <a:spcPct val="120000"/>
               </a:lnSpc>
@@ -2888,7 +2640,7 @@
                 <a:ea typeface="Calibri" pitchFamily="34" charset="-122"/>
                 <a:cs typeface="Calibri" pitchFamily="34" charset="-120"/>
               </a:rPr>
-              <a:t>8 ADR implementados y verificados por build/tests. Sin número de SPEC, sin sprint asignado. Entrega real a un teléfono depende de credenciales de producción de Meta.</a:t>
+              <a:t>9 ADR implementados y verificados por build/tests (incluye ADR-129: adjuntos, CV web, QR/OCR). Sin número de SPEC, sin sprint asignado. Entrega real a un teléfono depende de credenciales de producción de Meta.</a:t>
             </a:r>
             <a:endParaRPr lang="en-US" sz="1050" dirty="0"/>
           </a:p>
@@ -2920,6 +2672,13 @@
             <a:prstDash val="solid"/>
           </a:ln>
         </p:spPr>
+        <p:txBody>
+          <a:bodyPr/>
+          <a:lstStyle/>
+          <a:p>
+            <a:endParaRPr lang="es-PE"/>
+          </a:p>
+        </p:txBody>
       </p:sp>
       <p:sp>
         <p:nvSpPr>
@@ -2942,6 +2701,13 @@
           </a:solidFill>
           <a:ln/>
         </p:spPr>
+        <p:txBody>
+          <a:bodyPr/>
+          <a:lstStyle/>
+          <a:p>
+            <a:endParaRPr lang="es-PE"/>
+          </a:p>
+        </p:txBody>
       </p:sp>
       <p:sp>
         <p:nvSpPr>
@@ -2964,7 +2730,7 @@
           <a:bodyPr wrap="square" rtlCol="0" anchor="ctr"/>
           <a:lstStyle/>
           <a:p>
-            <a:pPr algn="ctr" indent="0" marL="0">
+            <a:pPr marL="0" indent="0" algn="ctr">
               <a:buNone/>
             </a:pPr>
             <a:r>
@@ -3003,7 +2769,7 @@
           <a:bodyPr wrap="square" rtlCol="0" anchor="ctr"/>
           <a:lstStyle/>
           <a:p>
-            <a:pPr indent="0" marL="0">
+            <a:pPr marL="0" indent="0">
               <a:buNone/>
             </a:pPr>
             <a:r>
@@ -3042,7 +2808,7 @@
           <a:bodyPr wrap="square" rtlCol="0" anchor="t"/>
           <a:lstStyle/>
           <a:p>
-            <a:pPr indent="0" marL="0">
+            <a:pPr marL="0" indent="0">
               <a:lnSpc>
                 <a:spcPct val="120000"/>
               </a:lnSpc>
@@ -3089,6 +2855,13 @@
             <a:prstDash val="solid"/>
           </a:ln>
         </p:spPr>
+        <p:txBody>
+          <a:bodyPr/>
+          <a:lstStyle/>
+          <a:p>
+            <a:endParaRPr lang="es-PE"/>
+          </a:p>
+        </p:txBody>
       </p:sp>
       <p:sp>
         <p:nvSpPr>
@@ -3111,6 +2884,13 @@
           </a:solidFill>
           <a:ln/>
         </p:spPr>
+        <p:txBody>
+          <a:bodyPr/>
+          <a:lstStyle/>
+          <a:p>
+            <a:endParaRPr lang="es-PE"/>
+          </a:p>
+        </p:txBody>
       </p:sp>
       <p:sp>
         <p:nvSpPr>
@@ -3133,7 +2913,7 @@
           <a:bodyPr wrap="square" rtlCol="0" anchor="ctr"/>
           <a:lstStyle/>
           <a:p>
-            <a:pPr algn="ctr" indent="0" marL="0">
+            <a:pPr marL="0" indent="0" algn="ctr">
               <a:buNone/>
             </a:pPr>
             <a:r>
@@ -3172,7 +2952,7 @@
           <a:bodyPr wrap="square" rtlCol="0" anchor="ctr"/>
           <a:lstStyle/>
           <a:p>
-            <a:pPr indent="0" marL="0">
+            <a:pPr marL="0" indent="0">
               <a:buNone/>
             </a:pPr>
             <a:r>
@@ -3211,7 +2991,7 @@
           <a:bodyPr wrap="square" rtlCol="0" anchor="t"/>
           <a:lstStyle/>
           <a:p>
-            <a:pPr indent="0" marL="0">
+            <a:pPr marL="0" indent="0">
               <a:lnSpc>
                 <a:spcPct val="120000"/>
               </a:lnSpc>
@@ -3258,6 +3038,13 @@
             <a:prstDash val="solid"/>
           </a:ln>
         </p:spPr>
+        <p:txBody>
+          <a:bodyPr/>
+          <a:lstStyle/>
+          <a:p>
+            <a:endParaRPr lang="es-PE"/>
+          </a:p>
+        </p:txBody>
       </p:sp>
       <p:sp>
         <p:nvSpPr>
@@ -3280,6 +3067,13 @@
           </a:solidFill>
           <a:ln/>
         </p:spPr>
+        <p:txBody>
+          <a:bodyPr/>
+          <a:lstStyle/>
+          <a:p>
+            <a:endParaRPr lang="es-PE"/>
+          </a:p>
+        </p:txBody>
       </p:sp>
       <p:sp>
         <p:nvSpPr>
@@ -3302,7 +3096,7 @@
           <a:bodyPr wrap="square" rtlCol="0" anchor="ctr"/>
           <a:lstStyle/>
           <a:p>
-            <a:pPr algn="ctr" indent="0" marL="0">
+            <a:pPr marL="0" indent="0" algn="ctr">
               <a:buNone/>
             </a:pPr>
             <a:r>
@@ -3341,7 +3135,7 @@
           <a:bodyPr wrap="square" rtlCol="0" anchor="ctr"/>
           <a:lstStyle/>
           <a:p>
-            <a:pPr indent="0" marL="0">
+            <a:pPr marL="0" indent="0">
               <a:buNone/>
             </a:pPr>
             <a:r>
@@ -3380,7 +3174,7 @@
           <a:bodyPr wrap="square" rtlCol="0" anchor="t"/>
           <a:lstStyle/>
           <a:p>
-            <a:pPr indent="0" marL="0">
+            <a:pPr marL="0" indent="0">
               <a:lnSpc>
                 <a:spcPct val="120000"/>
               </a:lnSpc>
@@ -3422,7 +3216,7 @@
           <a:bodyPr wrap="square" rtlCol="0" anchor="ctr"/>
           <a:lstStyle/>
           <a:p>
-            <a:pPr algn="l" indent="0" marL="0">
+            <a:pPr marL="0" indent="0" algn="l">
               <a:buNone/>
             </a:pPr>
             <a:r>
@@ -3461,7 +3255,7 @@
           <a:bodyPr wrap="square" rtlCol="0" anchor="ctr"/>
           <a:lstStyle/>
           <a:p>
-            <a:pPr algn="r" indent="0" marL="0">
+            <a:pPr marL="0" indent="0" algn="r">
               <a:buNone/>
             </a:pPr>
             <a:r>
@@ -3495,6 +3289,7 @@
         <a:solidFill>
           <a:srgbClr val="FFFFFF"/>
         </a:solidFill>
+        <a:effectLst/>
       </p:bgPr>
     </p:bg>
     <p:spTree>
@@ -3532,11 +3327,11 @@
           <a:bodyPr wrap="square" rtlCol="0" anchor="ctr"/>
           <a:lstStyle/>
           <a:p>
-            <a:pPr indent="0" marL="0">
+            <a:pPr marL="0" indent="0">
               <a:buNone/>
             </a:pPr>
             <a:r>
-              <a:rPr lang="en-US" sz="1200" b="1" spc="200" kern="0" dirty="0">
+              <a:rPr lang="en-US" sz="1200" b="1" kern="0" spc="200" dirty="0">
                 <a:solidFill>
                   <a:srgbClr val="B97E1F"/>
                 </a:solidFill>
@@ -3571,7 +3366,7 @@
           <a:bodyPr wrap="square" rtlCol="0" anchor="ctr"/>
           <a:lstStyle/>
           <a:p>
-            <a:pPr indent="0" marL="0">
+            <a:pPr marL="0" indent="0">
               <a:buNone/>
             </a:pPr>
             <a:r>
@@ -3612,10 +3407,34 @@
             <a:tbl>
               <a:tblPr/>
               <a:tblGrid>
-                <a:gridCol w="777240"/>
-                <a:gridCol w="3931920"/>
-                <a:gridCol w="2423160"/>
-                <a:gridCol w="4053535"/>
+                <a:gridCol w="777240">
+                  <a:extLst>
+                    <a:ext uri="{9D8B030D-6E8A-4147-A177-3AD203B41FA5}">
+                      <a16:colId xmlns:a16="http://schemas.microsoft.com/office/drawing/2014/main" val="20000"/>
+                    </a:ext>
+                  </a:extLst>
+                </a:gridCol>
+                <a:gridCol w="3931920">
+                  <a:extLst>
+                    <a:ext uri="{9D8B030D-6E8A-4147-A177-3AD203B41FA5}">
+                      <a16:colId xmlns:a16="http://schemas.microsoft.com/office/drawing/2014/main" val="20001"/>
+                    </a:ext>
+                  </a:extLst>
+                </a:gridCol>
+                <a:gridCol w="2423160">
+                  <a:extLst>
+                    <a:ext uri="{9D8B030D-6E8A-4147-A177-3AD203B41FA5}">
+                      <a16:colId xmlns:a16="http://schemas.microsoft.com/office/drawing/2014/main" val="20002"/>
+                    </a:ext>
+                  </a:extLst>
+                </a:gridCol>
+                <a:gridCol w="4053535">
+                  <a:extLst>
+                    <a:ext uri="{9D8B030D-6E8A-4147-A177-3AD203B41FA5}">
+                      <a16:colId xmlns:a16="http://schemas.microsoft.com/office/drawing/2014/main" val="20003"/>
+                    </a:ext>
+                  </a:extLst>
+                </a:gridCol>
               </a:tblGrid>
               <a:tr h="516636">
                 <a:tc>
@@ -3623,7 +3442,7 @@
                     <a:bodyPr/>
                     <a:lstStyle/>
                     <a:p>
-                      <a:pPr indent="0" marL="0">
+                      <a:pPr marL="0" indent="0">
                         <a:buNone/>
                       </a:pPr>
                       <a:r>
@@ -3691,7 +3510,7 @@
                     <a:bodyPr/>
                     <a:lstStyle/>
                     <a:p>
-                      <a:pPr indent="0" marL="0">
+                      <a:pPr marL="0" indent="0">
                         <a:buNone/>
                       </a:pPr>
                       <a:r>
@@ -3759,7 +3578,7 @@
                     <a:bodyPr/>
                     <a:lstStyle/>
                     <a:p>
-                      <a:pPr indent="0" marL="0">
+                      <a:pPr marL="0" indent="0">
                         <a:buNone/>
                       </a:pPr>
                       <a:r>
@@ -3827,7 +3646,7 @@
                     <a:bodyPr/>
                     <a:lstStyle/>
                     <a:p>
-                      <a:pPr indent="0" marL="0">
+                      <a:pPr marL="0" indent="0">
                         <a:buNone/>
                       </a:pPr>
                       <a:r>
@@ -3890,6 +3709,11 @@
                     </a:solidFill>
                   </a:tcPr>
                 </a:tc>
+                <a:extLst>
+                  <a:ext uri="{0D108BD9-81ED-4DB2-BD59-A6C34878D82A}">
+                    <a16:rowId xmlns:a16="http://schemas.microsoft.com/office/drawing/2014/main" val="10000"/>
+                  </a:ext>
+                </a:extLst>
               </a:tr>
               <a:tr h="516636">
                 <a:tc>
@@ -3897,7 +3721,7 @@
                     <a:bodyPr/>
                     <a:lstStyle/>
                     <a:p>
-                      <a:pPr algn="ctr" indent="0" marL="0">
+                      <a:pPr marL="0" indent="0" algn="ctr">
                         <a:buNone/>
                       </a:pPr>
                       <a:r>
@@ -3965,7 +3789,7 @@
                     <a:bodyPr/>
                     <a:lstStyle/>
                     <a:p>
-                      <a:pPr indent="0" marL="0">
+                      <a:pPr marL="0" indent="0">
                         <a:buNone/>
                       </a:pPr>
                       <a:r>
@@ -4030,7 +3854,7 @@
                     <a:bodyPr/>
                     <a:lstStyle/>
                     <a:p>
-                      <a:pPr indent="0" marL="0">
+                      <a:pPr marL="0" indent="0">
                         <a:buNone/>
                       </a:pPr>
                       <a:r>
@@ -4095,7 +3919,7 @@
                     <a:bodyPr/>
                     <a:lstStyle/>
                     <a:p>
-                      <a:pPr indent="0" marL="0">
+                      <a:pPr marL="0" indent="0">
                         <a:buNone/>
                       </a:pPr>
                       <a:r>
@@ -4155,6 +3979,11 @@
                     </a:lnB>
                   </a:tcPr>
                 </a:tc>
+                <a:extLst>
+                  <a:ext uri="{0D108BD9-81ED-4DB2-BD59-A6C34878D82A}">
+                    <a16:rowId xmlns:a16="http://schemas.microsoft.com/office/drawing/2014/main" val="10001"/>
+                  </a:ext>
+                </a:extLst>
               </a:tr>
               <a:tr h="516636">
                 <a:tc>
@@ -4162,7 +3991,7 @@
                     <a:bodyPr/>
                     <a:lstStyle/>
                     <a:p>
-                      <a:pPr algn="ctr" indent="0" marL="0">
+                      <a:pPr marL="0" indent="0" algn="ctr">
                         <a:buNone/>
                       </a:pPr>
                       <a:r>
@@ -4230,7 +4059,7 @@
                     <a:bodyPr/>
                     <a:lstStyle/>
                     <a:p>
-                      <a:pPr indent="0" marL="0">
+                      <a:pPr marL="0" indent="0">
                         <a:buNone/>
                       </a:pPr>
                       <a:r>
@@ -4295,7 +4124,7 @@
                     <a:bodyPr/>
                     <a:lstStyle/>
                     <a:p>
-                      <a:pPr indent="0" marL="0">
+                      <a:pPr marL="0" indent="0">
                         <a:buNone/>
                       </a:pPr>
                       <a:r>
@@ -4360,7 +4189,7 @@
                     <a:bodyPr/>
                     <a:lstStyle/>
                     <a:p>
-                      <a:pPr indent="0" marL="0">
+                      <a:pPr marL="0" indent="0">
                         <a:buNone/>
                       </a:pPr>
                       <a:r>
@@ -4420,6 +4249,11 @@
                     </a:lnB>
                   </a:tcPr>
                 </a:tc>
+                <a:extLst>
+                  <a:ext uri="{0D108BD9-81ED-4DB2-BD59-A6C34878D82A}">
+                    <a16:rowId xmlns:a16="http://schemas.microsoft.com/office/drawing/2014/main" val="10002"/>
+                  </a:ext>
+                </a:extLst>
               </a:tr>
               <a:tr h="516636">
                 <a:tc>
@@ -4427,7 +4261,7 @@
                     <a:bodyPr/>
                     <a:lstStyle/>
                     <a:p>
-                      <a:pPr algn="ctr" indent="0" marL="0">
+                      <a:pPr marL="0" indent="0" algn="ctr">
                         <a:buNone/>
                       </a:pPr>
                       <a:r>
@@ -4495,7 +4329,7 @@
                     <a:bodyPr/>
                     <a:lstStyle/>
                     <a:p>
-                      <a:pPr indent="0" marL="0">
+                      <a:pPr marL="0" indent="0">
                         <a:buNone/>
                       </a:pPr>
                       <a:r>
@@ -4560,7 +4394,7 @@
                     <a:bodyPr/>
                     <a:lstStyle/>
                     <a:p>
-                      <a:pPr indent="0" marL="0">
+                      <a:pPr marL="0" indent="0">
                         <a:buNone/>
                       </a:pPr>
                       <a:r>
@@ -4625,7 +4459,7 @@
                     <a:bodyPr/>
                     <a:lstStyle/>
                     <a:p>
-                      <a:pPr indent="0" marL="0">
+                      <a:pPr marL="0" indent="0">
                         <a:buNone/>
                       </a:pPr>
                       <a:r>
@@ -4685,6 +4519,11 @@
                     </a:lnB>
                   </a:tcPr>
                 </a:tc>
+                <a:extLst>
+                  <a:ext uri="{0D108BD9-81ED-4DB2-BD59-A6C34878D82A}">
+                    <a16:rowId xmlns:a16="http://schemas.microsoft.com/office/drawing/2014/main" val="10003"/>
+                  </a:ext>
+                </a:extLst>
               </a:tr>
               <a:tr h="516636">
                 <a:tc>
@@ -4692,7 +4531,7 @@
                     <a:bodyPr/>
                     <a:lstStyle/>
                     <a:p>
-                      <a:pPr algn="ctr" indent="0" marL="0">
+                      <a:pPr marL="0" indent="0" algn="ctr">
                         <a:buNone/>
                       </a:pPr>
                       <a:r>
@@ -4760,7 +4599,7 @@
                     <a:bodyPr/>
                     <a:lstStyle/>
                     <a:p>
-                      <a:pPr indent="0" marL="0">
+                      <a:pPr marL="0" indent="0">
                         <a:buNone/>
                       </a:pPr>
                       <a:r>
@@ -4825,7 +4664,7 @@
                     <a:bodyPr/>
                     <a:lstStyle/>
                     <a:p>
-                      <a:pPr indent="0" marL="0">
+                      <a:pPr marL="0" indent="0">
                         <a:buNone/>
                       </a:pPr>
                       <a:r>
@@ -4890,7 +4729,7 @@
                     <a:bodyPr/>
                     <a:lstStyle/>
                     <a:p>
-                      <a:pPr indent="0" marL="0">
+                      <a:pPr marL="0" indent="0">
                         <a:buNone/>
                       </a:pPr>
                       <a:r>
@@ -4950,6 +4789,11 @@
                     </a:lnB>
                   </a:tcPr>
                 </a:tc>
+                <a:extLst>
+                  <a:ext uri="{0D108BD9-81ED-4DB2-BD59-A6C34878D82A}">
+                    <a16:rowId xmlns:a16="http://schemas.microsoft.com/office/drawing/2014/main" val="10004"/>
+                  </a:ext>
+                </a:extLst>
               </a:tr>
               <a:tr h="516636">
                 <a:tc>
@@ -4957,7 +4801,7 @@
                     <a:bodyPr/>
                     <a:lstStyle/>
                     <a:p>
-                      <a:pPr algn="ctr" indent="0" marL="0">
+                      <a:pPr marL="0" indent="0" algn="ctr">
                         <a:buNone/>
                       </a:pPr>
                       <a:r>
@@ -5025,7 +4869,7 @@
                     <a:bodyPr/>
                     <a:lstStyle/>
                     <a:p>
-                      <a:pPr indent="0" marL="0">
+                      <a:pPr marL="0" indent="0">
                         <a:buNone/>
                       </a:pPr>
                       <a:r>
@@ -5090,7 +4934,7 @@
                     <a:bodyPr/>
                     <a:lstStyle/>
                     <a:p>
-                      <a:pPr indent="0" marL="0">
+                      <a:pPr marL="0" indent="0">
                         <a:buNone/>
                       </a:pPr>
                       <a:r>
@@ -5155,7 +4999,7 @@
                     <a:bodyPr/>
                     <a:lstStyle/>
                     <a:p>
-                      <a:pPr indent="0" marL="0">
+                      <a:pPr marL="0" indent="0">
                         <a:buNone/>
                       </a:pPr>
                       <a:r>
@@ -5215,6 +5059,11 @@
                     </a:lnB>
                   </a:tcPr>
                 </a:tc>
+                <a:extLst>
+                  <a:ext uri="{0D108BD9-81ED-4DB2-BD59-A6C34878D82A}">
+                    <a16:rowId xmlns:a16="http://schemas.microsoft.com/office/drawing/2014/main" val="10005"/>
+                  </a:ext>
+                </a:extLst>
               </a:tr>
               <a:tr h="516636">
                 <a:tc>
@@ -5222,7 +5071,7 @@
                     <a:bodyPr/>
                     <a:lstStyle/>
                     <a:p>
-                      <a:pPr algn="ctr" indent="0" marL="0">
+                      <a:pPr marL="0" indent="0" algn="ctr">
                         <a:buNone/>
                       </a:pPr>
                       <a:r>
@@ -5290,7 +5139,7 @@
                     <a:bodyPr/>
                     <a:lstStyle/>
                     <a:p>
-                      <a:pPr indent="0" marL="0">
+                      <a:pPr marL="0" indent="0">
                         <a:buNone/>
                       </a:pPr>
                       <a:r>
@@ -5355,7 +5204,7 @@
                     <a:bodyPr/>
                     <a:lstStyle/>
                     <a:p>
-                      <a:pPr indent="0" marL="0">
+                      <a:pPr marL="0" indent="0">
                         <a:buNone/>
                       </a:pPr>
                       <a:r>
@@ -5420,7 +5269,7 @@
                     <a:bodyPr/>
                     <a:lstStyle/>
                     <a:p>
-                      <a:pPr indent="0" marL="0">
+                      <a:pPr marL="0" indent="0">
                         <a:buNone/>
                       </a:pPr>
                       <a:r>
@@ -5480,6 +5329,11 @@
                     </a:lnB>
                   </a:tcPr>
                 </a:tc>
+                <a:extLst>
+                  <a:ext uri="{0D108BD9-81ED-4DB2-BD59-A6C34878D82A}">
+                    <a16:rowId xmlns:a16="http://schemas.microsoft.com/office/drawing/2014/main" val="10006"/>
+                  </a:ext>
+                </a:extLst>
               </a:tr>
               <a:tr h="516636">
                 <a:tc>
@@ -5487,7 +5341,7 @@
                     <a:bodyPr/>
                     <a:lstStyle/>
                     <a:p>
-                      <a:pPr algn="ctr" indent="0" marL="0">
+                      <a:pPr marL="0" indent="0" algn="ctr">
                         <a:buNone/>
                       </a:pPr>
                       <a:r>
@@ -5555,7 +5409,7 @@
                     <a:bodyPr/>
                     <a:lstStyle/>
                     <a:p>
-                      <a:pPr indent="0" marL="0">
+                      <a:pPr marL="0" indent="0">
                         <a:buNone/>
                       </a:pPr>
                       <a:r>
@@ -5620,7 +5474,7 @@
                     <a:bodyPr/>
                     <a:lstStyle/>
                     <a:p>
-                      <a:pPr indent="0" marL="0">
+                      <a:pPr marL="0" indent="0">
                         <a:buNone/>
                       </a:pPr>
                       <a:r>
@@ -5685,7 +5539,7 @@
                     <a:bodyPr/>
                     <a:lstStyle/>
                     <a:p>
-                      <a:pPr indent="0" marL="0">
+                      <a:pPr marL="0" indent="0">
                         <a:buNone/>
                       </a:pPr>
                       <a:r>
@@ -5745,6 +5599,11 @@
                     </a:lnB>
                   </a:tcPr>
                 </a:tc>
+                <a:extLst>
+                  <a:ext uri="{0D108BD9-81ED-4DB2-BD59-A6C34878D82A}">
+                    <a16:rowId xmlns:a16="http://schemas.microsoft.com/office/drawing/2014/main" val="10007"/>
+                  </a:ext>
+                </a:extLst>
               </a:tr>
               <a:tr h="516636">
                 <a:tc>
@@ -5752,7 +5611,7 @@
                     <a:bodyPr/>
                     <a:lstStyle/>
                     <a:p>
-                      <a:pPr algn="ctr" indent="0" marL="0">
+                      <a:pPr marL="0" indent="0" algn="ctr">
                         <a:buNone/>
                       </a:pPr>
                       <a:r>
@@ -5820,7 +5679,7 @@
                     <a:bodyPr/>
                     <a:lstStyle/>
                     <a:p>
-                      <a:pPr indent="0" marL="0">
+                      <a:pPr marL="0" indent="0">
                         <a:buNone/>
                       </a:pPr>
                       <a:r>
@@ -5885,7 +5744,7 @@
                     <a:bodyPr/>
                     <a:lstStyle/>
                     <a:p>
-                      <a:pPr indent="0" marL="0">
+                      <a:pPr marL="0" indent="0">
                         <a:buNone/>
                       </a:pPr>
                       <a:r>
@@ -5950,7 +5809,7 @@
                     <a:bodyPr/>
                     <a:lstStyle/>
                     <a:p>
-                      <a:pPr indent="0" marL="0">
+                      <a:pPr marL="0" indent="0">
                         <a:buNone/>
                       </a:pPr>
                       <a:r>
@@ -6010,6 +5869,11 @@
                     </a:lnB>
                   </a:tcPr>
                 </a:tc>
+                <a:extLst>
+                  <a:ext uri="{0D108BD9-81ED-4DB2-BD59-A6C34878D82A}">
+                    <a16:rowId xmlns:a16="http://schemas.microsoft.com/office/drawing/2014/main" val="10008"/>
+                  </a:ext>
+                </a:extLst>
               </a:tr>
               <a:tr h="516636">
                 <a:tc>
@@ -6017,7 +5881,7 @@
                     <a:bodyPr/>
                     <a:lstStyle/>
                     <a:p>
-                      <a:pPr algn="ctr" indent="0" marL="0">
+                      <a:pPr marL="0" indent="0" algn="ctr">
                         <a:buNone/>
                       </a:pPr>
                       <a:r>
@@ -6085,7 +5949,7 @@
                     <a:bodyPr/>
                     <a:lstStyle/>
                     <a:p>
-                      <a:pPr indent="0" marL="0">
+                      <a:pPr marL="0" indent="0">
                         <a:buNone/>
                       </a:pPr>
                       <a:r>
@@ -6150,7 +6014,7 @@
                     <a:bodyPr/>
                     <a:lstStyle/>
                     <a:p>
-                      <a:pPr indent="0" marL="0">
+                      <a:pPr marL="0" indent="0">
                         <a:buNone/>
                       </a:pPr>
                       <a:r>
@@ -6215,7 +6079,7 @@
                     <a:bodyPr/>
                     <a:lstStyle/>
                     <a:p>
-                      <a:pPr indent="0" marL="0">
+                      <a:pPr marL="0" indent="0">
                         <a:buNone/>
                       </a:pPr>
                       <a:r>
@@ -6275,6 +6139,11 @@
                     </a:lnB>
                   </a:tcPr>
                 </a:tc>
+                <a:extLst>
+                  <a:ext uri="{0D108BD9-81ED-4DB2-BD59-A6C34878D82A}">
+                    <a16:rowId xmlns:a16="http://schemas.microsoft.com/office/drawing/2014/main" val="10009"/>
+                  </a:ext>
+                </a:extLst>
               </a:tr>
             </a:tbl>
           </a:graphicData>
@@ -6301,7 +6170,7 @@
           <a:bodyPr wrap="square" rtlCol="0" anchor="ctr"/>
           <a:lstStyle/>
           <a:p>
-            <a:pPr algn="l" indent="0" marL="0">
+            <a:pPr marL="0" indent="0" algn="l">
               <a:buNone/>
             </a:pPr>
             <a:r>
@@ -6340,7 +6209,7 @@
           <a:bodyPr wrap="square" rtlCol="0" anchor="ctr"/>
           <a:lstStyle/>
           <a:p>
-            <a:pPr algn="r" indent="0" marL="0">
+            <a:pPr marL="0" indent="0" algn="r">
               <a:buNone/>
             </a:pPr>
             <a:r>
@@ -6374,6 +6243,7 @@
         <a:solidFill>
           <a:srgbClr val="FFFFFF"/>
         </a:solidFill>
+        <a:effectLst/>
       </p:bgPr>
     </p:bg>
     <p:spTree>
@@ -6411,11 +6281,11 @@
           <a:bodyPr wrap="square" rtlCol="0" anchor="ctr"/>
           <a:lstStyle/>
           <a:p>
-            <a:pPr indent="0" marL="0">
+            <a:pPr marL="0" indent="0">
               <a:buNone/>
             </a:pPr>
             <a:r>
-              <a:rPr lang="en-US" sz="1200" b="1" spc="200" kern="0" dirty="0">
+              <a:rPr lang="en-US" sz="1200" b="1" kern="0" spc="200" dirty="0">
                 <a:solidFill>
                   <a:srgbClr val="B97E1F"/>
                 </a:solidFill>
@@ -6450,7 +6320,7 @@
           <a:bodyPr wrap="square" rtlCol="0" anchor="ctr"/>
           <a:lstStyle/>
           <a:p>
-            <a:pPr indent="0" marL="0">
+            <a:pPr marL="0" indent="0">
               <a:buNone/>
             </a:pPr>
             <a:r>
@@ -6494,6 +6364,13 @@
             <a:prstDash val="solid"/>
           </a:ln>
         </p:spPr>
+        <p:txBody>
+          <a:bodyPr/>
+          <a:lstStyle/>
+          <a:p>
+            <a:endParaRPr lang="es-PE"/>
+          </a:p>
+        </p:txBody>
       </p:sp>
       <p:sp>
         <p:nvSpPr>
@@ -6516,7 +6393,7 @@
           <a:bodyPr wrap="square" rtlCol="0" anchor="ctr"/>
           <a:lstStyle/>
           <a:p>
-            <a:pPr indent="0" marL="0">
+            <a:pPr marL="0" indent="0">
               <a:buNone/>
             </a:pPr>
             <a:r>
@@ -6555,7 +6432,7 @@
           <a:bodyPr wrap="square" rtlCol="0" anchor="ctr"/>
           <a:lstStyle/>
           <a:p>
-            <a:pPr indent="0" marL="0">
+            <a:pPr marL="0" indent="0">
               <a:lnSpc>
                 <a:spcPct val="105000"/>
               </a:lnSpc>
@@ -6597,7 +6474,7 @@
           <a:bodyPr wrap="square" rtlCol="0" anchor="t"/>
           <a:lstStyle/>
           <a:p>
-            <a:pPr indent="0" marL="0">
+            <a:pPr marL="0" indent="0">
               <a:lnSpc>
                 <a:spcPct val="120000"/>
               </a:lnSpc>
@@ -6644,6 +6521,13 @@
             <a:prstDash val="solid"/>
           </a:ln>
         </p:spPr>
+        <p:txBody>
+          <a:bodyPr/>
+          <a:lstStyle/>
+          <a:p>
+            <a:endParaRPr lang="es-PE"/>
+          </a:p>
+        </p:txBody>
       </p:sp>
       <p:sp>
         <p:nvSpPr>
@@ -6666,7 +6550,7 @@
           <a:bodyPr wrap="square" rtlCol="0" anchor="ctr"/>
           <a:lstStyle/>
           <a:p>
-            <a:pPr indent="0" marL="0">
+            <a:pPr marL="0" indent="0">
               <a:buNone/>
             </a:pPr>
             <a:r>
@@ -6705,7 +6589,7 @@
           <a:bodyPr wrap="square" rtlCol="0" anchor="ctr"/>
           <a:lstStyle/>
           <a:p>
-            <a:pPr indent="0" marL="0">
+            <a:pPr marL="0" indent="0">
               <a:lnSpc>
                 <a:spcPct val="105000"/>
               </a:lnSpc>
@@ -6747,7 +6631,7 @@
           <a:bodyPr wrap="square" rtlCol="0" anchor="t"/>
           <a:lstStyle/>
           <a:p>
-            <a:pPr indent="0" marL="0">
+            <a:pPr marL="0" indent="0">
               <a:lnSpc>
                 <a:spcPct val="120000"/>
               </a:lnSpc>
@@ -6794,6 +6678,13 @@
             <a:prstDash val="solid"/>
           </a:ln>
         </p:spPr>
+        <p:txBody>
+          <a:bodyPr/>
+          <a:lstStyle/>
+          <a:p>
+            <a:endParaRPr lang="es-PE"/>
+          </a:p>
+        </p:txBody>
       </p:sp>
       <p:sp>
         <p:nvSpPr>
@@ -6816,7 +6707,7 @@
           <a:bodyPr wrap="square" rtlCol="0" anchor="ctr"/>
           <a:lstStyle/>
           <a:p>
-            <a:pPr indent="0" marL="0">
+            <a:pPr marL="0" indent="0">
               <a:buNone/>
             </a:pPr>
             <a:r>
@@ -6855,7 +6746,7 @@
           <a:bodyPr wrap="square" rtlCol="0" anchor="ctr"/>
           <a:lstStyle/>
           <a:p>
-            <a:pPr indent="0" marL="0">
+            <a:pPr marL="0" indent="0">
               <a:lnSpc>
                 <a:spcPct val="105000"/>
               </a:lnSpc>
@@ -6897,7 +6788,7 @@
           <a:bodyPr wrap="square" rtlCol="0" anchor="t"/>
           <a:lstStyle/>
           <a:p>
-            <a:pPr indent="0" marL="0">
+            <a:pPr marL="0" indent="0">
               <a:lnSpc>
                 <a:spcPct val="120000"/>
               </a:lnSpc>
@@ -6944,6 +6835,13 @@
             <a:prstDash val="solid"/>
           </a:ln>
         </p:spPr>
+        <p:txBody>
+          <a:bodyPr/>
+          <a:lstStyle/>
+          <a:p>
+            <a:endParaRPr lang="es-PE"/>
+          </a:p>
+        </p:txBody>
       </p:sp>
       <p:sp>
         <p:nvSpPr>
@@ -6966,7 +6864,7 @@
           <a:bodyPr wrap="square" rtlCol="0" anchor="ctr"/>
           <a:lstStyle/>
           <a:p>
-            <a:pPr indent="0" marL="0">
+            <a:pPr marL="0" indent="0">
               <a:buNone/>
             </a:pPr>
             <a:r>
@@ -7005,7 +6903,7 @@
           <a:bodyPr wrap="square" rtlCol="0" anchor="ctr"/>
           <a:lstStyle/>
           <a:p>
-            <a:pPr indent="0" marL="0">
+            <a:pPr marL="0" indent="0">
               <a:lnSpc>
                 <a:spcPct val="105000"/>
               </a:lnSpc>
@@ -7047,7 +6945,7 @@
           <a:bodyPr wrap="square" rtlCol="0" anchor="t"/>
           <a:lstStyle/>
           <a:p>
-            <a:pPr indent="0" marL="0">
+            <a:pPr marL="0" indent="0">
               <a:lnSpc>
                 <a:spcPct val="120000"/>
               </a:lnSpc>
@@ -7089,6 +6987,13 @@
           </a:solidFill>
           <a:ln/>
         </p:spPr>
+        <p:txBody>
+          <a:bodyPr/>
+          <a:lstStyle/>
+          <a:p>
+            <a:endParaRPr lang="es-PE"/>
+          </a:p>
+        </p:txBody>
       </p:sp>
       <p:sp>
         <p:nvSpPr>
@@ -7111,7 +7016,7 @@
           <a:bodyPr wrap="square" rtlCol="0" anchor="ctr"/>
           <a:lstStyle/>
           <a:p>
-            <a:pPr indent="0" marL="0">
+            <a:pPr marL="0" indent="0">
               <a:lnSpc>
                 <a:spcPct val="110000"/>
               </a:lnSpc>
@@ -7128,12 +7033,6 @@
               </a:rPr>
               <a:t>Proyectos derivados, sin fecha en v36:  </a:t>
             </a:r>
-            <a:pPr indent="0" marL="0">
-              <a:lnSpc>
-                <a:spcPct val="110000"/>
-              </a:lnSpc>
-              <a:buNone/>
-            </a:pPr>
             <a:r>
               <a:rPr lang="en-US" sz="1050" dirty="0">
                 <a:solidFill>
@@ -7170,7 +7069,7 @@
           <a:bodyPr wrap="square" rtlCol="0" anchor="ctr"/>
           <a:lstStyle/>
           <a:p>
-            <a:pPr algn="l" indent="0" marL="0">
+            <a:pPr marL="0" indent="0" algn="l">
               <a:buNone/>
             </a:pPr>
             <a:r>
@@ -7209,7 +7108,7 @@
           <a:bodyPr wrap="square" rtlCol="0" anchor="ctr"/>
           <a:lstStyle/>
           <a:p>
-            <a:pPr algn="r" indent="0" marL="0">
+            <a:pPr marL="0" indent="0" algn="r">
               <a:buNone/>
             </a:pPr>
             <a:r>
@@ -7243,6 +7142,7 @@
         <a:solidFill>
           <a:srgbClr val="1B2333"/>
         </a:solidFill>
+        <a:effectLst/>
       </p:bgPr>
     </p:bg>
     <p:spTree>
@@ -7280,11 +7180,11 @@
           <a:bodyPr wrap="square" rtlCol="0" anchor="ctr"/>
           <a:lstStyle/>
           <a:p>
-            <a:pPr indent="0" marL="0">
+            <a:pPr marL="0" indent="0">
               <a:buNone/>
             </a:pPr>
             <a:r>
-              <a:rPr lang="en-US" sz="1200" b="1" spc="200" kern="0" dirty="0">
+              <a:rPr lang="en-US" sz="1200" b="1" kern="0" spc="200" dirty="0">
                 <a:solidFill>
                   <a:srgbClr val="E8A33D"/>
                 </a:solidFill>
@@ -7319,7 +7219,7 @@
           <a:bodyPr wrap="square" rtlCol="0" anchor="ctr"/>
           <a:lstStyle/>
           <a:p>
-            <a:pPr indent="0" marL="0">
+            <a:pPr marL="0" indent="0">
               <a:buNone/>
             </a:pPr>
             <a:r>
@@ -7358,6 +7258,13 @@
           </a:solidFill>
           <a:ln/>
         </p:spPr>
+        <p:txBody>
+          <a:bodyPr/>
+          <a:lstStyle/>
+          <a:p>
+            <a:endParaRPr lang="es-PE"/>
+          </a:p>
+        </p:txBody>
       </p:sp>
       <p:sp>
         <p:nvSpPr>
@@ -7380,7 +7287,7 @@
           <a:bodyPr wrap="square" rtlCol="0" anchor="ctr"/>
           <a:lstStyle/>
           <a:p>
-            <a:pPr algn="ctr" indent="0" marL="0">
+            <a:pPr marL="0" indent="0" algn="ctr">
               <a:buNone/>
             </a:pPr>
             <a:r>
@@ -7419,7 +7326,7 @@
           <a:bodyPr wrap="square" rtlCol="0" anchor="ctr"/>
           <a:lstStyle/>
           <a:p>
-            <a:pPr indent="0" marL="0">
+            <a:pPr marL="0" indent="0">
               <a:lnSpc>
                 <a:spcPct val="115000"/>
               </a:lnSpc>
@@ -7461,6 +7368,13 @@
           </a:solidFill>
           <a:ln/>
         </p:spPr>
+        <p:txBody>
+          <a:bodyPr/>
+          <a:lstStyle/>
+          <a:p>
+            <a:endParaRPr lang="es-PE"/>
+          </a:p>
+        </p:txBody>
       </p:sp>
       <p:sp>
         <p:nvSpPr>
@@ -7483,7 +7397,7 @@
           <a:bodyPr wrap="square" rtlCol="0" anchor="ctr"/>
           <a:lstStyle/>
           <a:p>
-            <a:pPr algn="ctr" indent="0" marL="0">
+            <a:pPr marL="0" indent="0" algn="ctr">
               <a:buNone/>
             </a:pPr>
             <a:r>
@@ -7522,7 +7436,7 @@
           <a:bodyPr wrap="square" rtlCol="0" anchor="ctr"/>
           <a:lstStyle/>
           <a:p>
-            <a:pPr indent="0" marL="0">
+            <a:pPr marL="0" indent="0">
               <a:lnSpc>
                 <a:spcPct val="115000"/>
               </a:lnSpc>
@@ -7564,6 +7478,13 @@
           </a:solidFill>
           <a:ln/>
         </p:spPr>
+        <p:txBody>
+          <a:bodyPr/>
+          <a:lstStyle/>
+          <a:p>
+            <a:endParaRPr lang="es-PE"/>
+          </a:p>
+        </p:txBody>
       </p:sp>
       <p:sp>
         <p:nvSpPr>
@@ -7586,7 +7507,7 @@
           <a:bodyPr wrap="square" rtlCol="0" anchor="ctr"/>
           <a:lstStyle/>
           <a:p>
-            <a:pPr algn="ctr" indent="0" marL="0">
+            <a:pPr marL="0" indent="0" algn="ctr">
               <a:buNone/>
             </a:pPr>
             <a:r>
@@ -7625,7 +7546,7 @@
           <a:bodyPr wrap="square" rtlCol="0" anchor="ctr"/>
           <a:lstStyle/>
           <a:p>
-            <a:pPr indent="0" marL="0">
+            <a:pPr marL="0" indent="0">
               <a:lnSpc>
                 <a:spcPct val="115000"/>
               </a:lnSpc>
@@ -7667,6 +7588,13 @@
           </a:solidFill>
           <a:ln/>
         </p:spPr>
+        <p:txBody>
+          <a:bodyPr/>
+          <a:lstStyle/>
+          <a:p>
+            <a:endParaRPr lang="es-PE"/>
+          </a:p>
+        </p:txBody>
       </p:sp>
       <p:sp>
         <p:nvSpPr>
@@ -7689,7 +7617,7 @@
           <a:bodyPr wrap="square" rtlCol="0" anchor="ctr"/>
           <a:lstStyle/>
           <a:p>
-            <a:pPr algn="ctr" indent="0" marL="0">
+            <a:pPr marL="0" indent="0" algn="ctr">
               <a:buNone/>
             </a:pPr>
             <a:r>
@@ -7728,14 +7656,13 @@
           <a:bodyPr wrap="square" rtlCol="0" anchor="ctr"/>
           <a:lstStyle/>
           <a:p>
-            <a:pPr indent="0" marL="0">
+            <a:pPr>
               <a:lnSpc>
                 <a:spcPct val="115000"/>
               </a:lnSpc>
-              <a:buNone/>
             </a:pPr>
             <a:r>
-              <a:rPr lang="en-US" sz="1350" dirty="0">
+              <a:rPr lang="es-PE" sz="1350" dirty="0">
                 <a:solidFill>
                   <a:srgbClr val="FFFFFF"/>
                 </a:solidFill>
@@ -7743,9 +7670,16 @@
                 <a:ea typeface="Calibri" pitchFamily="34" charset="-122"/>
                 <a:cs typeface="Calibri" pitchFamily="34" charset="-120"/>
               </a:rPr>
-              <a:t>Exigir commits y CHANGELOG al día: 365 archivos sin trazar es un riesgo de pérdida de trabajo, no solo de higiene.</a:t>
+              <a:t>Exigir acceso a los entornos productivos y a las bases de datos necesarias para la operación y soporte de la plataforma.</a:t>
             </a:r>
-            <a:endParaRPr lang="en-US" sz="1350" dirty="0"/>
+            <a:endParaRPr lang="en-US" sz="1350" dirty="0">
+              <a:solidFill>
+                <a:srgbClr val="FFFFFF"/>
+              </a:solidFill>
+              <a:latin typeface="Calibri" pitchFamily="34" charset="0"/>
+              <a:ea typeface="Calibri" pitchFamily="34" charset="-122"/>
+              <a:cs typeface="Calibri" pitchFamily="34" charset="-120"/>
+            </a:endParaRPr>
           </a:p>
         </p:txBody>
       </p:sp>
@@ -7770,6 +7704,13 @@
           </a:solidFill>
           <a:ln/>
         </p:spPr>
+        <p:txBody>
+          <a:bodyPr/>
+          <a:lstStyle/>
+          <a:p>
+            <a:endParaRPr lang="es-PE"/>
+          </a:p>
+        </p:txBody>
       </p:sp>
       <p:sp>
         <p:nvSpPr>
@@ -7792,7 +7733,7 @@
           <a:bodyPr wrap="square" rtlCol="0" anchor="ctr"/>
           <a:lstStyle/>
           <a:p>
-            <a:pPr algn="ctr" indent="0" marL="0">
+            <a:pPr marL="0" indent="0" algn="ctr">
               <a:buNone/>
             </a:pPr>
             <a:r>
@@ -7831,7 +7772,7 @@
           <a:bodyPr wrap="square" rtlCol="0" anchor="ctr"/>
           <a:lstStyle/>
           <a:p>
-            <a:pPr indent="0" marL="0">
+            <a:pPr marL="0" indent="0">
               <a:lnSpc>
                 <a:spcPct val="115000"/>
               </a:lnSpc>
@@ -7873,7 +7814,7 @@
           <a:bodyPr wrap="square" rtlCol="0" anchor="ctr"/>
           <a:lstStyle/>
           <a:p>
-            <a:pPr algn="l" indent="0" marL="0">
+            <a:pPr marL="0" indent="0" algn="l">
               <a:buNone/>
             </a:pPr>
             <a:r>
@@ -7912,7 +7853,7 @@
           <a:bodyPr wrap="square" rtlCol="0" anchor="ctr"/>
           <a:lstStyle/>
           <a:p>
-            <a:pPr algn="r" indent="0" marL="0">
+            <a:pPr marL="0" indent="0" algn="r">
               <a:buNone/>
             </a:pPr>
             <a:r>
@@ -7927,6 +7868,112 @@
               <a:t>13</a:t>
             </a:r>
             <a:endParaRPr lang="en-US" sz="900" dirty="0"/>
+          </a:p>
+        </p:txBody>
+      </p:sp>
+      <p:sp>
+        <p:nvSpPr>
+          <p:cNvPr id="22" name="Shape 14">
+            <a:extLst>
+              <a:ext uri="{FF2B5EF4-FFF2-40B4-BE49-F238E27FC236}">
+                <a16:creationId xmlns:a16="http://schemas.microsoft.com/office/drawing/2014/main" id="{2C6F0EC3-ED0A-A174-BD41-224A9C9B7F04}"/>
+              </a:ext>
+            </a:extLst>
+          </p:cNvPr>
+          <p:cNvSpPr/>
+          <p:nvPr/>
+        </p:nvSpPr>
+        <p:spPr>
+          <a:xfrm>
+            <a:off x="502920" y="5971032"/>
+            <a:ext cx="457200" cy="457200"/>
+          </a:xfrm>
+          <a:prstGeom prst="roundRect">
+            <a:avLst>
+              <a:gd name="adj" fmla="val 16000"/>
+            </a:avLst>
+          </a:prstGeom>
+          <a:solidFill>
+            <a:srgbClr val="E8A33D"/>
+          </a:solidFill>
+          <a:ln/>
+        </p:spPr>
+        <p:txBody>
+          <a:bodyPr/>
+          <a:lstStyle/>
+          <a:p>
+            <a:pPr algn="ctr"/>
+            <a:r>
+              <a:rPr lang="es-MX" b="1" dirty="0">
+                <a:solidFill>
+                  <a:srgbClr val="1B2333"/>
+                </a:solidFill>
+                <a:latin typeface="Cambria" pitchFamily="34" charset="0"/>
+                <a:ea typeface="Cambria" pitchFamily="34" charset="-122"/>
+              </a:rPr>
+              <a:t>6</a:t>
+            </a:r>
+            <a:endParaRPr lang="es-PE" b="1" dirty="0">
+              <a:solidFill>
+                <a:srgbClr val="1B2333"/>
+              </a:solidFill>
+              <a:latin typeface="Cambria" pitchFamily="34" charset="0"/>
+              <a:ea typeface="Cambria" pitchFamily="34" charset="-122"/>
+            </a:endParaRPr>
+          </a:p>
+        </p:txBody>
+      </p:sp>
+      <p:sp>
+        <p:nvSpPr>
+          <p:cNvPr id="24" name="Text 16">
+            <a:extLst>
+              <a:ext uri="{FF2B5EF4-FFF2-40B4-BE49-F238E27FC236}">
+                <a16:creationId xmlns:a16="http://schemas.microsoft.com/office/drawing/2014/main" id="{AE830790-981E-62CE-0A50-AADEA7C538D9}"/>
+              </a:ext>
+            </a:extLst>
+          </p:cNvPr>
+          <p:cNvSpPr/>
+          <p:nvPr/>
+        </p:nvSpPr>
+        <p:spPr>
+          <a:xfrm>
+            <a:off x="1188720" y="5808081"/>
+            <a:ext cx="9692640" cy="685800"/>
+          </a:xfrm>
+          <a:prstGeom prst="rect">
+            <a:avLst/>
+          </a:prstGeom>
+          <a:noFill/>
+          <a:ln/>
+        </p:spPr>
+        <p:txBody>
+          <a:bodyPr wrap="square" rtlCol="0" anchor="ctr"/>
+          <a:lstStyle/>
+          <a:p>
+            <a:pPr>
+              <a:lnSpc>
+                <a:spcPct val="115000"/>
+              </a:lnSpc>
+            </a:pPr>
+            <a:r>
+              <a:rPr lang="es-PE" sz="1350" dirty="0">
+                <a:solidFill>
+                  <a:srgbClr val="FFFFFF"/>
+                </a:solidFill>
+                <a:latin typeface="Calibri" pitchFamily="34" charset="0"/>
+                <a:ea typeface="Calibri" pitchFamily="34" charset="-122"/>
+                <a:cs typeface="Calibri" pitchFamily="34" charset="-120"/>
+              </a:rPr>
+              <a:t>Contar con soporte y recursos de inteligencia artificial (IA) acordes con la complejidad y los requerimientos del proyecto.</a:t>
+            </a:r>
+            <a:endParaRPr lang="en-US" sz="1350" dirty="0">
+              <a:solidFill>
+                <a:srgbClr val="FFFFFF"/>
+              </a:solidFill>
+              <a:latin typeface="Calibri" pitchFamily="34" charset="0"/>
+              <a:ea typeface="Calibri" pitchFamily="34" charset="-122"/>
+              <a:cs typeface="Calibri" pitchFamily="34" charset="-120"/>
+            </a:endParaRPr>
           </a:p>
         </p:txBody>
       </p:sp>
@@ -7946,6 +7993,7 @@
         <a:solidFill>
           <a:srgbClr val="1B2333"/>
         </a:solidFill>
+        <a:effectLst/>
       </p:bgPr>
     </p:bg>
     <p:spTree>
@@ -7981,6 +8029,13 @@
           </a:solidFill>
           <a:ln/>
         </p:spPr>
+        <p:txBody>
+          <a:bodyPr/>
+          <a:lstStyle/>
+          <a:p>
+            <a:endParaRPr lang="es-PE"/>
+          </a:p>
+        </p:txBody>
       </p:sp>
       <p:sp>
         <p:nvSpPr>
@@ -8001,6 +8056,13 @@
           </a:solidFill>
           <a:ln/>
         </p:spPr>
+        <p:txBody>
+          <a:bodyPr/>
+          <a:lstStyle/>
+          <a:p>
+            <a:endParaRPr lang="es-PE"/>
+          </a:p>
+        </p:txBody>
       </p:sp>
       <p:sp>
         <p:nvSpPr>
@@ -8023,11 +8085,11 @@
           <a:bodyPr wrap="square" rtlCol="0" anchor="ctr"/>
           <a:lstStyle/>
           <a:p>
-            <a:pPr indent="0" marL="0">
+            <a:pPr marL="0" indent="0">
               <a:buNone/>
             </a:pPr>
             <a:r>
-              <a:rPr lang="en-US" sz="1400" b="1" spc="200" kern="0" dirty="0">
+              <a:rPr lang="en-US" sz="1400" b="1" kern="0" spc="200" dirty="0">
                 <a:solidFill>
                   <a:srgbClr val="E8A33D"/>
                 </a:solidFill>
@@ -8062,7 +8124,7 @@
           <a:bodyPr wrap="square" rtlCol="0" anchor="ctr"/>
           <a:lstStyle/>
           <a:p>
-            <a:pPr indent="0" marL="0">
+            <a:pPr marL="0" indent="0">
               <a:buNone/>
             </a:pPr>
             <a:r>
@@ -8101,7 +8163,7 @@
           <a:bodyPr wrap="square" rtlCol="0" anchor="ctr"/>
           <a:lstStyle/>
           <a:p>
-            <a:pPr indent="0" marL="0">
+            <a:pPr marL="0" indent="0">
               <a:buNone/>
             </a:pPr>
             <a:r>
@@ -8141,6 +8203,13 @@
             <a:prstDash val="solid"/>
           </a:ln>
         </p:spPr>
+        <p:txBody>
+          <a:bodyPr/>
+          <a:lstStyle/>
+          <a:p>
+            <a:endParaRPr lang="es-PE"/>
+          </a:p>
+        </p:txBody>
       </p:sp>
       <p:sp>
         <p:nvSpPr>
@@ -8163,7 +8232,7 @@
           <a:bodyPr wrap="square" rtlCol="0" anchor="ctr"/>
           <a:lstStyle/>
           <a:p>
-            <a:pPr indent="0" marL="0">
+            <a:pPr marL="0" indent="0">
               <a:lnSpc>
                 <a:spcPct val="130000"/>
               </a:lnSpc>
@@ -8183,7 +8252,7 @@
             <a:endParaRPr lang="en-US" sz="1100" dirty="0"/>
           </a:p>
           <a:p>
-            <a:pPr indent="0" marL="0">
+            <a:pPr marL="0" indent="0">
               <a:lnSpc>
                 <a:spcPct val="130000"/>
               </a:lnSpc>
@@ -8198,12 +8267,12 @@
                 <a:ea typeface="Calibri" pitchFamily="34" charset="-122"/>
                 <a:cs typeface="Calibri" pitchFamily="34" charset="-120"/>
               </a:rPr>
-              <a:t>docs/decisions/README.md (ADR-000–128)  ·  specs/REGISTRY.md  ·  specs/BACKLOG.md</a:t>
+              <a:t>docs/decisions/README.md (ADR-000–129)  ·  specs/REGISTRY.md  ·  specs/BACKLOG.md</a:t>
             </a:r>
             <a:endParaRPr lang="en-US" sz="1100" dirty="0"/>
           </a:p>
           <a:p>
-            <a:pPr indent="0" marL="0">
+            <a:pPr marL="0" indent="0">
               <a:lnSpc>
                 <a:spcPct val="130000"/>
               </a:lnSpc>
@@ -8245,7 +8314,7 @@
           <a:bodyPr wrap="square" rtlCol="0" anchor="ctr"/>
           <a:lstStyle/>
           <a:p>
-            <a:pPr algn="l" indent="0" marL="0">
+            <a:pPr marL="0" indent="0" algn="l">
               <a:buNone/>
             </a:pPr>
             <a:r>
@@ -8284,7 +8353,7 @@
           <a:bodyPr wrap="square" rtlCol="0" anchor="ctr"/>
           <a:lstStyle/>
           <a:p>
-            <a:pPr algn="r" indent="0" marL="0">
+            <a:pPr marL="0" indent="0" algn="r">
               <a:buNone/>
             </a:pPr>
             <a:r>
@@ -8318,6 +8387,7 @@
         <a:solidFill>
           <a:srgbClr val="FFFFFF"/>
         </a:solidFill>
+        <a:effectLst/>
       </p:bgPr>
     </p:bg>
     <p:spTree>
@@ -8355,11 +8425,11 @@
           <a:bodyPr wrap="square" rtlCol="0" anchor="ctr"/>
           <a:lstStyle/>
           <a:p>
-            <a:pPr indent="0" marL="0">
+            <a:pPr marL="0" indent="0">
               <a:buNone/>
             </a:pPr>
             <a:r>
-              <a:rPr lang="en-US" sz="1200" b="1" spc="200" kern="0" dirty="0">
+              <a:rPr lang="en-US" sz="1200" b="1" kern="0" spc="200" dirty="0">
                 <a:solidFill>
                   <a:srgbClr val="B97E1F"/>
                 </a:solidFill>
@@ -8394,7 +8464,7 @@
           <a:bodyPr wrap="square" rtlCol="0" anchor="ctr"/>
           <a:lstStyle/>
           <a:p>
-            <a:pPr indent="0" marL="0">
+            <a:pPr marL="0" indent="0">
               <a:buNone/>
             </a:pPr>
             <a:r>
@@ -8438,6 +8508,13 @@
             <a:prstDash val="solid"/>
           </a:ln>
         </p:spPr>
+        <p:txBody>
+          <a:bodyPr/>
+          <a:lstStyle/>
+          <a:p>
+            <a:endParaRPr lang="es-PE"/>
+          </a:p>
+        </p:txBody>
       </p:sp>
       <p:sp>
         <p:nvSpPr>
@@ -8460,7 +8537,7 @@
           <a:bodyPr wrap="square" rtlCol="0" anchor="ctr"/>
           <a:lstStyle/>
           <a:p>
-            <a:pPr algn="l" indent="0" marL="0">
+            <a:pPr marL="0" indent="0" algn="l">
               <a:buNone/>
             </a:pPr>
             <a:r>
@@ -8472,7 +8549,7 @@
                 <a:ea typeface="Cambria" pitchFamily="34" charset="-122"/>
                 <a:cs typeface="Cambria" pitchFamily="34" charset="-120"/>
               </a:rPr>
-              <a:t>129</a:t>
+              <a:t>130</a:t>
             </a:r>
             <a:endParaRPr lang="en-US" sz="4000" dirty="0"/>
           </a:p>
@@ -8499,7 +8576,7 @@
           <a:bodyPr wrap="square" rtlCol="0" anchor="ctr"/>
           <a:lstStyle/>
           <a:p>
-            <a:pPr algn="l" indent="0" marL="0">
+            <a:pPr marL="0" indent="0" algn="l">
               <a:buNone/>
             </a:pPr>
             <a:r>
@@ -8511,7 +8588,7 @@
                 <a:ea typeface="Calibri" pitchFamily="34" charset="-122"/>
                 <a:cs typeface="Calibri" pitchFamily="34" charset="-120"/>
               </a:rPr>
-              <a:t>ADR (000–128)</a:t>
+              <a:t>ADR (000–129)</a:t>
             </a:r>
             <a:endParaRPr lang="en-US" sz="1300" dirty="0"/>
           </a:p>
@@ -8538,7 +8615,7 @@
           <a:bodyPr wrap="square" rtlCol="0" anchor="t"/>
           <a:lstStyle/>
           <a:p>
-            <a:pPr algn="l" indent="0" marL="0">
+            <a:pPr marL="0" indent="0" algn="l">
               <a:buNone/>
             </a:pPr>
             <a:r>
@@ -8550,7 +8627,7 @@
                 <a:ea typeface="Calibri" pitchFamily="34" charset="-122"/>
                 <a:cs typeface="Calibri" pitchFamily="34" charset="-120"/>
               </a:rPr>
-              <a:t>decisiones arquitectónicas registradas; +17 en los últimos 3 días</a:t>
+              <a:t>decisiones arquitectónicas registradas; +18 en los últimos 3 días</a:t>
             </a:r>
             <a:endParaRPr lang="en-US" sz="950" dirty="0"/>
           </a:p>
@@ -8582,6 +8659,13 @@
             <a:prstDash val="solid"/>
           </a:ln>
         </p:spPr>
+        <p:txBody>
+          <a:bodyPr/>
+          <a:lstStyle/>
+          <a:p>
+            <a:endParaRPr lang="es-PE"/>
+          </a:p>
+        </p:txBody>
       </p:sp>
       <p:sp>
         <p:nvSpPr>
@@ -8604,7 +8688,7 @@
           <a:bodyPr wrap="square" rtlCol="0" anchor="ctr"/>
           <a:lstStyle/>
           <a:p>
-            <a:pPr algn="l" indent="0" marL="0">
+            <a:pPr marL="0" indent="0" algn="l">
               <a:buNone/>
             </a:pPr>
             <a:r>
@@ -8643,7 +8727,7 @@
           <a:bodyPr wrap="square" rtlCol="0" anchor="ctr"/>
           <a:lstStyle/>
           <a:p>
-            <a:pPr algn="l" indent="0" marL="0">
+            <a:pPr marL="0" indent="0" algn="l">
               <a:buNone/>
             </a:pPr>
             <a:r>
@@ -8682,7 +8766,7 @@
           <a:bodyPr wrap="square" rtlCol="0" anchor="t"/>
           <a:lstStyle/>
           <a:p>
-            <a:pPr algn="l" indent="0" marL="0">
+            <a:pPr marL="0" indent="0" algn="l">
               <a:buNone/>
             </a:pPr>
             <a:r>
@@ -8726,6 +8810,13 @@
             <a:prstDash val="solid"/>
           </a:ln>
         </p:spPr>
+        <p:txBody>
+          <a:bodyPr/>
+          <a:lstStyle/>
+          <a:p>
+            <a:endParaRPr lang="es-PE"/>
+          </a:p>
+        </p:txBody>
       </p:sp>
       <p:sp>
         <p:nvSpPr>
@@ -8748,7 +8839,7 @@
           <a:bodyPr wrap="square" rtlCol="0" anchor="ctr"/>
           <a:lstStyle/>
           <a:p>
-            <a:pPr algn="l" indent="0" marL="0">
+            <a:pPr marL="0" indent="0" algn="l">
               <a:buNone/>
             </a:pPr>
             <a:r>
@@ -8787,7 +8878,7 @@
           <a:bodyPr wrap="square" rtlCol="0" anchor="ctr"/>
           <a:lstStyle/>
           <a:p>
-            <a:pPr algn="l" indent="0" marL="0">
+            <a:pPr marL="0" indent="0" algn="l">
               <a:buNone/>
             </a:pPr>
             <a:r>
@@ -8826,7 +8917,7 @@
           <a:bodyPr wrap="square" rtlCol="0" anchor="t"/>
           <a:lstStyle/>
           <a:p>
-            <a:pPr algn="l" indent="0" marL="0">
+            <a:pPr marL="0" indent="0" algn="l">
               <a:buNone/>
             </a:pPr>
             <a:r>
@@ -8870,6 +8961,13 @@
             <a:prstDash val="solid"/>
           </a:ln>
         </p:spPr>
+        <p:txBody>
+          <a:bodyPr/>
+          <a:lstStyle/>
+          <a:p>
+            <a:endParaRPr lang="es-PE"/>
+          </a:p>
+        </p:txBody>
       </p:sp>
       <p:sp>
         <p:nvSpPr>
@@ -8892,7 +8990,7 @@
           <a:bodyPr wrap="square" rtlCol="0" anchor="ctr"/>
           <a:lstStyle/>
           <a:p>
-            <a:pPr algn="l" indent="0" marL="0">
+            <a:pPr marL="0" indent="0" algn="l">
               <a:buNone/>
             </a:pPr>
             <a:r>
@@ -8931,7 +9029,7 @@
           <a:bodyPr wrap="square" rtlCol="0" anchor="ctr"/>
           <a:lstStyle/>
           <a:p>
-            <a:pPr algn="l" indent="0" marL="0">
+            <a:pPr marL="0" indent="0" algn="l">
               <a:buNone/>
             </a:pPr>
             <a:r>
@@ -8970,7 +9068,7 @@
           <a:bodyPr wrap="square" rtlCol="0" anchor="t"/>
           <a:lstStyle/>
           <a:p>
-            <a:pPr algn="l" indent="0" marL="0">
+            <a:pPr marL="0" indent="0" algn="l">
               <a:buNone/>
             </a:pPr>
             <a:r>
@@ -9009,7 +9107,7 @@
           <a:bodyPr wrap="square" rtlCol="0" anchor="ctr"/>
           <a:lstStyle/>
           <a:p>
-            <a:pPr indent="0" marL="0">
+            <a:pPr marL="0" indent="0">
               <a:buNone/>
             </a:pPr>
             <a:r>
@@ -9115,7 +9213,7 @@
                 <a:ea typeface="Calibri" pitchFamily="34" charset="-122"/>
                 <a:cs typeface="Calibri" pitchFamily="34" charset="-120"/>
               </a:rPr>
-              <a:t>Entre el 18 y el 21 de agosto se agregaron 17 ADR nuevos (112–128), incluyendo un módulo completo — bot de WhatsApp / soporte — que hoy no tiene SPEC ni sprint asignado en el cronograma v36.</a:t>
+              <a:t>Entre el 18 y el 21 de agosto se agregaron 18 ADR nuevos (112–129), incluyendo un módulo completo — bot de WhatsApp / soporte, con adjuntos docx/pptx/pdf/jpg/png, CV vía web y lectura QR/OCR — que hoy no tiene SPEC ni sprint asignado en el cronograma v36.</a:t>
             </a:r>
             <a:endParaRPr lang="en-US" sz="1250" dirty="0"/>
           </a:p>
@@ -9166,7 +9264,7 @@
           <a:bodyPr wrap="square" rtlCol="0" anchor="ctr"/>
           <a:lstStyle/>
           <a:p>
-            <a:pPr algn="l" indent="0" marL="0">
+            <a:pPr marL="0" indent="0" algn="l">
               <a:buNone/>
             </a:pPr>
             <a:r>
@@ -9205,7 +9303,7 @@
           <a:bodyPr wrap="square" rtlCol="0" anchor="ctr"/>
           <a:lstStyle/>
           <a:p>
-            <a:pPr algn="r" indent="0" marL="0">
+            <a:pPr marL="0" indent="0" algn="r">
               <a:buNone/>
             </a:pPr>
             <a:r>
@@ -9239,6 +9337,7 @@
         <a:solidFill>
           <a:srgbClr val="FFFFFF"/>
         </a:solidFill>
+        <a:effectLst/>
       </p:bgPr>
     </p:bg>
     <p:spTree>
@@ -9276,11 +9375,11 @@
           <a:bodyPr wrap="square" rtlCol="0" anchor="ctr"/>
           <a:lstStyle/>
           <a:p>
-            <a:pPr indent="0" marL="0">
+            <a:pPr marL="0" indent="0">
               <a:buNone/>
             </a:pPr>
             <a:r>
-              <a:rPr lang="en-US" sz="1200" b="1" spc="200" kern="0" dirty="0">
+              <a:rPr lang="en-US" sz="1200" b="1" kern="0" spc="200" dirty="0">
                 <a:solidFill>
                   <a:srgbClr val="B97E1F"/>
                 </a:solidFill>
@@ -9315,7 +9414,7 @@
           <a:bodyPr wrap="square" rtlCol="0" anchor="ctr"/>
           <a:lstStyle/>
           <a:p>
-            <a:pPr indent="0" marL="0">
+            <a:pPr marL="0" indent="0">
               <a:buNone/>
             </a:pPr>
             <a:r>
@@ -9352,6 +9451,13 @@
           </a:solidFill>
           <a:ln/>
         </p:spPr>
+        <p:txBody>
+          <a:bodyPr/>
+          <a:lstStyle/>
+          <a:p>
+            <a:endParaRPr lang="es-PE"/>
+          </a:p>
+        </p:txBody>
       </p:sp>
       <p:sp>
         <p:nvSpPr>
@@ -9374,7 +9480,7 @@
           <a:bodyPr wrap="square" rtlCol="0" anchor="ctr"/>
           <a:lstStyle/>
           <a:p>
-            <a:pPr algn="ctr" indent="0" marL="0">
+            <a:pPr marL="0" indent="0" algn="ctr">
               <a:buNone/>
             </a:pPr>
             <a:r>
@@ -9413,7 +9519,7 @@
           <a:bodyPr wrap="square" rtlCol="0" anchor="ctr"/>
           <a:lstStyle/>
           <a:p>
-            <a:pPr indent="0" marL="0">
+            <a:pPr marL="0" indent="0">
               <a:buNone/>
             </a:pPr>
             <a:r>
@@ -9452,7 +9558,7 @@
           <a:bodyPr wrap="square" rtlCol="0" anchor="ctr"/>
           <a:lstStyle/>
           <a:p>
-            <a:pPr indent="0" marL="0">
+            <a:pPr marL="0" indent="0">
               <a:lnSpc>
                 <a:spcPct val="115000"/>
               </a:lnSpc>
@@ -9492,6 +9598,13 @@
           </a:solidFill>
           <a:ln/>
         </p:spPr>
+        <p:txBody>
+          <a:bodyPr/>
+          <a:lstStyle/>
+          <a:p>
+            <a:endParaRPr lang="es-PE"/>
+          </a:p>
+        </p:txBody>
       </p:sp>
       <p:sp>
         <p:nvSpPr>
@@ -9514,7 +9627,7 @@
           <a:bodyPr wrap="square" rtlCol="0" anchor="ctr"/>
           <a:lstStyle/>
           <a:p>
-            <a:pPr algn="ctr" indent="0" marL="0">
+            <a:pPr marL="0" indent="0" algn="ctr">
               <a:buNone/>
             </a:pPr>
             <a:r>
@@ -9553,7 +9666,7 @@
           <a:bodyPr wrap="square" rtlCol="0" anchor="ctr"/>
           <a:lstStyle/>
           <a:p>
-            <a:pPr indent="0" marL="0">
+            <a:pPr marL="0" indent="0">
               <a:buNone/>
             </a:pPr>
             <a:r>
@@ -9592,7 +9705,7 @@
           <a:bodyPr wrap="square" rtlCol="0" anchor="ctr"/>
           <a:lstStyle/>
           <a:p>
-            <a:pPr indent="0" marL="0">
+            <a:pPr marL="0" indent="0">
               <a:lnSpc>
                 <a:spcPct val="115000"/>
               </a:lnSpc>
@@ -9632,6 +9745,13 @@
           </a:solidFill>
           <a:ln/>
         </p:spPr>
+        <p:txBody>
+          <a:bodyPr/>
+          <a:lstStyle/>
+          <a:p>
+            <a:endParaRPr lang="es-PE"/>
+          </a:p>
+        </p:txBody>
       </p:sp>
       <p:sp>
         <p:nvSpPr>
@@ -9654,7 +9774,7 @@
           <a:bodyPr wrap="square" rtlCol="0" anchor="ctr"/>
           <a:lstStyle/>
           <a:p>
-            <a:pPr algn="ctr" indent="0" marL="0">
+            <a:pPr marL="0" indent="0" algn="ctr">
               <a:buNone/>
             </a:pPr>
             <a:r>
@@ -9693,7 +9813,7 @@
           <a:bodyPr wrap="square" rtlCol="0" anchor="ctr"/>
           <a:lstStyle/>
           <a:p>
-            <a:pPr indent="0" marL="0">
+            <a:pPr marL="0" indent="0">
               <a:buNone/>
             </a:pPr>
             <a:r>
@@ -9732,7 +9852,7 @@
           <a:bodyPr wrap="square" rtlCol="0" anchor="ctr"/>
           <a:lstStyle/>
           <a:p>
-            <a:pPr indent="0" marL="0">
+            <a:pPr marL="0" indent="0">
               <a:lnSpc>
                 <a:spcPct val="115000"/>
               </a:lnSpc>
@@ -9779,6 +9899,13 @@
             <a:prstDash val="solid"/>
           </a:ln>
         </p:spPr>
+        <p:txBody>
+          <a:bodyPr/>
+          <a:lstStyle/>
+          <a:p>
+            <a:endParaRPr lang="es-PE"/>
+          </a:p>
+        </p:txBody>
       </p:sp>
       <p:sp>
         <p:nvSpPr>
@@ -9801,7 +9928,7 @@
           <a:bodyPr wrap="square" rtlCol="0" anchor="ctr"/>
           <a:lstStyle/>
           <a:p>
-            <a:pPr indent="0" marL="0">
+            <a:pPr marL="0" indent="0">
               <a:buNone/>
             </a:pPr>
             <a:r>
@@ -9840,7 +9967,7 @@
           <a:bodyPr wrap="square" rtlCol="0" anchor="ctr"/>
           <a:lstStyle/>
           <a:p>
-            <a:pPr algn="l" indent="0" marL="0">
+            <a:pPr marL="0" indent="0" algn="l">
               <a:buNone/>
             </a:pPr>
             <a:r>
@@ -9879,7 +10006,7 @@
           <a:bodyPr wrap="square" rtlCol="0" anchor="ctr"/>
           <a:lstStyle/>
           <a:p>
-            <a:pPr algn="r" indent="0" marL="0">
+            <a:pPr marL="0" indent="0" algn="r">
               <a:buNone/>
             </a:pPr>
             <a:r>
@@ -9913,6 +10040,7 @@
         <a:solidFill>
           <a:srgbClr val="FFFFFF"/>
         </a:solidFill>
+        <a:effectLst/>
       </p:bgPr>
     </p:bg>
     <p:spTree>
@@ -9950,11 +10078,11 @@
           <a:bodyPr wrap="square" rtlCol="0" anchor="ctr"/>
           <a:lstStyle/>
           <a:p>
-            <a:pPr indent="0" marL="0">
+            <a:pPr marL="0" indent="0">
               <a:buNone/>
             </a:pPr>
             <a:r>
-              <a:rPr lang="en-US" sz="1200" b="1" spc="200" kern="0" dirty="0">
+              <a:rPr lang="en-US" sz="1200" b="1" kern="0" spc="200" dirty="0">
                 <a:solidFill>
                   <a:srgbClr val="B97E1F"/>
                 </a:solidFill>
@@ -9989,7 +10117,7 @@
           <a:bodyPr wrap="square" rtlCol="0" anchor="ctr"/>
           <a:lstStyle/>
           <a:p>
-            <a:pPr indent="0" marL="0">
+            <a:pPr marL="0" indent="0">
               <a:buNone/>
             </a:pPr>
             <a:r>
@@ -10028,6 +10156,13 @@
           </a:solidFill>
           <a:ln/>
         </p:spPr>
+        <p:txBody>
+          <a:bodyPr/>
+          <a:lstStyle/>
+          <a:p>
+            <a:endParaRPr lang="es-PE"/>
+          </a:p>
+        </p:txBody>
       </p:sp>
       <p:sp>
         <p:nvSpPr>
@@ -10050,7 +10185,7 @@
           <a:bodyPr wrap="square" rtlCol="0" anchor="ctr"/>
           <a:lstStyle/>
           <a:p>
-            <a:pPr algn="ctr" indent="0" marL="0">
+            <a:pPr marL="0" indent="0" algn="ctr">
               <a:buNone/>
             </a:pPr>
             <a:r>
@@ -10089,7 +10224,7 @@
           <a:bodyPr wrap="square" rtlCol="0" anchor="t"/>
           <a:lstStyle/>
           <a:p>
-            <a:pPr algn="ctr" indent="0" marL="0">
+            <a:pPr marL="0" indent="0" algn="ctr">
               <a:buNone/>
             </a:pPr>
             <a:r>
@@ -10128,7 +10263,7 @@
           <a:bodyPr wrap="square" rtlCol="0" anchor="ctr"/>
           <a:lstStyle/>
           <a:p>
-            <a:pPr algn="ctr" indent="0" marL="0">
+            <a:pPr marL="0" indent="0" algn="ctr">
               <a:buNone/>
             </a:pPr>
             <a:r>
@@ -10167,6 +10302,13 @@
           </a:solidFill>
           <a:ln/>
         </p:spPr>
+        <p:txBody>
+          <a:bodyPr/>
+          <a:lstStyle/>
+          <a:p>
+            <a:endParaRPr lang="es-PE"/>
+          </a:p>
+        </p:txBody>
       </p:sp>
       <p:sp>
         <p:nvSpPr>
@@ -10189,7 +10331,7 @@
           <a:bodyPr wrap="square" rtlCol="0" anchor="ctr"/>
           <a:lstStyle/>
           <a:p>
-            <a:pPr algn="ctr" indent="0" marL="0">
+            <a:pPr marL="0" indent="0" algn="ctr">
               <a:buNone/>
             </a:pPr>
             <a:r>
@@ -10228,7 +10370,7 @@
           <a:bodyPr wrap="square" rtlCol="0" anchor="t"/>
           <a:lstStyle/>
           <a:p>
-            <a:pPr algn="ctr" indent="0" marL="0">
+            <a:pPr marL="0" indent="0" algn="ctr">
               <a:buNone/>
             </a:pPr>
             <a:r>
@@ -10267,7 +10409,7 @@
           <a:bodyPr wrap="square" rtlCol="0" anchor="ctr"/>
           <a:lstStyle/>
           <a:p>
-            <a:pPr algn="ctr" indent="0" marL="0">
+            <a:pPr marL="0" indent="0" algn="ctr">
               <a:buNone/>
             </a:pPr>
             <a:r>
@@ -10306,6 +10448,13 @@
           </a:solidFill>
           <a:ln/>
         </p:spPr>
+        <p:txBody>
+          <a:bodyPr/>
+          <a:lstStyle/>
+          <a:p>
+            <a:endParaRPr lang="es-PE"/>
+          </a:p>
+        </p:txBody>
       </p:sp>
       <p:sp>
         <p:nvSpPr>
@@ -10328,7 +10477,7 @@
           <a:bodyPr wrap="square" rtlCol="0" anchor="ctr"/>
           <a:lstStyle/>
           <a:p>
-            <a:pPr algn="ctr" indent="0" marL="0">
+            <a:pPr marL="0" indent="0" algn="ctr">
               <a:buNone/>
             </a:pPr>
             <a:r>
@@ -10367,7 +10516,7 @@
           <a:bodyPr wrap="square" rtlCol="0" anchor="t"/>
           <a:lstStyle/>
           <a:p>
-            <a:pPr algn="ctr" indent="0" marL="0">
+            <a:pPr marL="0" indent="0" algn="ctr">
               <a:buNone/>
             </a:pPr>
             <a:r>
@@ -10406,7 +10555,7 @@
           <a:bodyPr wrap="square" rtlCol="0" anchor="ctr"/>
           <a:lstStyle/>
           <a:p>
-            <a:pPr algn="ctr" indent="0" marL="0">
+            <a:pPr marL="0" indent="0" algn="ctr">
               <a:buNone/>
             </a:pPr>
             <a:r>
@@ -10445,6 +10594,13 @@
           </a:solidFill>
           <a:ln/>
         </p:spPr>
+        <p:txBody>
+          <a:bodyPr/>
+          <a:lstStyle/>
+          <a:p>
+            <a:endParaRPr lang="es-PE"/>
+          </a:p>
+        </p:txBody>
       </p:sp>
       <p:sp>
         <p:nvSpPr>
@@ -10467,7 +10623,7 @@
           <a:bodyPr wrap="square" rtlCol="0" anchor="ctr"/>
           <a:lstStyle/>
           <a:p>
-            <a:pPr algn="ctr" indent="0" marL="0">
+            <a:pPr marL="0" indent="0" algn="ctr">
               <a:buNone/>
             </a:pPr>
             <a:r>
@@ -10506,7 +10662,7 @@
           <a:bodyPr wrap="square" rtlCol="0" anchor="t"/>
           <a:lstStyle/>
           <a:p>
-            <a:pPr algn="ctr" indent="0" marL="0">
+            <a:pPr marL="0" indent="0" algn="ctr">
               <a:buNone/>
             </a:pPr>
             <a:r>
@@ -10545,7 +10701,7 @@
           <a:bodyPr wrap="square" rtlCol="0" anchor="ctr"/>
           <a:lstStyle/>
           <a:p>
-            <a:pPr algn="ctr" indent="0" marL="0">
+            <a:pPr marL="0" indent="0" algn="ctr">
               <a:buNone/>
             </a:pPr>
             <a:r>
@@ -10584,6 +10740,13 @@
           </a:solidFill>
           <a:ln/>
         </p:spPr>
+        <p:txBody>
+          <a:bodyPr/>
+          <a:lstStyle/>
+          <a:p>
+            <a:endParaRPr lang="es-PE"/>
+          </a:p>
+        </p:txBody>
       </p:sp>
       <p:sp>
         <p:nvSpPr>
@@ -10606,7 +10769,7 @@
           <a:bodyPr wrap="square" rtlCol="0" anchor="ctr"/>
           <a:lstStyle/>
           <a:p>
-            <a:pPr algn="ctr" indent="0" marL="0">
+            <a:pPr marL="0" indent="0" algn="ctr">
               <a:buNone/>
             </a:pPr>
             <a:r>
@@ -10645,7 +10808,7 @@
           <a:bodyPr wrap="square" rtlCol="0" anchor="t"/>
           <a:lstStyle/>
           <a:p>
-            <a:pPr algn="ctr" indent="0" marL="0">
+            <a:pPr marL="0" indent="0" algn="ctr">
               <a:buNone/>
             </a:pPr>
             <a:r>
@@ -10684,7 +10847,7 @@
           <a:bodyPr wrap="square" rtlCol="0" anchor="ctr"/>
           <a:lstStyle/>
           <a:p>
-            <a:pPr algn="ctr" indent="0" marL="0">
+            <a:pPr marL="0" indent="0" algn="ctr">
               <a:buNone/>
             </a:pPr>
             <a:r>
@@ -10723,7 +10886,7 @@
           <a:bodyPr wrap="square" rtlCol="0" anchor="ctr"/>
           <a:lstStyle/>
           <a:p>
-            <a:pPr algn="ctr" indent="0" marL="0">
+            <a:pPr marL="0" indent="0" algn="ctr">
               <a:buNone/>
             </a:pPr>
             <a:r>
@@ -10762,6 +10925,13 @@
           </a:solidFill>
           <a:ln/>
         </p:spPr>
+        <p:txBody>
+          <a:bodyPr/>
+          <a:lstStyle/>
+          <a:p>
+            <a:endParaRPr lang="es-PE"/>
+          </a:p>
+        </p:txBody>
       </p:sp>
       <p:sp>
         <p:nvSpPr>
@@ -10784,7 +10954,7 @@
           <a:bodyPr wrap="square" rtlCol="0" anchor="ctr"/>
           <a:lstStyle/>
           <a:p>
-            <a:pPr algn="ctr" indent="0" marL="0">
+            <a:pPr marL="0" indent="0" algn="ctr">
               <a:buNone/>
             </a:pPr>
             <a:r>
@@ -10823,7 +10993,7 @@
           <a:bodyPr wrap="square" rtlCol="0" anchor="t"/>
           <a:lstStyle/>
           <a:p>
-            <a:pPr algn="ctr" indent="0" marL="0">
+            <a:pPr marL="0" indent="0" algn="ctr">
               <a:buNone/>
             </a:pPr>
             <a:r>
@@ -10862,7 +11032,7 @@
           <a:bodyPr wrap="square" rtlCol="0" anchor="ctr"/>
           <a:lstStyle/>
           <a:p>
-            <a:pPr algn="ctr" indent="0" marL="0">
+            <a:pPr marL="0" indent="0" algn="ctr">
               <a:buNone/>
             </a:pPr>
             <a:r>
@@ -10906,6 +11076,13 @@
             <a:prstDash val="solid"/>
           </a:ln>
         </p:spPr>
+        <p:txBody>
+          <a:bodyPr/>
+          <a:lstStyle/>
+          <a:p>
+            <a:endParaRPr lang="es-PE"/>
+          </a:p>
+        </p:txBody>
       </p:sp>
       <p:sp>
         <p:nvSpPr>
@@ -10928,7 +11105,7 @@
           <a:bodyPr wrap="square" rtlCol="0" anchor="ctr"/>
           <a:lstStyle/>
           <a:p>
-            <a:pPr algn="ctr" indent="0" marL="0">
+            <a:pPr marL="0" indent="0" algn="ctr">
               <a:buNone/>
             </a:pPr>
             <a:r>
@@ -10967,7 +11144,7 @@
           <a:bodyPr wrap="square" rtlCol="0" anchor="t"/>
           <a:lstStyle/>
           <a:p>
-            <a:pPr algn="ctr" indent="0" marL="0">
+            <a:pPr marL="0" indent="0" algn="ctr">
               <a:buNone/>
             </a:pPr>
             <a:r>
@@ -11006,7 +11183,7 @@
           <a:bodyPr wrap="square" rtlCol="0" anchor="ctr"/>
           <a:lstStyle/>
           <a:p>
-            <a:pPr algn="ctr" indent="0" marL="0">
+            <a:pPr marL="0" indent="0" algn="ctr">
               <a:buNone/>
             </a:pPr>
             <a:r>
@@ -11050,6 +11227,13 @@
             <a:prstDash val="solid"/>
           </a:ln>
         </p:spPr>
+        <p:txBody>
+          <a:bodyPr/>
+          <a:lstStyle/>
+          <a:p>
+            <a:endParaRPr lang="es-PE"/>
+          </a:p>
+        </p:txBody>
       </p:sp>
       <p:sp>
         <p:nvSpPr>
@@ -11072,7 +11256,7 @@
           <a:bodyPr wrap="square" rtlCol="0" anchor="ctr"/>
           <a:lstStyle/>
           <a:p>
-            <a:pPr algn="ctr" indent="0" marL="0">
+            <a:pPr marL="0" indent="0" algn="ctr">
               <a:buNone/>
             </a:pPr>
             <a:r>
@@ -11111,7 +11295,7 @@
           <a:bodyPr wrap="square" rtlCol="0" anchor="t"/>
           <a:lstStyle/>
           <a:p>
-            <a:pPr algn="ctr" indent="0" marL="0">
+            <a:pPr marL="0" indent="0" algn="ctr">
               <a:buNone/>
             </a:pPr>
             <a:r>
@@ -11150,7 +11334,7 @@
           <a:bodyPr wrap="square" rtlCol="0" anchor="ctr"/>
           <a:lstStyle/>
           <a:p>
-            <a:pPr algn="ctr" indent="0" marL="0">
+            <a:pPr marL="0" indent="0" algn="ctr">
               <a:buNone/>
             </a:pPr>
             <a:r>
@@ -11194,6 +11378,13 @@
             <a:prstDash val="solid"/>
           </a:ln>
         </p:spPr>
+        <p:txBody>
+          <a:bodyPr/>
+          <a:lstStyle/>
+          <a:p>
+            <a:endParaRPr lang="es-PE"/>
+          </a:p>
+        </p:txBody>
       </p:sp>
       <p:sp>
         <p:nvSpPr>
@@ -11216,7 +11407,7 @@
           <a:bodyPr wrap="square" rtlCol="0" anchor="ctr"/>
           <a:lstStyle/>
           <a:p>
-            <a:pPr algn="ctr" indent="0" marL="0">
+            <a:pPr marL="0" indent="0" algn="ctr">
               <a:buNone/>
             </a:pPr>
             <a:r>
@@ -11255,7 +11446,7 @@
           <a:bodyPr wrap="square" rtlCol="0" anchor="t"/>
           <a:lstStyle/>
           <a:p>
-            <a:pPr algn="ctr" indent="0" marL="0">
+            <a:pPr marL="0" indent="0" algn="ctr">
               <a:buNone/>
             </a:pPr>
             <a:r>
@@ -11294,7 +11485,7 @@
           <a:bodyPr wrap="square" rtlCol="0" anchor="ctr"/>
           <a:lstStyle/>
           <a:p>
-            <a:pPr algn="ctr" indent="0" marL="0">
+            <a:pPr marL="0" indent="0" algn="ctr">
               <a:buNone/>
             </a:pPr>
             <a:r>
@@ -11338,6 +11529,13 @@
             <a:prstDash val="solid"/>
           </a:ln>
         </p:spPr>
+        <p:txBody>
+          <a:bodyPr/>
+          <a:lstStyle/>
+          <a:p>
+            <a:endParaRPr lang="es-PE"/>
+          </a:p>
+        </p:txBody>
       </p:sp>
       <p:sp>
         <p:nvSpPr>
@@ -11360,7 +11558,7 @@
           <a:bodyPr wrap="square" rtlCol="0" anchor="ctr"/>
           <a:lstStyle/>
           <a:p>
-            <a:pPr algn="ctr" indent="0" marL="0">
+            <a:pPr marL="0" indent="0" algn="ctr">
               <a:buNone/>
             </a:pPr>
             <a:r>
@@ -11399,7 +11597,7 @@
           <a:bodyPr wrap="square" rtlCol="0" anchor="t"/>
           <a:lstStyle/>
           <a:p>
-            <a:pPr algn="ctr" indent="0" marL="0">
+            <a:pPr marL="0" indent="0" algn="ctr">
               <a:buNone/>
             </a:pPr>
             <a:r>
@@ -11438,7 +11636,7 @@
           <a:bodyPr wrap="square" rtlCol="0" anchor="ctr"/>
           <a:lstStyle/>
           <a:p>
-            <a:pPr algn="ctr" indent="0" marL="0">
+            <a:pPr marL="0" indent="0" algn="ctr">
               <a:buNone/>
             </a:pPr>
             <a:r>
@@ -11482,6 +11680,13 @@
             <a:prstDash val="solid"/>
           </a:ln>
         </p:spPr>
+        <p:txBody>
+          <a:bodyPr/>
+          <a:lstStyle/>
+          <a:p>
+            <a:endParaRPr lang="es-PE"/>
+          </a:p>
+        </p:txBody>
       </p:sp>
       <p:sp>
         <p:nvSpPr>
@@ -11504,7 +11709,7 @@
           <a:bodyPr wrap="square" rtlCol="0" anchor="ctr"/>
           <a:lstStyle/>
           <a:p>
-            <a:pPr algn="ctr" indent="0" marL="0">
+            <a:pPr marL="0" indent="0" algn="ctr">
               <a:buNone/>
             </a:pPr>
             <a:r>
@@ -11543,7 +11748,7 @@
           <a:bodyPr wrap="square" rtlCol="0" anchor="t"/>
           <a:lstStyle/>
           <a:p>
-            <a:pPr algn="ctr" indent="0" marL="0">
+            <a:pPr marL="0" indent="0" algn="ctr">
               <a:buNone/>
             </a:pPr>
             <a:r>
@@ -11582,7 +11787,7 @@
           <a:bodyPr wrap="square" rtlCol="0" anchor="ctr"/>
           <a:lstStyle/>
           <a:p>
-            <a:pPr algn="ctr" indent="0" marL="0">
+            <a:pPr marL="0" indent="0" algn="ctr">
               <a:buNone/>
             </a:pPr>
             <a:r>
@@ -11626,6 +11831,13 @@
             <a:prstDash val="solid"/>
           </a:ln>
         </p:spPr>
+        <p:txBody>
+          <a:bodyPr/>
+          <a:lstStyle/>
+          <a:p>
+            <a:endParaRPr lang="es-PE"/>
+          </a:p>
+        </p:txBody>
       </p:sp>
       <p:sp>
         <p:nvSpPr>
@@ -11648,7 +11860,7 @@
           <a:bodyPr wrap="square" rtlCol="0" anchor="ctr"/>
           <a:lstStyle/>
           <a:p>
-            <a:pPr algn="ctr" indent="0" marL="0">
+            <a:pPr marL="0" indent="0" algn="ctr">
               <a:buNone/>
             </a:pPr>
             <a:r>
@@ -11687,7 +11899,7 @@
           <a:bodyPr wrap="square" rtlCol="0" anchor="t"/>
           <a:lstStyle/>
           <a:p>
-            <a:pPr algn="ctr" indent="0" marL="0">
+            <a:pPr marL="0" indent="0" algn="ctr">
               <a:buNone/>
             </a:pPr>
             <a:r>
@@ -11726,7 +11938,7 @@
           <a:bodyPr wrap="square" rtlCol="0" anchor="ctr"/>
           <a:lstStyle/>
           <a:p>
-            <a:pPr algn="ctr" indent="0" marL="0">
+            <a:pPr marL="0" indent="0" algn="ctr">
               <a:buNone/>
             </a:pPr>
             <a:r>
@@ -11770,6 +11982,13 @@
             <a:prstDash val="solid"/>
           </a:ln>
         </p:spPr>
+        <p:txBody>
+          <a:bodyPr/>
+          <a:lstStyle/>
+          <a:p>
+            <a:endParaRPr lang="es-PE"/>
+          </a:p>
+        </p:txBody>
       </p:sp>
       <p:sp>
         <p:nvSpPr>
@@ -11792,7 +12011,7 @@
           <a:bodyPr wrap="square" rtlCol="0" anchor="ctr"/>
           <a:lstStyle/>
           <a:p>
-            <a:pPr algn="ctr" indent="0" marL="0">
+            <a:pPr marL="0" indent="0" algn="ctr">
               <a:buNone/>
             </a:pPr>
             <a:r>
@@ -11831,7 +12050,7 @@
           <a:bodyPr wrap="square" rtlCol="0" anchor="t"/>
           <a:lstStyle/>
           <a:p>
-            <a:pPr algn="ctr" indent="0" marL="0">
+            <a:pPr marL="0" indent="0" algn="ctr">
               <a:buNone/>
             </a:pPr>
             <a:r>
@@ -11870,7 +12089,7 @@
           <a:bodyPr wrap="square" rtlCol="0" anchor="ctr"/>
           <a:lstStyle/>
           <a:p>
-            <a:pPr algn="ctr" indent="0" marL="0">
+            <a:pPr marL="0" indent="0" algn="ctr">
               <a:buNone/>
             </a:pPr>
             <a:r>
@@ -11909,6 +12128,13 @@
           </a:solidFill>
           <a:ln/>
         </p:spPr>
+        <p:txBody>
+          <a:bodyPr/>
+          <a:lstStyle/>
+          <a:p>
+            <a:endParaRPr lang="es-PE"/>
+          </a:p>
+        </p:txBody>
       </p:sp>
       <p:sp>
         <p:nvSpPr>
@@ -11931,7 +12157,7 @@
           <a:bodyPr wrap="square" rtlCol="0" anchor="ctr"/>
           <a:lstStyle/>
           <a:p>
-            <a:pPr indent="0" marL="0">
+            <a:pPr marL="0" indent="0">
               <a:buNone/>
             </a:pPr>
             <a:r>
@@ -11970,6 +12196,13 @@
           </a:solidFill>
           <a:ln/>
         </p:spPr>
+        <p:txBody>
+          <a:bodyPr/>
+          <a:lstStyle/>
+          <a:p>
+            <a:endParaRPr lang="es-PE"/>
+          </a:p>
+        </p:txBody>
       </p:sp>
       <p:sp>
         <p:nvSpPr>
@@ -11992,7 +12225,7 @@
           <a:bodyPr wrap="square" rtlCol="0" anchor="ctr"/>
           <a:lstStyle/>
           <a:p>
-            <a:pPr indent="0" marL="0">
+            <a:pPr marL="0" indent="0">
               <a:buNone/>
             </a:pPr>
             <a:r>
@@ -12036,6 +12269,13 @@
             <a:prstDash val="solid"/>
           </a:ln>
         </p:spPr>
+        <p:txBody>
+          <a:bodyPr/>
+          <a:lstStyle/>
+          <a:p>
+            <a:endParaRPr lang="es-PE"/>
+          </a:p>
+        </p:txBody>
       </p:sp>
       <p:sp>
         <p:nvSpPr>
@@ -12058,7 +12298,7 @@
           <a:bodyPr wrap="square" rtlCol="0" anchor="ctr"/>
           <a:lstStyle/>
           <a:p>
-            <a:pPr indent="0" marL="0">
+            <a:pPr marL="0" indent="0">
               <a:buNone/>
             </a:pPr>
             <a:r>
@@ -12078,7 +12318,7 @@
       </p:sp>
       <p:graphicFrame>
         <p:nvGraphicFramePr>
-          <p:cNvPr id="5" name="Table 0"/>
+          <p:cNvPr id="63" name="Table 0"/>
           <p:cNvGraphicFramePr>
             <a:graphicFrameLocks noGrp="1"/>
           </p:cNvGraphicFramePr>
@@ -12092,16 +12332,34 @@
         </p:nvGraphicFramePr>
         <p:xfrm>
           <a:off x="502920" y="4160520"/>
-          <a:ext cx="11185855" cy="2148840"/>
+          <a:ext cx="11185855" cy="2144268"/>
         </p:xfrm>
         <a:graphic>
           <a:graphicData uri="http://schemas.openxmlformats.org/drawingml/2006/table">
             <a:tbl>
               <a:tblPr/>
               <a:tblGrid>
-                <a:gridCol w="1005840"/>
-                <a:gridCol w="1828800"/>
-                <a:gridCol w="8351215"/>
+                <a:gridCol w="1005840">
+                  <a:extLst>
+                    <a:ext uri="{9D8B030D-6E8A-4147-A177-3AD203B41FA5}">
+                      <a16:colId xmlns:a16="http://schemas.microsoft.com/office/drawing/2014/main" val="20000"/>
+                    </a:ext>
+                  </a:extLst>
+                </a:gridCol>
+                <a:gridCol w="1828800">
+                  <a:extLst>
+                    <a:ext uri="{9D8B030D-6E8A-4147-A177-3AD203B41FA5}">
+                      <a16:colId xmlns:a16="http://schemas.microsoft.com/office/drawing/2014/main" val="20001"/>
+                    </a:ext>
+                  </a:extLst>
+                </a:gridCol>
+                <a:gridCol w="8351215">
+                  <a:extLst>
+                    <a:ext uri="{9D8B030D-6E8A-4147-A177-3AD203B41FA5}">
+                      <a16:colId xmlns:a16="http://schemas.microsoft.com/office/drawing/2014/main" val="20002"/>
+                    </a:ext>
+                  </a:extLst>
+                </a:gridCol>
               </a:tblGrid>
               <a:tr h="306324">
                 <a:tc>
@@ -12109,7 +12367,7 @@
                     <a:bodyPr/>
                     <a:lstStyle/>
                     <a:p>
-                      <a:pPr indent="0" marL="0">
+                      <a:pPr marL="0" indent="0">
                         <a:buNone/>
                       </a:pPr>
                       <a:r>
@@ -12177,7 +12435,7 @@
                     <a:bodyPr/>
                     <a:lstStyle/>
                     <a:p>
-                      <a:pPr indent="0" marL="0">
+                      <a:pPr marL="0" indent="0">
                         <a:buNone/>
                       </a:pPr>
                       <a:r>
@@ -12245,7 +12503,7 @@
                     <a:bodyPr/>
                     <a:lstStyle/>
                     <a:p>
-                      <a:pPr indent="0" marL="0">
+                      <a:pPr marL="0" indent="0">
                         <a:buNone/>
                       </a:pPr>
                       <a:r>
@@ -12308,6 +12566,11 @@
                     </a:solidFill>
                   </a:tcPr>
                 </a:tc>
+                <a:extLst>
+                  <a:ext uri="{0D108BD9-81ED-4DB2-BD59-A6C34878D82A}">
+                    <a16:rowId xmlns:a16="http://schemas.microsoft.com/office/drawing/2014/main" val="10000"/>
+                  </a:ext>
+                </a:extLst>
               </a:tr>
               <a:tr h="306324">
                 <a:tc>
@@ -12315,7 +12578,7 @@
                     <a:bodyPr/>
                     <a:lstStyle/>
                     <a:p>
-                      <a:pPr indent="0" marL="0">
+                      <a:pPr marL="0" indent="0">
                         <a:buNone/>
                       </a:pPr>
                       <a:r>
@@ -12380,7 +12643,7 @@
                     <a:bodyPr/>
                     <a:lstStyle/>
                     <a:p>
-                      <a:pPr indent="0" marL="0">
+                      <a:pPr marL="0" indent="0">
                         <a:buNone/>
                       </a:pPr>
                       <a:r>
@@ -12445,7 +12708,7 @@
                     <a:bodyPr/>
                     <a:lstStyle/>
                     <a:p>
-                      <a:pPr indent="0" marL="0">
+                      <a:pPr marL="0" indent="0">
                         <a:buNone/>
                       </a:pPr>
                       <a:r>
@@ -12505,6 +12768,11 @@
                     </a:lnB>
                   </a:tcPr>
                 </a:tc>
+                <a:extLst>
+                  <a:ext uri="{0D108BD9-81ED-4DB2-BD59-A6C34878D82A}">
+                    <a16:rowId xmlns:a16="http://schemas.microsoft.com/office/drawing/2014/main" val="10001"/>
+                  </a:ext>
+                </a:extLst>
               </a:tr>
               <a:tr h="306324">
                 <a:tc>
@@ -12512,7 +12780,7 @@
                     <a:bodyPr/>
                     <a:lstStyle/>
                     <a:p>
-                      <a:pPr indent="0" marL="0">
+                      <a:pPr marL="0" indent="0">
                         <a:buNone/>
                       </a:pPr>
                       <a:r>
@@ -12577,7 +12845,7 @@
                     <a:bodyPr/>
                     <a:lstStyle/>
                     <a:p>
-                      <a:pPr indent="0" marL="0">
+                      <a:pPr marL="0" indent="0">
                         <a:buNone/>
                       </a:pPr>
                       <a:r>
@@ -12642,7 +12910,7 @@
                     <a:bodyPr/>
                     <a:lstStyle/>
                     <a:p>
-                      <a:pPr indent="0" marL="0">
+                      <a:pPr marL="0" indent="0">
                         <a:buNone/>
                       </a:pPr>
                       <a:r>
@@ -12702,6 +12970,11 @@
                     </a:lnB>
                   </a:tcPr>
                 </a:tc>
+                <a:extLst>
+                  <a:ext uri="{0D108BD9-81ED-4DB2-BD59-A6C34878D82A}">
+                    <a16:rowId xmlns:a16="http://schemas.microsoft.com/office/drawing/2014/main" val="10002"/>
+                  </a:ext>
+                </a:extLst>
               </a:tr>
               <a:tr h="306324">
                 <a:tc>
@@ -12709,7 +12982,7 @@
                     <a:bodyPr/>
                     <a:lstStyle/>
                     <a:p>
-                      <a:pPr indent="0" marL="0">
+                      <a:pPr marL="0" indent="0">
                         <a:buNone/>
                       </a:pPr>
                       <a:r>
@@ -12774,7 +13047,7 @@
                     <a:bodyPr/>
                     <a:lstStyle/>
                     <a:p>
-                      <a:pPr indent="0" marL="0">
+                      <a:pPr marL="0" indent="0">
                         <a:buNone/>
                       </a:pPr>
                       <a:r>
@@ -12839,7 +13112,7 @@
                     <a:bodyPr/>
                     <a:lstStyle/>
                     <a:p>
-                      <a:pPr indent="0" marL="0">
+                      <a:pPr marL="0" indent="0">
                         <a:buNone/>
                       </a:pPr>
                       <a:r>
@@ -12899,6 +13172,11 @@
                     </a:lnB>
                   </a:tcPr>
                 </a:tc>
+                <a:extLst>
+                  <a:ext uri="{0D108BD9-81ED-4DB2-BD59-A6C34878D82A}">
+                    <a16:rowId xmlns:a16="http://schemas.microsoft.com/office/drawing/2014/main" val="10003"/>
+                  </a:ext>
+                </a:extLst>
               </a:tr>
               <a:tr h="306324">
                 <a:tc>
@@ -12906,7 +13184,7 @@
                     <a:bodyPr/>
                     <a:lstStyle/>
                     <a:p>
-                      <a:pPr indent="0" marL="0">
+                      <a:pPr marL="0" indent="0">
                         <a:buNone/>
                       </a:pPr>
                       <a:r>
@@ -12971,7 +13249,7 @@
                     <a:bodyPr/>
                     <a:lstStyle/>
                     <a:p>
-                      <a:pPr indent="0" marL="0">
+                      <a:pPr marL="0" indent="0">
                         <a:buNone/>
                       </a:pPr>
                       <a:r>
@@ -13036,7 +13314,7 @@
                     <a:bodyPr/>
                     <a:lstStyle/>
                     <a:p>
-                      <a:pPr indent="0" marL="0">
+                      <a:pPr marL="0" indent="0">
                         <a:buNone/>
                       </a:pPr>
                       <a:r>
@@ -13096,6 +13374,11 @@
                     </a:lnB>
                   </a:tcPr>
                 </a:tc>
+                <a:extLst>
+                  <a:ext uri="{0D108BD9-81ED-4DB2-BD59-A6C34878D82A}">
+                    <a16:rowId xmlns:a16="http://schemas.microsoft.com/office/drawing/2014/main" val="10004"/>
+                  </a:ext>
+                </a:extLst>
               </a:tr>
               <a:tr h="306324">
                 <a:tc>
@@ -13103,7 +13386,7 @@
                     <a:bodyPr/>
                     <a:lstStyle/>
                     <a:p>
-                      <a:pPr indent="0" marL="0">
+                      <a:pPr marL="0" indent="0">
                         <a:buNone/>
                       </a:pPr>
                       <a:r>
@@ -13168,7 +13451,7 @@
                     <a:bodyPr/>
                     <a:lstStyle/>
                     <a:p>
-                      <a:pPr indent="0" marL="0">
+                      <a:pPr marL="0" indent="0">
                         <a:buNone/>
                       </a:pPr>
                       <a:r>
@@ -13233,7 +13516,7 @@
                     <a:bodyPr/>
                     <a:lstStyle/>
                     <a:p>
-                      <a:pPr indent="0" marL="0">
+                      <a:pPr marL="0" indent="0">
                         <a:buNone/>
                       </a:pPr>
                       <a:r>
@@ -13293,6 +13576,11 @@
                     </a:lnB>
                   </a:tcPr>
                 </a:tc>
+                <a:extLst>
+                  <a:ext uri="{0D108BD9-81ED-4DB2-BD59-A6C34878D82A}">
+                    <a16:rowId xmlns:a16="http://schemas.microsoft.com/office/drawing/2014/main" val="10005"/>
+                  </a:ext>
+                </a:extLst>
               </a:tr>
               <a:tr h="306324">
                 <a:tc>
@@ -13300,7 +13588,7 @@
                     <a:bodyPr/>
                     <a:lstStyle/>
                     <a:p>
-                      <a:pPr indent="0" marL="0">
+                      <a:pPr marL="0" indent="0">
                         <a:buNone/>
                       </a:pPr>
                       <a:r>
@@ -13365,7 +13653,7 @@
                     <a:bodyPr/>
                     <a:lstStyle/>
                     <a:p>
-                      <a:pPr indent="0" marL="0">
+                      <a:pPr marL="0" indent="0">
                         <a:buNone/>
                       </a:pPr>
                       <a:r>
@@ -13430,7 +13718,7 @@
                     <a:bodyPr/>
                     <a:lstStyle/>
                     <a:p>
-                      <a:pPr indent="0" marL="0">
+                      <a:pPr marL="0" indent="0">
                         <a:buNone/>
                       </a:pPr>
                       <a:r>
@@ -13490,6 +13778,11 @@
                     </a:lnB>
                   </a:tcPr>
                 </a:tc>
+                <a:extLst>
+                  <a:ext uri="{0D108BD9-81ED-4DB2-BD59-A6C34878D82A}">
+                    <a16:rowId xmlns:a16="http://schemas.microsoft.com/office/drawing/2014/main" val="10006"/>
+                  </a:ext>
+                </a:extLst>
               </a:tr>
             </a:tbl>
           </a:graphicData>
@@ -13516,7 +13809,7 @@
           <a:bodyPr wrap="square" rtlCol="0" anchor="ctr"/>
           <a:lstStyle/>
           <a:p>
-            <a:pPr algn="l" indent="0" marL="0">
+            <a:pPr marL="0" indent="0" algn="l">
               <a:buNone/>
             </a:pPr>
             <a:r>
@@ -13555,7 +13848,7 @@
           <a:bodyPr wrap="square" rtlCol="0" anchor="ctr"/>
           <a:lstStyle/>
           <a:p>
-            <a:pPr algn="r" indent="0" marL="0">
+            <a:pPr marL="0" indent="0" algn="r">
               <a:buNone/>
             </a:pPr>
             <a:r>
@@ -13589,6 +13882,7 @@
         <a:solidFill>
           <a:srgbClr val="FFFFFF"/>
         </a:solidFill>
+        <a:effectLst/>
       </p:bgPr>
     </p:bg>
     <p:spTree>
@@ -13626,11 +13920,11 @@
           <a:bodyPr wrap="square" rtlCol="0" anchor="ctr"/>
           <a:lstStyle/>
           <a:p>
-            <a:pPr indent="0" marL="0">
+            <a:pPr marL="0" indent="0">
               <a:buNone/>
             </a:pPr>
             <a:r>
-              <a:rPr lang="en-US" sz="1200" b="1" spc="200" kern="0" dirty="0">
+              <a:rPr lang="en-US" sz="1200" b="1" kern="0" spc="200" dirty="0">
                 <a:solidFill>
                   <a:srgbClr val="B97E1F"/>
                 </a:solidFill>
@@ -13665,7 +13959,7 @@
           <a:bodyPr wrap="square" rtlCol="0" anchor="ctr"/>
           <a:lstStyle/>
           <a:p>
-            <a:pPr indent="0" marL="0">
+            <a:pPr marL="0" indent="0">
               <a:buNone/>
             </a:pPr>
             <a:r>
@@ -13699,17 +13993,41 @@
         </p:nvGraphicFramePr>
         <p:xfrm>
           <a:off x="502920" y="1600200"/>
-          <a:ext cx="11185855" cy="3566160"/>
+          <a:ext cx="11192256" cy="3584448"/>
         </p:xfrm>
         <a:graphic>
           <a:graphicData uri="http://schemas.openxmlformats.org/drawingml/2006/table">
             <a:tbl>
               <a:tblPr/>
               <a:tblGrid>
-                <a:gridCol w="1051560"/>
-                <a:gridCol w="1234440"/>
-                <a:gridCol w="4937760"/>
-                <a:gridCol w="3968496"/>
+                <a:gridCol w="1051560">
+                  <a:extLst>
+                    <a:ext uri="{9D8B030D-6E8A-4147-A177-3AD203B41FA5}">
+                      <a16:colId xmlns:a16="http://schemas.microsoft.com/office/drawing/2014/main" val="20000"/>
+                    </a:ext>
+                  </a:extLst>
+                </a:gridCol>
+                <a:gridCol w="1234440">
+                  <a:extLst>
+                    <a:ext uri="{9D8B030D-6E8A-4147-A177-3AD203B41FA5}">
+                      <a16:colId xmlns:a16="http://schemas.microsoft.com/office/drawing/2014/main" val="20001"/>
+                    </a:ext>
+                  </a:extLst>
+                </a:gridCol>
+                <a:gridCol w="4937760">
+                  <a:extLst>
+                    <a:ext uri="{9D8B030D-6E8A-4147-A177-3AD203B41FA5}">
+                      <a16:colId xmlns:a16="http://schemas.microsoft.com/office/drawing/2014/main" val="20002"/>
+                    </a:ext>
+                  </a:extLst>
+                </a:gridCol>
+                <a:gridCol w="3968496">
+                  <a:extLst>
+                    <a:ext uri="{9D8B030D-6E8A-4147-A177-3AD203B41FA5}">
+                      <a16:colId xmlns:a16="http://schemas.microsoft.com/office/drawing/2014/main" val="20003"/>
+                    </a:ext>
+                  </a:extLst>
+                </a:gridCol>
               </a:tblGrid>
               <a:tr h="512064">
                 <a:tc>
@@ -13717,7 +14035,7 @@
                     <a:bodyPr/>
                     <a:lstStyle/>
                     <a:p>
-                      <a:pPr indent="0" marL="0">
+                      <a:pPr marL="0" indent="0">
                         <a:buNone/>
                       </a:pPr>
                       <a:r>
@@ -13785,7 +14103,7 @@
                     <a:bodyPr/>
                     <a:lstStyle/>
                     <a:p>
-                      <a:pPr indent="0" marL="0">
+                      <a:pPr marL="0" indent="0">
                         <a:buNone/>
                       </a:pPr>
                       <a:r>
@@ -13853,7 +14171,7 @@
                     <a:bodyPr/>
                     <a:lstStyle/>
                     <a:p>
-                      <a:pPr indent="0" marL="0">
+                      <a:pPr marL="0" indent="0">
                         <a:buNone/>
                       </a:pPr>
                       <a:r>
@@ -13921,7 +14239,7 @@
                     <a:bodyPr/>
                     <a:lstStyle/>
                     <a:p>
-                      <a:pPr indent="0" marL="0">
+                      <a:pPr marL="0" indent="0">
                         <a:buNone/>
                       </a:pPr>
                       <a:r>
@@ -13984,6 +14302,11 @@
                     </a:solidFill>
                   </a:tcPr>
                 </a:tc>
+                <a:extLst>
+                  <a:ext uri="{0D108BD9-81ED-4DB2-BD59-A6C34878D82A}">
+                    <a16:rowId xmlns:a16="http://schemas.microsoft.com/office/drawing/2014/main" val="10000"/>
+                  </a:ext>
+                </a:extLst>
               </a:tr>
               <a:tr h="512064">
                 <a:tc>
@@ -13991,7 +14314,7 @@
                     <a:bodyPr/>
                     <a:lstStyle/>
                     <a:p>
-                      <a:pPr indent="0" marL="0">
+                      <a:pPr marL="0" indent="0">
                         <a:buNone/>
                       </a:pPr>
                       <a:r>
@@ -14056,7 +14379,7 @@
                     <a:bodyPr/>
                     <a:lstStyle/>
                     <a:p>
-                      <a:pPr indent="0" marL="0">
+                      <a:pPr marL="0" indent="0">
                         <a:buNone/>
                       </a:pPr>
                       <a:r>
@@ -14121,7 +14444,7 @@
                     <a:bodyPr/>
                     <a:lstStyle/>
                     <a:p>
-                      <a:pPr indent="0" marL="0">
+                      <a:pPr marL="0" indent="0">
                         <a:buNone/>
                       </a:pPr>
                       <a:r>
@@ -14186,7 +14509,7 @@
                     <a:bodyPr/>
                     <a:lstStyle/>
                     <a:p>
-                      <a:pPr indent="0" marL="0">
+                      <a:pPr marL="0" indent="0">
                         <a:buNone/>
                       </a:pPr>
                       <a:r>
@@ -14246,6 +14569,11 @@
                     </a:lnB>
                   </a:tcPr>
                 </a:tc>
+                <a:extLst>
+                  <a:ext uri="{0D108BD9-81ED-4DB2-BD59-A6C34878D82A}">
+                    <a16:rowId xmlns:a16="http://schemas.microsoft.com/office/drawing/2014/main" val="10001"/>
+                  </a:ext>
+                </a:extLst>
               </a:tr>
               <a:tr h="512064">
                 <a:tc>
@@ -14253,7 +14581,7 @@
                     <a:bodyPr/>
                     <a:lstStyle/>
                     <a:p>
-                      <a:pPr indent="0" marL="0">
+                      <a:pPr marL="0" indent="0">
                         <a:buNone/>
                       </a:pPr>
                       <a:r>
@@ -14318,7 +14646,7 @@
                     <a:bodyPr/>
                     <a:lstStyle/>
                     <a:p>
-                      <a:pPr indent="0" marL="0">
+                      <a:pPr marL="0" indent="0">
                         <a:buNone/>
                       </a:pPr>
                       <a:r>
@@ -14383,7 +14711,7 @@
                     <a:bodyPr/>
                     <a:lstStyle/>
                     <a:p>
-                      <a:pPr indent="0" marL="0">
+                      <a:pPr marL="0" indent="0">
                         <a:buNone/>
                       </a:pPr>
                       <a:r>
@@ -14448,7 +14776,7 @@
                     <a:bodyPr/>
                     <a:lstStyle/>
                     <a:p>
-                      <a:pPr indent="0" marL="0">
+                      <a:pPr marL="0" indent="0">
                         <a:buNone/>
                       </a:pPr>
                       <a:r>
@@ -14508,6 +14836,11 @@
                     </a:lnB>
                   </a:tcPr>
                 </a:tc>
+                <a:extLst>
+                  <a:ext uri="{0D108BD9-81ED-4DB2-BD59-A6C34878D82A}">
+                    <a16:rowId xmlns:a16="http://schemas.microsoft.com/office/drawing/2014/main" val="10002"/>
+                  </a:ext>
+                </a:extLst>
               </a:tr>
               <a:tr h="512064">
                 <a:tc>
@@ -14515,7 +14848,7 @@
                     <a:bodyPr/>
                     <a:lstStyle/>
                     <a:p>
-                      <a:pPr indent="0" marL="0">
+                      <a:pPr marL="0" indent="0">
                         <a:buNone/>
                       </a:pPr>
                       <a:r>
@@ -14580,7 +14913,7 @@
                     <a:bodyPr/>
                     <a:lstStyle/>
                     <a:p>
-                      <a:pPr indent="0" marL="0">
+                      <a:pPr marL="0" indent="0">
                         <a:buNone/>
                       </a:pPr>
                       <a:r>
@@ -14645,7 +14978,7 @@
                     <a:bodyPr/>
                     <a:lstStyle/>
                     <a:p>
-                      <a:pPr indent="0" marL="0">
+                      <a:pPr marL="0" indent="0">
                         <a:buNone/>
                       </a:pPr>
                       <a:r>
@@ -14710,7 +15043,7 @@
                     <a:bodyPr/>
                     <a:lstStyle/>
                     <a:p>
-                      <a:pPr indent="0" marL="0">
+                      <a:pPr marL="0" indent="0">
                         <a:buNone/>
                       </a:pPr>
                       <a:r>
@@ -14770,6 +15103,11 @@
                     </a:lnB>
                   </a:tcPr>
                 </a:tc>
+                <a:extLst>
+                  <a:ext uri="{0D108BD9-81ED-4DB2-BD59-A6C34878D82A}">
+                    <a16:rowId xmlns:a16="http://schemas.microsoft.com/office/drawing/2014/main" val="10003"/>
+                  </a:ext>
+                </a:extLst>
               </a:tr>
               <a:tr h="512064">
                 <a:tc>
@@ -14777,7 +15115,7 @@
                     <a:bodyPr/>
                     <a:lstStyle/>
                     <a:p>
-                      <a:pPr indent="0" marL="0">
+                      <a:pPr marL="0" indent="0">
                         <a:buNone/>
                       </a:pPr>
                       <a:r>
@@ -14842,7 +15180,7 @@
                     <a:bodyPr/>
                     <a:lstStyle/>
                     <a:p>
-                      <a:pPr indent="0" marL="0">
+                      <a:pPr marL="0" indent="0">
                         <a:buNone/>
                       </a:pPr>
                       <a:r>
@@ -14907,7 +15245,7 @@
                     <a:bodyPr/>
                     <a:lstStyle/>
                     <a:p>
-                      <a:pPr indent="0" marL="0">
+                      <a:pPr marL="0" indent="0">
                         <a:buNone/>
                       </a:pPr>
                       <a:r>
@@ -14972,7 +15310,7 @@
                     <a:bodyPr/>
                     <a:lstStyle/>
                     <a:p>
-                      <a:pPr indent="0" marL="0">
+                      <a:pPr marL="0" indent="0">
                         <a:buNone/>
                       </a:pPr>
                       <a:r>
@@ -15032,6 +15370,11 @@
                     </a:lnB>
                   </a:tcPr>
                 </a:tc>
+                <a:extLst>
+                  <a:ext uri="{0D108BD9-81ED-4DB2-BD59-A6C34878D82A}">
+                    <a16:rowId xmlns:a16="http://schemas.microsoft.com/office/drawing/2014/main" val="10004"/>
+                  </a:ext>
+                </a:extLst>
               </a:tr>
               <a:tr h="512064">
                 <a:tc>
@@ -15039,7 +15382,7 @@
                     <a:bodyPr/>
                     <a:lstStyle/>
                     <a:p>
-                      <a:pPr indent="0" marL="0">
+                      <a:pPr marL="0" indent="0">
                         <a:buNone/>
                       </a:pPr>
                       <a:r>
@@ -15104,7 +15447,7 @@
                     <a:bodyPr/>
                     <a:lstStyle/>
                     <a:p>
-                      <a:pPr indent="0" marL="0">
+                      <a:pPr marL="0" indent="0">
                         <a:buNone/>
                       </a:pPr>
                       <a:r>
@@ -15169,7 +15512,7 @@
                     <a:bodyPr/>
                     <a:lstStyle/>
                     <a:p>
-                      <a:pPr indent="0" marL="0">
+                      <a:pPr marL="0" indent="0">
                         <a:buNone/>
                       </a:pPr>
                       <a:r>
@@ -15234,7 +15577,7 @@
                     <a:bodyPr/>
                     <a:lstStyle/>
                     <a:p>
-                      <a:pPr indent="0" marL="0">
+                      <a:pPr marL="0" indent="0">
                         <a:buNone/>
                       </a:pPr>
                       <a:r>
@@ -15294,6 +15637,11 @@
                     </a:lnB>
                   </a:tcPr>
                 </a:tc>
+                <a:extLst>
+                  <a:ext uri="{0D108BD9-81ED-4DB2-BD59-A6C34878D82A}">
+                    <a16:rowId xmlns:a16="http://schemas.microsoft.com/office/drawing/2014/main" val="10005"/>
+                  </a:ext>
+                </a:extLst>
               </a:tr>
               <a:tr h="512064">
                 <a:tc>
@@ -15301,7 +15649,7 @@
                     <a:bodyPr/>
                     <a:lstStyle/>
                     <a:p>
-                      <a:pPr indent="0" marL="0">
+                      <a:pPr marL="0" indent="0">
                         <a:buNone/>
                       </a:pPr>
                       <a:r>
@@ -15366,7 +15714,7 @@
                     <a:bodyPr/>
                     <a:lstStyle/>
                     <a:p>
-                      <a:pPr indent="0" marL="0">
+                      <a:pPr marL="0" indent="0">
                         <a:buNone/>
                       </a:pPr>
                       <a:r>
@@ -15431,7 +15779,7 @@
                     <a:bodyPr/>
                     <a:lstStyle/>
                     <a:p>
-                      <a:pPr indent="0" marL="0">
+                      <a:pPr marL="0" indent="0">
                         <a:buNone/>
                       </a:pPr>
                       <a:r>
@@ -15496,7 +15844,7 @@
                     <a:bodyPr/>
                     <a:lstStyle/>
                     <a:p>
-                      <a:pPr indent="0" marL="0">
+                      <a:pPr marL="0" indent="0">
                         <a:buNone/>
                       </a:pPr>
                       <a:r>
@@ -15556,6 +15904,11 @@
                     </a:lnB>
                   </a:tcPr>
                 </a:tc>
+                <a:extLst>
+                  <a:ext uri="{0D108BD9-81ED-4DB2-BD59-A6C34878D82A}">
+                    <a16:rowId xmlns:a16="http://schemas.microsoft.com/office/drawing/2014/main" val="10006"/>
+                  </a:ext>
+                </a:extLst>
               </a:tr>
             </a:tbl>
           </a:graphicData>
@@ -15587,10 +15940,17 @@
             <a:prstDash val="solid"/>
           </a:ln>
         </p:spPr>
-      </p:sp>
-      <p:sp>
-        <p:nvSpPr>
-          <p:cNvPr id="6" name="Text 3"/>
+        <p:txBody>
+          <a:bodyPr/>
+          <a:lstStyle/>
+          <a:p>
+            <a:endParaRPr lang="es-PE"/>
+          </a:p>
+        </p:txBody>
+      </p:sp>
+      <p:sp>
+        <p:nvSpPr>
+          <p:cNvPr id="4" name="Text 3"/>
           <p:cNvSpPr/>
           <p:nvPr/>
         </p:nvSpPr>
@@ -15609,7 +15969,7 @@
           <a:bodyPr wrap="square" rtlCol="0" anchor="ctr"/>
           <a:lstStyle/>
           <a:p>
-            <a:pPr indent="0" marL="0">
+            <a:pPr marL="0" indent="0">
               <a:lnSpc>
                 <a:spcPct val="115000"/>
               </a:lnSpc>
@@ -15626,12 +15986,6 @@
               </a:rPr>
               <a:t>Por qué gates y no percepción:  </a:t>
             </a:r>
-            <a:pPr indent="0" marL="0">
-              <a:lnSpc>
-                <a:spcPct val="115000"/>
-              </a:lnSpc>
-              <a:buNone/>
-            </a:pPr>
             <a:r>
               <a:rPr lang="en-US" sz="1150" dirty="0">
                 <a:solidFill>
@@ -15668,7 +16022,7 @@
           <a:bodyPr wrap="square" rtlCol="0" anchor="ctr"/>
           <a:lstStyle/>
           <a:p>
-            <a:pPr algn="l" indent="0" marL="0">
+            <a:pPr marL="0" indent="0" algn="l">
               <a:buNone/>
             </a:pPr>
             <a:r>
@@ -15707,7 +16061,7 @@
           <a:bodyPr wrap="square" rtlCol="0" anchor="ctr"/>
           <a:lstStyle/>
           <a:p>
-            <a:pPr algn="r" indent="0" marL="0">
+            <a:pPr marL="0" indent="0" algn="r">
               <a:buNone/>
             </a:pPr>
             <a:r>
@@ -15741,6 +16095,7 @@
         <a:solidFill>
           <a:srgbClr val="FFFFFF"/>
         </a:solidFill>
+        <a:effectLst/>
       </p:bgPr>
     </p:bg>
     <p:spTree>
@@ -15778,11 +16133,11 @@
           <a:bodyPr wrap="square" rtlCol="0" anchor="ctr"/>
           <a:lstStyle/>
           <a:p>
-            <a:pPr indent="0" marL="0">
+            <a:pPr marL="0" indent="0">
               <a:buNone/>
             </a:pPr>
             <a:r>
-              <a:rPr lang="en-US" sz="1200" b="1" spc="200" kern="0" dirty="0">
+              <a:rPr lang="en-US" sz="1200" b="1" kern="0" spc="200" dirty="0">
                 <a:solidFill>
                   <a:srgbClr val="B97E1F"/>
                 </a:solidFill>
@@ -15817,7 +16172,7 @@
           <a:bodyPr wrap="square" rtlCol="0" anchor="ctr"/>
           <a:lstStyle/>
           <a:p>
-            <a:pPr indent="0" marL="0">
+            <a:pPr marL="0" indent="0">
               <a:buNone/>
             </a:pPr>
             <a:r>
@@ -15837,7 +16192,7 @@
       </p:sp>
       <p:graphicFrame>
         <p:nvGraphicFramePr>
-          <p:cNvPr id="4" name="Chart 0" descr=""/>
+          <p:cNvPr id="4" name="Chart 0"/>
           <p:cNvGraphicFramePr/>
           <p:nvPr/>
         </p:nvGraphicFramePr>
@@ -15845,9 +16200,9 @@
           <a:off x="502920" y="1508760"/>
           <a:ext cx="7772400" cy="4160520"/>
         </p:xfrm>
-        <a:graphic xmlns:a="http://schemas.openxmlformats.org/drawingml/2006/main">
+        <a:graphic>
           <a:graphicData uri="http://schemas.openxmlformats.org/drawingml/2006/chart">
-            <c:chart xmlns:c="http://schemas.openxmlformats.org/drawingml/2006/chart" r:id="rId1"/>
+            <c:chart xmlns:c="http://schemas.openxmlformats.org/drawingml/2006/chart" xmlns:r="http://schemas.openxmlformats.org/officeDocument/2006/relationships" r:id="rId3"/>
           </a:graphicData>
         </a:graphic>
       </p:graphicFrame>
@@ -15872,6 +16227,13 @@
           </a:solidFill>
           <a:ln/>
         </p:spPr>
+        <p:txBody>
+          <a:bodyPr/>
+          <a:lstStyle/>
+          <a:p>
+            <a:endParaRPr lang="es-PE"/>
+          </a:p>
+        </p:txBody>
       </p:sp>
       <p:sp>
         <p:nvSpPr>
@@ -15894,7 +16256,7 @@
           <a:bodyPr wrap="square" rtlCol="0" anchor="ctr"/>
           <a:lstStyle/>
           <a:p>
-            <a:pPr indent="0" marL="0">
+            <a:pPr marL="0" indent="0">
               <a:buNone/>
             </a:pPr>
             <a:r>
@@ -15933,7 +16295,7 @@
           <a:bodyPr wrap="square" rtlCol="0" anchor="ctr"/>
           <a:lstStyle/>
           <a:p>
-            <a:pPr indent="0" marL="0">
+            <a:pPr marL="0" indent="0">
               <a:buNone/>
             </a:pPr>
             <a:r>
@@ -15972,7 +16334,7 @@
           <a:bodyPr wrap="square" rtlCol="0" anchor="ctr"/>
           <a:lstStyle/>
           <a:p>
-            <a:pPr indent="0" marL="0">
+            <a:pPr marL="0" indent="0">
               <a:lnSpc>
                 <a:spcPct val="110000"/>
               </a:lnSpc>
@@ -16014,7 +16376,7 @@
           <a:bodyPr wrap="square" rtlCol="0" anchor="t"/>
           <a:lstStyle/>
           <a:p>
-            <a:pPr indent="0" marL="0">
+            <a:pPr marL="0" indent="0">
               <a:lnSpc>
                 <a:spcPct val="120000"/>
               </a:lnSpc>
@@ -16037,7 +16399,7 @@
             <a:endParaRPr lang="en-US" sz="950" dirty="0"/>
           </a:p>
           <a:p>
-            <a:pPr indent="0" marL="0">
+            <a:pPr marL="0" indent="0">
               <a:lnSpc>
                 <a:spcPct val="120000"/>
               </a:lnSpc>
@@ -16079,7 +16441,7 @@
           <a:bodyPr wrap="square" rtlCol="0" anchor="ctr"/>
           <a:lstStyle/>
           <a:p>
-            <a:pPr algn="l" indent="0" marL="0">
+            <a:pPr marL="0" indent="0" algn="l">
               <a:buNone/>
             </a:pPr>
             <a:r>
@@ -16118,7 +16480,7 @@
           <a:bodyPr wrap="square" rtlCol="0" anchor="ctr"/>
           <a:lstStyle/>
           <a:p>
-            <a:pPr algn="r" indent="0" marL="0">
+            <a:pPr marL="0" indent="0" algn="r">
               <a:buNone/>
             </a:pPr>
             <a:r>
@@ -16152,6 +16514,7 @@
         <a:solidFill>
           <a:srgbClr val="FFFFFF"/>
         </a:solidFill>
+        <a:effectLst/>
       </p:bgPr>
     </p:bg>
     <p:spTree>
@@ -16189,11 +16552,11 @@
           <a:bodyPr wrap="square" rtlCol="0" anchor="ctr"/>
           <a:lstStyle/>
           <a:p>
-            <a:pPr indent="0" marL="0">
+            <a:pPr marL="0" indent="0">
               <a:buNone/>
             </a:pPr>
             <a:r>
-              <a:rPr lang="en-US" sz="1200" b="1" spc="200" kern="0" dirty="0">
+              <a:rPr lang="en-US" sz="1200" b="1" kern="0" spc="200" dirty="0">
                 <a:solidFill>
                   <a:srgbClr val="B97E1F"/>
                 </a:solidFill>
@@ -16228,7 +16591,7 @@
           <a:bodyPr wrap="square" rtlCol="0" anchor="ctr"/>
           <a:lstStyle/>
           <a:p>
-            <a:pPr indent="0" marL="0">
+            <a:pPr marL="0" indent="0">
               <a:buNone/>
             </a:pPr>
             <a:r>
@@ -16262,16 +16625,34 @@
         </p:nvGraphicFramePr>
         <p:xfrm>
           <a:off x="502920" y="1463040"/>
-          <a:ext cx="11185855" cy="5029200"/>
+          <a:ext cx="11185855" cy="4901184"/>
         </p:xfrm>
         <a:graphic>
           <a:graphicData uri="http://schemas.openxmlformats.org/drawingml/2006/table">
             <a:tbl>
               <a:tblPr/>
               <a:tblGrid>
-                <a:gridCol w="2651760"/>
-                <a:gridCol w="1371600"/>
-                <a:gridCol w="7162495"/>
+                <a:gridCol w="2651760">
+                  <a:extLst>
+                    <a:ext uri="{9D8B030D-6E8A-4147-A177-3AD203B41FA5}">
+                      <a16:colId xmlns:a16="http://schemas.microsoft.com/office/drawing/2014/main" val="20000"/>
+                    </a:ext>
+                  </a:extLst>
+                </a:gridCol>
+                <a:gridCol w="1371600">
+                  <a:extLst>
+                    <a:ext uri="{9D8B030D-6E8A-4147-A177-3AD203B41FA5}">
+                      <a16:colId xmlns:a16="http://schemas.microsoft.com/office/drawing/2014/main" val="20001"/>
+                    </a:ext>
+                  </a:extLst>
+                </a:gridCol>
+                <a:gridCol w="7162495">
+                  <a:extLst>
+                    <a:ext uri="{9D8B030D-6E8A-4147-A177-3AD203B41FA5}">
+                      <a16:colId xmlns:a16="http://schemas.microsoft.com/office/drawing/2014/main" val="20002"/>
+                    </a:ext>
+                  </a:extLst>
+                </a:gridCol>
               </a:tblGrid>
               <a:tr h="306324">
                 <a:tc>
@@ -16279,7 +16660,7 @@
                     <a:bodyPr/>
                     <a:lstStyle/>
                     <a:p>
-                      <a:pPr indent="0" marL="0">
+                      <a:pPr marL="0" indent="0">
                         <a:buNone/>
                       </a:pPr>
                       <a:r>
@@ -16347,7 +16728,7 @@
                     <a:bodyPr/>
                     <a:lstStyle/>
                     <a:p>
-                      <a:pPr indent="0" marL="0">
+                      <a:pPr marL="0" indent="0">
                         <a:buNone/>
                       </a:pPr>
                       <a:r>
@@ -16415,7 +16796,7 @@
                     <a:bodyPr/>
                     <a:lstStyle/>
                     <a:p>
-                      <a:pPr indent="0" marL="0">
+                      <a:pPr marL="0" indent="0">
                         <a:buNone/>
                       </a:pPr>
                       <a:r>
@@ -16478,6 +16859,11 @@
                     </a:solidFill>
                   </a:tcPr>
                 </a:tc>
+                <a:extLst>
+                  <a:ext uri="{0D108BD9-81ED-4DB2-BD59-A6C34878D82A}">
+                    <a16:rowId xmlns:a16="http://schemas.microsoft.com/office/drawing/2014/main" val="10000"/>
+                  </a:ext>
+                </a:extLst>
               </a:tr>
               <a:tr h="306324">
                 <a:tc>
@@ -16485,7 +16871,7 @@
                     <a:bodyPr/>
                     <a:lstStyle/>
                     <a:p>
-                      <a:pPr indent="0" marL="0">
+                      <a:pPr marL="0" indent="0">
                         <a:buNone/>
                       </a:pPr>
                       <a:r>
@@ -16550,7 +16936,7 @@
                     <a:bodyPr/>
                     <a:lstStyle/>
                     <a:p>
-                      <a:pPr algn="ctr" indent="0" marL="0">
+                      <a:pPr marL="0" indent="0" algn="ctr">
                         <a:buNone/>
                       </a:pPr>
                       <a:r>
@@ -16618,7 +17004,7 @@
                     <a:bodyPr/>
                     <a:lstStyle/>
                     <a:p>
-                      <a:pPr indent="0" marL="0">
+                      <a:pPr marL="0" indent="0">
                         <a:buNone/>
                       </a:pPr>
                       <a:r>
@@ -16678,6 +17064,11 @@
                     </a:lnB>
                   </a:tcPr>
                 </a:tc>
+                <a:extLst>
+                  <a:ext uri="{0D108BD9-81ED-4DB2-BD59-A6C34878D82A}">
+                    <a16:rowId xmlns:a16="http://schemas.microsoft.com/office/drawing/2014/main" val="10001"/>
+                  </a:ext>
+                </a:extLst>
               </a:tr>
               <a:tr h="306324">
                 <a:tc>
@@ -16685,7 +17076,7 @@
                     <a:bodyPr/>
                     <a:lstStyle/>
                     <a:p>
-                      <a:pPr indent="0" marL="0">
+                      <a:pPr marL="0" indent="0">
                         <a:buNone/>
                       </a:pPr>
                       <a:r>
@@ -16750,7 +17141,7 @@
                     <a:bodyPr/>
                     <a:lstStyle/>
                     <a:p>
-                      <a:pPr algn="ctr" indent="0" marL="0">
+                      <a:pPr marL="0" indent="0" algn="ctr">
                         <a:buNone/>
                       </a:pPr>
                       <a:r>
@@ -16818,7 +17209,7 @@
                     <a:bodyPr/>
                     <a:lstStyle/>
                     <a:p>
-                      <a:pPr indent="0" marL="0">
+                      <a:pPr marL="0" indent="0">
                         <a:buNone/>
                       </a:pPr>
                       <a:r>
@@ -16878,6 +17269,11 @@
                     </a:lnB>
                   </a:tcPr>
                 </a:tc>
+                <a:extLst>
+                  <a:ext uri="{0D108BD9-81ED-4DB2-BD59-A6C34878D82A}">
+                    <a16:rowId xmlns:a16="http://schemas.microsoft.com/office/drawing/2014/main" val="10002"/>
+                  </a:ext>
+                </a:extLst>
               </a:tr>
               <a:tr h="306324">
                 <a:tc>
@@ -16885,7 +17281,7 @@
                     <a:bodyPr/>
                     <a:lstStyle/>
                     <a:p>
-                      <a:pPr indent="0" marL="0">
+                      <a:pPr marL="0" indent="0">
                         <a:buNone/>
                       </a:pPr>
                       <a:r>
@@ -16950,7 +17346,7 @@
                     <a:bodyPr/>
                     <a:lstStyle/>
                     <a:p>
-                      <a:pPr algn="ctr" indent="0" marL="0">
+                      <a:pPr marL="0" indent="0" algn="ctr">
                         <a:buNone/>
                       </a:pPr>
                       <a:r>
@@ -17018,7 +17414,7 @@
                     <a:bodyPr/>
                     <a:lstStyle/>
                     <a:p>
-                      <a:pPr indent="0" marL="0">
+                      <a:pPr marL="0" indent="0">
                         <a:buNone/>
                       </a:pPr>
                       <a:r>
@@ -17078,6 +17474,11 @@
                     </a:lnB>
                   </a:tcPr>
                 </a:tc>
+                <a:extLst>
+                  <a:ext uri="{0D108BD9-81ED-4DB2-BD59-A6C34878D82A}">
+                    <a16:rowId xmlns:a16="http://schemas.microsoft.com/office/drawing/2014/main" val="10003"/>
+                  </a:ext>
+                </a:extLst>
               </a:tr>
               <a:tr h="306324">
                 <a:tc>
@@ -17085,7 +17486,7 @@
                     <a:bodyPr/>
                     <a:lstStyle/>
                     <a:p>
-                      <a:pPr indent="0" marL="0">
+                      <a:pPr marL="0" indent="0">
                         <a:buNone/>
                       </a:pPr>
                       <a:r>
@@ -17150,7 +17551,7 @@
                     <a:bodyPr/>
                     <a:lstStyle/>
                     <a:p>
-                      <a:pPr algn="ctr" indent="0" marL="0">
+                      <a:pPr marL="0" indent="0" algn="ctr">
                         <a:buNone/>
                       </a:pPr>
                       <a:r>
@@ -17218,7 +17619,7 @@
                     <a:bodyPr/>
                     <a:lstStyle/>
                     <a:p>
-                      <a:pPr indent="0" marL="0">
+                      <a:pPr marL="0" indent="0">
                         <a:buNone/>
                       </a:pPr>
                       <a:r>
@@ -17278,6 +17679,11 @@
                     </a:lnB>
                   </a:tcPr>
                 </a:tc>
+                <a:extLst>
+                  <a:ext uri="{0D108BD9-81ED-4DB2-BD59-A6C34878D82A}">
+                    <a16:rowId xmlns:a16="http://schemas.microsoft.com/office/drawing/2014/main" val="10004"/>
+                  </a:ext>
+                </a:extLst>
               </a:tr>
               <a:tr h="306324">
                 <a:tc>
@@ -17285,7 +17691,7 @@
                     <a:bodyPr/>
                     <a:lstStyle/>
                     <a:p>
-                      <a:pPr indent="0" marL="0">
+                      <a:pPr marL="0" indent="0">
                         <a:buNone/>
                       </a:pPr>
                       <a:r>
@@ -17350,7 +17756,7 @@
                     <a:bodyPr/>
                     <a:lstStyle/>
                     <a:p>
-                      <a:pPr algn="ctr" indent="0" marL="0">
+                      <a:pPr marL="0" indent="0" algn="ctr">
                         <a:buNone/>
                       </a:pPr>
                       <a:r>
@@ -17418,7 +17824,7 @@
                     <a:bodyPr/>
                     <a:lstStyle/>
                     <a:p>
-                      <a:pPr indent="0" marL="0">
+                      <a:pPr marL="0" indent="0">
                         <a:buNone/>
                       </a:pPr>
                       <a:r>
@@ -17478,6 +17884,11 @@
                     </a:lnB>
                   </a:tcPr>
                 </a:tc>
+                <a:extLst>
+                  <a:ext uri="{0D108BD9-81ED-4DB2-BD59-A6C34878D82A}">
+                    <a16:rowId xmlns:a16="http://schemas.microsoft.com/office/drawing/2014/main" val="10005"/>
+                  </a:ext>
+                </a:extLst>
               </a:tr>
               <a:tr h="306324">
                 <a:tc>
@@ -17485,7 +17896,7 @@
                     <a:bodyPr/>
                     <a:lstStyle/>
                     <a:p>
-                      <a:pPr indent="0" marL="0">
+                      <a:pPr marL="0" indent="0">
                         <a:buNone/>
                       </a:pPr>
                       <a:r>
@@ -17550,7 +17961,7 @@
                     <a:bodyPr/>
                     <a:lstStyle/>
                     <a:p>
-                      <a:pPr algn="ctr" indent="0" marL="0">
+                      <a:pPr marL="0" indent="0" algn="ctr">
                         <a:buNone/>
                       </a:pPr>
                       <a:r>
@@ -17618,7 +18029,7 @@
                     <a:bodyPr/>
                     <a:lstStyle/>
                     <a:p>
-                      <a:pPr indent="0" marL="0">
+                      <a:pPr marL="0" indent="0">
                         <a:buNone/>
                       </a:pPr>
                       <a:r>
@@ -17678,6 +18089,11 @@
                     </a:lnB>
                   </a:tcPr>
                 </a:tc>
+                <a:extLst>
+                  <a:ext uri="{0D108BD9-81ED-4DB2-BD59-A6C34878D82A}">
+                    <a16:rowId xmlns:a16="http://schemas.microsoft.com/office/drawing/2014/main" val="10006"/>
+                  </a:ext>
+                </a:extLst>
               </a:tr>
               <a:tr h="306324">
                 <a:tc>
@@ -17685,7 +18101,7 @@
                     <a:bodyPr/>
                     <a:lstStyle/>
                     <a:p>
-                      <a:pPr indent="0" marL="0">
+                      <a:pPr marL="0" indent="0">
                         <a:buNone/>
                       </a:pPr>
                       <a:r>
@@ -17750,7 +18166,7 @@
                     <a:bodyPr/>
                     <a:lstStyle/>
                     <a:p>
-                      <a:pPr algn="ctr" indent="0" marL="0">
+                      <a:pPr marL="0" indent="0" algn="ctr">
                         <a:buNone/>
                       </a:pPr>
                       <a:r>
@@ -17818,7 +18234,7 @@
                     <a:bodyPr/>
                     <a:lstStyle/>
                     <a:p>
-                      <a:pPr indent="0" marL="0">
+                      <a:pPr marL="0" indent="0">
                         <a:buNone/>
                       </a:pPr>
                       <a:r>
@@ -17878,6 +18294,11 @@
                     </a:lnB>
                   </a:tcPr>
                 </a:tc>
+                <a:extLst>
+                  <a:ext uri="{0D108BD9-81ED-4DB2-BD59-A6C34878D82A}">
+                    <a16:rowId xmlns:a16="http://schemas.microsoft.com/office/drawing/2014/main" val="10007"/>
+                  </a:ext>
+                </a:extLst>
               </a:tr>
               <a:tr h="306324">
                 <a:tc>
@@ -17885,7 +18306,7 @@
                     <a:bodyPr/>
                     <a:lstStyle/>
                     <a:p>
-                      <a:pPr indent="0" marL="0">
+                      <a:pPr marL="0" indent="0">
                         <a:buNone/>
                       </a:pPr>
                       <a:r>
@@ -17950,7 +18371,7 @@
                     <a:bodyPr/>
                     <a:lstStyle/>
                     <a:p>
-                      <a:pPr algn="ctr" indent="0" marL="0">
+                      <a:pPr marL="0" indent="0" algn="ctr">
                         <a:buNone/>
                       </a:pPr>
                       <a:r>
@@ -18018,7 +18439,7 @@
                     <a:bodyPr/>
                     <a:lstStyle/>
                     <a:p>
-                      <a:pPr indent="0" marL="0">
+                      <a:pPr marL="0" indent="0">
                         <a:buNone/>
                       </a:pPr>
                       <a:r>
@@ -18078,6 +18499,11 @@
                     </a:lnB>
                   </a:tcPr>
                 </a:tc>
+                <a:extLst>
+                  <a:ext uri="{0D108BD9-81ED-4DB2-BD59-A6C34878D82A}">
+                    <a16:rowId xmlns:a16="http://schemas.microsoft.com/office/drawing/2014/main" val="10008"/>
+                  </a:ext>
+                </a:extLst>
               </a:tr>
               <a:tr h="306324">
                 <a:tc>
@@ -18085,7 +18511,7 @@
                     <a:bodyPr/>
                     <a:lstStyle/>
                     <a:p>
-                      <a:pPr indent="0" marL="0">
+                      <a:pPr marL="0" indent="0">
                         <a:buNone/>
                       </a:pPr>
                       <a:r>
@@ -18150,7 +18576,7 @@
                     <a:bodyPr/>
                     <a:lstStyle/>
                     <a:p>
-                      <a:pPr algn="ctr" indent="0" marL="0">
+                      <a:pPr marL="0" indent="0" algn="ctr">
                         <a:buNone/>
                       </a:pPr>
                       <a:r>
@@ -18218,7 +18644,7 @@
                     <a:bodyPr/>
                     <a:lstStyle/>
                     <a:p>
-                      <a:pPr indent="0" marL="0">
+                      <a:pPr marL="0" indent="0">
                         <a:buNone/>
                       </a:pPr>
                       <a:r>
@@ -18278,6 +18704,11 @@
                     </a:lnB>
                   </a:tcPr>
                 </a:tc>
+                <a:extLst>
+                  <a:ext uri="{0D108BD9-81ED-4DB2-BD59-A6C34878D82A}">
+                    <a16:rowId xmlns:a16="http://schemas.microsoft.com/office/drawing/2014/main" val="10009"/>
+                  </a:ext>
+                </a:extLst>
               </a:tr>
               <a:tr h="306324">
                 <a:tc>
@@ -18285,7 +18716,7 @@
                     <a:bodyPr/>
                     <a:lstStyle/>
                     <a:p>
-                      <a:pPr indent="0" marL="0">
+                      <a:pPr marL="0" indent="0">
                         <a:buNone/>
                       </a:pPr>
                       <a:r>
@@ -18350,7 +18781,7 @@
                     <a:bodyPr/>
                     <a:lstStyle/>
                     <a:p>
-                      <a:pPr algn="ctr" indent="0" marL="0">
+                      <a:pPr marL="0" indent="0" algn="ctr">
                         <a:buNone/>
                       </a:pPr>
                       <a:r>
@@ -18418,7 +18849,7 @@
                     <a:bodyPr/>
                     <a:lstStyle/>
                     <a:p>
-                      <a:pPr indent="0" marL="0">
+                      <a:pPr marL="0" indent="0">
                         <a:buNone/>
                       </a:pPr>
                       <a:r>
@@ -18478,6 +18909,11 @@
                     </a:lnB>
                   </a:tcPr>
                 </a:tc>
+                <a:extLst>
+                  <a:ext uri="{0D108BD9-81ED-4DB2-BD59-A6C34878D82A}">
+                    <a16:rowId xmlns:a16="http://schemas.microsoft.com/office/drawing/2014/main" val="10010"/>
+                  </a:ext>
+                </a:extLst>
               </a:tr>
               <a:tr h="306324">
                 <a:tc>
@@ -18485,7 +18921,7 @@
                     <a:bodyPr/>
                     <a:lstStyle/>
                     <a:p>
-                      <a:pPr indent="0" marL="0">
+                      <a:pPr marL="0" indent="0">
                         <a:buNone/>
                       </a:pPr>
                       <a:r>
@@ -18550,7 +18986,7 @@
                     <a:bodyPr/>
                     <a:lstStyle/>
                     <a:p>
-                      <a:pPr algn="ctr" indent="0" marL="0">
+                      <a:pPr marL="0" indent="0" algn="ctr">
                         <a:buNone/>
                       </a:pPr>
                       <a:r>
@@ -18618,7 +19054,7 @@
                     <a:bodyPr/>
                     <a:lstStyle/>
                     <a:p>
-                      <a:pPr indent="0" marL="0">
+                      <a:pPr marL="0" indent="0">
                         <a:buNone/>
                       </a:pPr>
                       <a:r>
@@ -18678,6 +19114,11 @@
                     </a:lnB>
                   </a:tcPr>
                 </a:tc>
+                <a:extLst>
+                  <a:ext uri="{0D108BD9-81ED-4DB2-BD59-A6C34878D82A}">
+                    <a16:rowId xmlns:a16="http://schemas.microsoft.com/office/drawing/2014/main" val="10011"/>
+                  </a:ext>
+                </a:extLst>
               </a:tr>
               <a:tr h="306324">
                 <a:tc>
@@ -18685,7 +19126,7 @@
                     <a:bodyPr/>
                     <a:lstStyle/>
                     <a:p>
-                      <a:pPr indent="0" marL="0">
+                      <a:pPr marL="0" indent="0">
                         <a:buNone/>
                       </a:pPr>
                       <a:r>
@@ -18750,7 +19191,7 @@
                     <a:bodyPr/>
                     <a:lstStyle/>
                     <a:p>
-                      <a:pPr algn="ctr" indent="0" marL="0">
+                      <a:pPr marL="0" indent="0" algn="ctr">
                         <a:buNone/>
                       </a:pPr>
                       <a:r>
@@ -18818,7 +19259,7 @@
                     <a:bodyPr/>
                     <a:lstStyle/>
                     <a:p>
-                      <a:pPr indent="0" marL="0">
+                      <a:pPr marL="0" indent="0">
                         <a:buNone/>
                       </a:pPr>
                       <a:r>
@@ -18878,6 +19319,11 @@
                     </a:lnB>
                   </a:tcPr>
                 </a:tc>
+                <a:extLst>
+                  <a:ext uri="{0D108BD9-81ED-4DB2-BD59-A6C34878D82A}">
+                    <a16:rowId xmlns:a16="http://schemas.microsoft.com/office/drawing/2014/main" val="10012"/>
+                  </a:ext>
+                </a:extLst>
               </a:tr>
               <a:tr h="306324">
                 <a:tc>
@@ -18885,7 +19331,7 @@
                     <a:bodyPr/>
                     <a:lstStyle/>
                     <a:p>
-                      <a:pPr indent="0" marL="0">
+                      <a:pPr marL="0" indent="0">
                         <a:buNone/>
                       </a:pPr>
                       <a:r>
@@ -18950,7 +19396,7 @@
                     <a:bodyPr/>
                     <a:lstStyle/>
                     <a:p>
-                      <a:pPr algn="ctr" indent="0" marL="0">
+                      <a:pPr marL="0" indent="0" algn="ctr">
                         <a:buNone/>
                       </a:pPr>
                       <a:r>
@@ -19018,7 +19464,7 @@
                     <a:bodyPr/>
                     <a:lstStyle/>
                     <a:p>
-                      <a:pPr indent="0" marL="0">
+                      <a:pPr marL="0" indent="0">
                         <a:buNone/>
                       </a:pPr>
                       <a:r>
@@ -19078,6 +19524,11 @@
                     </a:lnB>
                   </a:tcPr>
                 </a:tc>
+                <a:extLst>
+                  <a:ext uri="{0D108BD9-81ED-4DB2-BD59-A6C34878D82A}">
+                    <a16:rowId xmlns:a16="http://schemas.microsoft.com/office/drawing/2014/main" val="10013"/>
+                  </a:ext>
+                </a:extLst>
               </a:tr>
               <a:tr h="306324">
                 <a:tc>
@@ -19085,7 +19536,7 @@
                     <a:bodyPr/>
                     <a:lstStyle/>
                     <a:p>
-                      <a:pPr indent="0" marL="0">
+                      <a:pPr marL="0" indent="0">
                         <a:buNone/>
                       </a:pPr>
                       <a:r>
@@ -19150,7 +19601,7 @@
                     <a:bodyPr/>
                     <a:lstStyle/>
                     <a:p>
-                      <a:pPr algn="ctr" indent="0" marL="0">
+                      <a:pPr marL="0" indent="0" algn="ctr">
                         <a:buNone/>
                       </a:pPr>
                       <a:r>
@@ -19218,7 +19669,7 @@
                     <a:bodyPr/>
                     <a:lstStyle/>
                     <a:p>
-                      <a:pPr indent="0" marL="0">
+                      <a:pPr marL="0" indent="0">
                         <a:buNone/>
                       </a:pPr>
                       <a:r>
@@ -19278,6 +19729,11 @@
                     </a:lnB>
                   </a:tcPr>
                 </a:tc>
+                <a:extLst>
+                  <a:ext uri="{0D108BD9-81ED-4DB2-BD59-A6C34878D82A}">
+                    <a16:rowId xmlns:a16="http://schemas.microsoft.com/office/drawing/2014/main" val="10014"/>
+                  </a:ext>
+                </a:extLst>
               </a:tr>
               <a:tr h="306324">
                 <a:tc>
@@ -19285,7 +19741,7 @@
                     <a:bodyPr/>
                     <a:lstStyle/>
                     <a:p>
-                      <a:pPr indent="0" marL="0">
+                      <a:pPr marL="0" indent="0">
                         <a:buNone/>
                       </a:pPr>
                       <a:r>
@@ -19350,7 +19806,7 @@
                     <a:bodyPr/>
                     <a:lstStyle/>
                     <a:p>
-                      <a:pPr algn="ctr" indent="0" marL="0">
+                      <a:pPr marL="0" indent="0" algn="ctr">
                         <a:buNone/>
                       </a:pPr>
                       <a:r>
@@ -19418,7 +19874,7 @@
                     <a:bodyPr/>
                     <a:lstStyle/>
                     <a:p>
-                      <a:pPr indent="0" marL="0">
+                      <a:pPr marL="0" indent="0">
                         <a:buNone/>
                       </a:pPr>
                       <a:r>
@@ -19478,6 +19934,11 @@
                     </a:lnB>
                   </a:tcPr>
                 </a:tc>
+                <a:extLst>
+                  <a:ext uri="{0D108BD9-81ED-4DB2-BD59-A6C34878D82A}">
+                    <a16:rowId xmlns:a16="http://schemas.microsoft.com/office/drawing/2014/main" val="10015"/>
+                  </a:ext>
+                </a:extLst>
               </a:tr>
             </a:tbl>
           </a:graphicData>
@@ -19504,7 +19965,7 @@
           <a:bodyPr wrap="square" rtlCol="0" anchor="ctr"/>
           <a:lstStyle/>
           <a:p>
-            <a:pPr algn="l" indent="0" marL="0">
+            <a:pPr marL="0" indent="0" algn="l">
               <a:buNone/>
             </a:pPr>
             <a:r>
@@ -19543,7 +20004,7 @@
           <a:bodyPr wrap="square" rtlCol="0" anchor="ctr"/>
           <a:lstStyle/>
           <a:p>
-            <a:pPr algn="r" indent="0" marL="0">
+            <a:pPr marL="0" indent="0" algn="r">
               <a:buNone/>
             </a:pPr>
             <a:r>
@@ -19577,6 +20038,7 @@
         <a:solidFill>
           <a:srgbClr val="FFFFFF"/>
         </a:solidFill>
+        <a:effectLst/>
       </p:bgPr>
     </p:bg>
     <p:spTree>
@@ -19614,11 +20076,11 @@
           <a:bodyPr wrap="square" rtlCol="0" anchor="ctr"/>
           <a:lstStyle/>
           <a:p>
-            <a:pPr indent="0" marL="0">
+            <a:pPr marL="0" indent="0">
               <a:buNone/>
             </a:pPr>
             <a:r>
-              <a:rPr lang="en-US" sz="1200" b="1" spc="200" kern="0" dirty="0">
+              <a:rPr lang="en-US" sz="1200" b="1" kern="0" spc="200" dirty="0">
                 <a:solidFill>
                   <a:srgbClr val="B97E1F"/>
                 </a:solidFill>
@@ -19653,7 +20115,7 @@
           <a:bodyPr wrap="square" rtlCol="0" anchor="ctr"/>
           <a:lstStyle/>
           <a:p>
-            <a:pPr indent="0" marL="0">
+            <a:pPr marL="0" indent="0">
               <a:buNone/>
             </a:pPr>
             <a:r>
@@ -19692,6 +20154,13 @@
           </a:solidFill>
           <a:ln/>
         </p:spPr>
+        <p:txBody>
+          <a:bodyPr/>
+          <a:lstStyle/>
+          <a:p>
+            <a:endParaRPr lang="es-PE"/>
+          </a:p>
+        </p:txBody>
       </p:sp>
       <p:sp>
         <p:nvSpPr>
@@ -19714,7 +20183,7 @@
           <a:bodyPr wrap="square" rtlCol="0" anchor="ctr"/>
           <a:lstStyle/>
           <a:p>
-            <a:pPr algn="ctr" indent="0" marL="0">
+            <a:pPr marL="0" indent="0" algn="ctr">
               <a:buNone/>
             </a:pPr>
             <a:r>
@@ -19753,7 +20222,7 @@
           <a:bodyPr wrap="square" rtlCol="0" anchor="ctr"/>
           <a:lstStyle/>
           <a:p>
-            <a:pPr algn="ctr" indent="0" marL="0">
+            <a:pPr marL="0" indent="0" algn="ctr">
               <a:buNone/>
             </a:pPr>
             <a:r>
@@ -19792,7 +20261,7 @@
           <a:bodyPr wrap="square" rtlCol="0" anchor="ctr"/>
           <a:lstStyle/>
           <a:p>
-            <a:pPr algn="ctr" indent="0" marL="0">
+            <a:pPr marL="0" indent="0" algn="ctr">
               <a:buNone/>
             </a:pPr>
             <a:r>
@@ -19832,6 +20301,13 @@
             <a:prstDash val="solid"/>
           </a:ln>
         </p:spPr>
+        <p:txBody>
+          <a:bodyPr/>
+          <a:lstStyle/>
+          <a:p>
+            <a:endParaRPr lang="es-PE"/>
+          </a:p>
+        </p:txBody>
       </p:sp>
       <p:sp>
         <p:nvSpPr>
@@ -19854,7 +20330,7 @@
           <a:bodyPr wrap="square" rtlCol="0" anchor="ctr"/>
           <a:lstStyle/>
           <a:p>
-            <a:pPr algn="ctr" indent="0" marL="0">
+            <a:pPr marL="0" indent="0" algn="ctr">
               <a:lnSpc>
                 <a:spcPct val="125000"/>
               </a:lnSpc>
@@ -19877,7 +20353,7 @@
       </p:sp>
       <p:graphicFrame>
         <p:nvGraphicFramePr>
-          <p:cNvPr id="9" name="Table 0"/>
+          <p:cNvPr id="10" name="Table 0"/>
           <p:cNvGraphicFramePr>
             <a:graphicFrameLocks noGrp="1"/>
           </p:cNvGraphicFramePr>
@@ -19891,16 +20367,34 @@
         </p:nvGraphicFramePr>
         <p:xfrm>
           <a:off x="3246120" y="1463040"/>
-          <a:ext cx="8442655" cy="4709160"/>
+          <a:ext cx="8442655" cy="4677156"/>
         </p:xfrm>
         <a:graphic>
           <a:graphicData uri="http://schemas.openxmlformats.org/drawingml/2006/table">
             <a:tbl>
               <a:tblPr/>
               <a:tblGrid>
-                <a:gridCol w="457200"/>
-                <a:gridCol w="5242255"/>
-                <a:gridCol w="2743200"/>
+                <a:gridCol w="457200">
+                  <a:extLst>
+                    <a:ext uri="{9D8B030D-6E8A-4147-A177-3AD203B41FA5}">
+                      <a16:colId xmlns:a16="http://schemas.microsoft.com/office/drawing/2014/main" val="20000"/>
+                    </a:ext>
+                  </a:extLst>
+                </a:gridCol>
+                <a:gridCol w="5242255">
+                  <a:extLst>
+                    <a:ext uri="{9D8B030D-6E8A-4147-A177-3AD203B41FA5}">
+                      <a16:colId xmlns:a16="http://schemas.microsoft.com/office/drawing/2014/main" val="20001"/>
+                    </a:ext>
+                  </a:extLst>
+                </a:gridCol>
+                <a:gridCol w="2743200">
+                  <a:extLst>
+                    <a:ext uri="{9D8B030D-6E8A-4147-A177-3AD203B41FA5}">
+                      <a16:colId xmlns:a16="http://schemas.microsoft.com/office/drawing/2014/main" val="20002"/>
+                    </a:ext>
+                  </a:extLst>
+                </a:gridCol>
               </a:tblGrid>
               <a:tr h="425196">
                 <a:tc>
@@ -19908,7 +20402,7 @@
                     <a:bodyPr/>
                     <a:lstStyle/>
                     <a:p>
-                      <a:pPr algn="ctr" indent="0" marL="0">
+                      <a:pPr marL="0" indent="0" algn="ctr">
                         <a:buNone/>
                       </a:pPr>
                       <a:r>
@@ -19976,7 +20470,7 @@
                     <a:bodyPr/>
                     <a:lstStyle/>
                     <a:p>
-                      <a:pPr indent="0" marL="0">
+                      <a:pPr marL="0" indent="0">
                         <a:buNone/>
                       </a:pPr>
                       <a:r>
@@ -20044,7 +20538,7 @@
                     <a:bodyPr/>
                     <a:lstStyle/>
                     <a:p>
-                      <a:pPr indent="0" marL="0">
+                      <a:pPr marL="0" indent="0">
                         <a:buNone/>
                       </a:pPr>
                       <a:r>
@@ -20107,6 +20601,11 @@
                     </a:solidFill>
                   </a:tcPr>
                 </a:tc>
+                <a:extLst>
+                  <a:ext uri="{0D108BD9-81ED-4DB2-BD59-A6C34878D82A}">
+                    <a16:rowId xmlns:a16="http://schemas.microsoft.com/office/drawing/2014/main" val="10000"/>
+                  </a:ext>
+                </a:extLst>
               </a:tr>
               <a:tr h="425196">
                 <a:tc>
@@ -20114,7 +20613,7 @@
                     <a:bodyPr/>
                     <a:lstStyle/>
                     <a:p>
-                      <a:pPr algn="ctr" indent="0" marL="0">
+                      <a:pPr marL="0" indent="0" algn="ctr">
                         <a:buNone/>
                       </a:pPr>
                       <a:r>
@@ -20179,7 +20678,7 @@
                     <a:bodyPr/>
                     <a:lstStyle/>
                     <a:p>
-                      <a:pPr indent="0" marL="0">
+                      <a:pPr marL="0" indent="0">
                         <a:buNone/>
                       </a:pPr>
                       <a:r>
@@ -20244,7 +20743,7 @@
                     <a:bodyPr/>
                     <a:lstStyle/>
                     <a:p>
-                      <a:pPr indent="0" marL="0">
+                      <a:pPr marL="0" indent="0">
                         <a:buNone/>
                       </a:pPr>
                       <a:r>
@@ -20307,6 +20806,11 @@
                     </a:solidFill>
                   </a:tcPr>
                 </a:tc>
+                <a:extLst>
+                  <a:ext uri="{0D108BD9-81ED-4DB2-BD59-A6C34878D82A}">
+                    <a16:rowId xmlns:a16="http://schemas.microsoft.com/office/drawing/2014/main" val="10001"/>
+                  </a:ext>
+                </a:extLst>
               </a:tr>
               <a:tr h="425196">
                 <a:tc>
@@ -20314,7 +20818,7 @@
                     <a:bodyPr/>
                     <a:lstStyle/>
                     <a:p>
-                      <a:pPr algn="ctr" indent="0" marL="0">
+                      <a:pPr marL="0" indent="0" algn="ctr">
                         <a:buNone/>
                       </a:pPr>
                       <a:r>
@@ -20379,7 +20883,7 @@
                     <a:bodyPr/>
                     <a:lstStyle/>
                     <a:p>
-                      <a:pPr indent="0" marL="0">
+                      <a:pPr marL="0" indent="0">
                         <a:buNone/>
                       </a:pPr>
                       <a:r>
@@ -20444,7 +20948,7 @@
                     <a:bodyPr/>
                     <a:lstStyle/>
                     <a:p>
-                      <a:pPr indent="0" marL="0">
+                      <a:pPr marL="0" indent="0">
                         <a:buNone/>
                       </a:pPr>
                       <a:r>
@@ -20507,6 +21011,11 @@
                     </a:solidFill>
                   </a:tcPr>
                 </a:tc>
+                <a:extLst>
+                  <a:ext uri="{0D108BD9-81ED-4DB2-BD59-A6C34878D82A}">
+                    <a16:rowId xmlns:a16="http://schemas.microsoft.com/office/drawing/2014/main" val="10002"/>
+                  </a:ext>
+                </a:extLst>
               </a:tr>
               <a:tr h="425196">
                 <a:tc>
@@ -20514,7 +21023,7 @@
                     <a:bodyPr/>
                     <a:lstStyle/>
                     <a:p>
-                      <a:pPr algn="ctr" indent="0" marL="0">
+                      <a:pPr marL="0" indent="0" algn="ctr">
                         <a:buNone/>
                       </a:pPr>
                       <a:r>
@@ -20579,7 +21088,7 @@
                     <a:bodyPr/>
                     <a:lstStyle/>
                     <a:p>
-                      <a:pPr indent="0" marL="0">
+                      <a:pPr marL="0" indent="0">
                         <a:buNone/>
                       </a:pPr>
                       <a:r>
@@ -20644,7 +21153,7 @@
                     <a:bodyPr/>
                     <a:lstStyle/>
                     <a:p>
-                      <a:pPr indent="0" marL="0">
+                      <a:pPr marL="0" indent="0">
                         <a:buNone/>
                       </a:pPr>
                       <a:r>
@@ -20707,6 +21216,11 @@
                     </a:solidFill>
                   </a:tcPr>
                 </a:tc>
+                <a:extLst>
+                  <a:ext uri="{0D108BD9-81ED-4DB2-BD59-A6C34878D82A}">
+                    <a16:rowId xmlns:a16="http://schemas.microsoft.com/office/drawing/2014/main" val="10003"/>
+                  </a:ext>
+                </a:extLst>
               </a:tr>
               <a:tr h="425196">
                 <a:tc>
@@ -20714,7 +21228,7 @@
                     <a:bodyPr/>
                     <a:lstStyle/>
                     <a:p>
-                      <a:pPr algn="ctr" indent="0" marL="0">
+                      <a:pPr marL="0" indent="0" algn="ctr">
                         <a:buNone/>
                       </a:pPr>
                       <a:r>
@@ -20779,7 +21293,7 @@
                     <a:bodyPr/>
                     <a:lstStyle/>
                     <a:p>
-                      <a:pPr indent="0" marL="0">
+                      <a:pPr marL="0" indent="0">
                         <a:buNone/>
                       </a:pPr>
                       <a:r>
@@ -20844,7 +21358,7 @@
                     <a:bodyPr/>
                     <a:lstStyle/>
                     <a:p>
-                      <a:pPr indent="0" marL="0">
+                      <a:pPr marL="0" indent="0">
                         <a:buNone/>
                       </a:pPr>
                       <a:r>
@@ -20907,6 +21421,11 @@
                     </a:solidFill>
                   </a:tcPr>
                 </a:tc>
+                <a:extLst>
+                  <a:ext uri="{0D108BD9-81ED-4DB2-BD59-A6C34878D82A}">
+                    <a16:rowId xmlns:a16="http://schemas.microsoft.com/office/drawing/2014/main" val="10004"/>
+                  </a:ext>
+                </a:extLst>
               </a:tr>
               <a:tr h="425196">
                 <a:tc>
@@ -20914,7 +21433,7 @@
                     <a:bodyPr/>
                     <a:lstStyle/>
                     <a:p>
-                      <a:pPr algn="ctr" indent="0" marL="0">
+                      <a:pPr marL="0" indent="0" algn="ctr">
                         <a:buNone/>
                       </a:pPr>
                       <a:r>
@@ -20979,7 +21498,7 @@
                     <a:bodyPr/>
                     <a:lstStyle/>
                     <a:p>
-                      <a:pPr indent="0" marL="0">
+                      <a:pPr marL="0" indent="0">
                         <a:buNone/>
                       </a:pPr>
                       <a:r>
@@ -21044,7 +21563,7 @@
                     <a:bodyPr/>
                     <a:lstStyle/>
                     <a:p>
-                      <a:pPr indent="0" marL="0">
+                      <a:pPr marL="0" indent="0">
                         <a:buNone/>
                       </a:pPr>
                       <a:r>
@@ -21107,6 +21626,11 @@
                     </a:solidFill>
                   </a:tcPr>
                 </a:tc>
+                <a:extLst>
+                  <a:ext uri="{0D108BD9-81ED-4DB2-BD59-A6C34878D82A}">
+                    <a16:rowId xmlns:a16="http://schemas.microsoft.com/office/drawing/2014/main" val="10005"/>
+                  </a:ext>
+                </a:extLst>
               </a:tr>
               <a:tr h="425196">
                 <a:tc>
@@ -21114,7 +21638,7 @@
                     <a:bodyPr/>
                     <a:lstStyle/>
                     <a:p>
-                      <a:pPr algn="ctr" indent="0" marL="0">
+                      <a:pPr marL="0" indent="0" algn="ctr">
                         <a:buNone/>
                       </a:pPr>
                       <a:r>
@@ -21179,7 +21703,7 @@
                     <a:bodyPr/>
                     <a:lstStyle/>
                     <a:p>
-                      <a:pPr indent="0" marL="0">
+                      <a:pPr marL="0" indent="0">
                         <a:buNone/>
                       </a:pPr>
                       <a:r>
@@ -21244,7 +21768,7 @@
                     <a:bodyPr/>
                     <a:lstStyle/>
                     <a:p>
-                      <a:pPr indent="0" marL="0">
+                      <a:pPr marL="0" indent="0">
                         <a:buNone/>
                       </a:pPr>
                       <a:r>
@@ -21307,6 +21831,11 @@
                     </a:solidFill>
                   </a:tcPr>
                 </a:tc>
+                <a:extLst>
+                  <a:ext uri="{0D108BD9-81ED-4DB2-BD59-A6C34878D82A}">
+                    <a16:rowId xmlns:a16="http://schemas.microsoft.com/office/drawing/2014/main" val="10006"/>
+                  </a:ext>
+                </a:extLst>
               </a:tr>
               <a:tr h="425196">
                 <a:tc>
@@ -21314,7 +21843,7 @@
                     <a:bodyPr/>
                     <a:lstStyle/>
                     <a:p>
-                      <a:pPr algn="ctr" indent="0" marL="0">
+                      <a:pPr marL="0" indent="0" algn="ctr">
                         <a:buNone/>
                       </a:pPr>
                       <a:r>
@@ -21379,7 +21908,7 @@
                     <a:bodyPr/>
                     <a:lstStyle/>
                     <a:p>
-                      <a:pPr indent="0" marL="0">
+                      <a:pPr marL="0" indent="0">
                         <a:buNone/>
                       </a:pPr>
                       <a:r>
@@ -21444,7 +21973,7 @@
                     <a:bodyPr/>
                     <a:lstStyle/>
                     <a:p>
-                      <a:pPr indent="0" marL="0">
+                      <a:pPr marL="0" indent="0">
                         <a:buNone/>
                       </a:pPr>
                       <a:r>
@@ -21507,6 +22036,11 @@
                     </a:solidFill>
                   </a:tcPr>
                 </a:tc>
+                <a:extLst>
+                  <a:ext uri="{0D108BD9-81ED-4DB2-BD59-A6C34878D82A}">
+                    <a16:rowId xmlns:a16="http://schemas.microsoft.com/office/drawing/2014/main" val="10007"/>
+                  </a:ext>
+                </a:extLst>
               </a:tr>
               <a:tr h="425196">
                 <a:tc>
@@ -21514,7 +22048,7 @@
                     <a:bodyPr/>
                     <a:lstStyle/>
                     <a:p>
-                      <a:pPr algn="ctr" indent="0" marL="0">
+                      <a:pPr marL="0" indent="0" algn="ctr">
                         <a:buNone/>
                       </a:pPr>
                       <a:r>
@@ -21579,7 +22113,7 @@
                     <a:bodyPr/>
                     <a:lstStyle/>
                     <a:p>
-                      <a:pPr indent="0" marL="0">
+                      <a:pPr marL="0" indent="0">
                         <a:buNone/>
                       </a:pPr>
                       <a:r>
@@ -21644,7 +22178,7 @@
                     <a:bodyPr/>
                     <a:lstStyle/>
                     <a:p>
-                      <a:pPr indent="0" marL="0">
+                      <a:pPr marL="0" indent="0">
                         <a:buNone/>
                       </a:pPr>
                       <a:r>
@@ -21707,6 +22241,11 @@
                     </a:solidFill>
                   </a:tcPr>
                 </a:tc>
+                <a:extLst>
+                  <a:ext uri="{0D108BD9-81ED-4DB2-BD59-A6C34878D82A}">
+                    <a16:rowId xmlns:a16="http://schemas.microsoft.com/office/drawing/2014/main" val="10008"/>
+                  </a:ext>
+                </a:extLst>
               </a:tr>
               <a:tr h="425196">
                 <a:tc>
@@ -21714,7 +22253,7 @@
                     <a:bodyPr/>
                     <a:lstStyle/>
                     <a:p>
-                      <a:pPr algn="ctr" indent="0" marL="0">
+                      <a:pPr marL="0" indent="0" algn="ctr">
                         <a:buNone/>
                       </a:pPr>
                       <a:r>
@@ -21779,7 +22318,7 @@
                     <a:bodyPr/>
                     <a:lstStyle/>
                     <a:p>
-                      <a:pPr indent="0" marL="0">
+                      <a:pPr marL="0" indent="0">
                         <a:buNone/>
                       </a:pPr>
                       <a:r>
@@ -21844,7 +22383,7 @@
                     <a:bodyPr/>
                     <a:lstStyle/>
                     <a:p>
-                      <a:pPr indent="0" marL="0">
+                      <a:pPr marL="0" indent="0">
                         <a:buNone/>
                       </a:pPr>
                       <a:r>
@@ -21907,6 +22446,11 @@
                     </a:solidFill>
                   </a:tcPr>
                 </a:tc>
+                <a:extLst>
+                  <a:ext uri="{0D108BD9-81ED-4DB2-BD59-A6C34878D82A}">
+                    <a16:rowId xmlns:a16="http://schemas.microsoft.com/office/drawing/2014/main" val="10009"/>
+                  </a:ext>
+                </a:extLst>
               </a:tr>
               <a:tr h="425196">
                 <a:tc>
@@ -21914,7 +22458,7 @@
                     <a:bodyPr/>
                     <a:lstStyle/>
                     <a:p>
-                      <a:pPr algn="ctr" indent="0" marL="0">
+                      <a:pPr marL="0" indent="0" algn="ctr">
                         <a:buNone/>
                       </a:pPr>
                       <a:r>
@@ -21979,7 +22523,7 @@
                     <a:bodyPr/>
                     <a:lstStyle/>
                     <a:p>
-                      <a:pPr indent="0" marL="0">
+                      <a:pPr marL="0" indent="0">
                         <a:buNone/>
                       </a:pPr>
                       <a:r>
@@ -22044,7 +22588,7 @@
                     <a:bodyPr/>
                     <a:lstStyle/>
                     <a:p>
-                      <a:pPr indent="0" marL="0">
+                      <a:pPr marL="0" indent="0">
                         <a:buNone/>
                       </a:pPr>
                       <a:r>
@@ -22107,6 +22651,11 @@
                     </a:solidFill>
                   </a:tcPr>
                 </a:tc>
+                <a:extLst>
+                  <a:ext uri="{0D108BD9-81ED-4DB2-BD59-A6C34878D82A}">
+                    <a16:rowId xmlns:a16="http://schemas.microsoft.com/office/drawing/2014/main" val="10010"/>
+                  </a:ext>
+                </a:extLst>
               </a:tr>
             </a:tbl>
           </a:graphicData>
@@ -22133,7 +22682,7 @@
           <a:bodyPr wrap="square" rtlCol="0" anchor="ctr"/>
           <a:lstStyle/>
           <a:p>
-            <a:pPr algn="l" indent="0" marL="0">
+            <a:pPr marL="0" indent="0" algn="l">
               <a:buNone/>
             </a:pPr>
             <a:r>
@@ -22172,7 +22721,7 @@
           <a:bodyPr wrap="square" rtlCol="0" anchor="ctr"/>
           <a:lstStyle/>
           <a:p>
-            <a:pPr algn="r" indent="0" marL="0">
+            <a:pPr marL="0" indent="0" algn="r">
               <a:buNone/>
             </a:pPr>
             <a:r>
@@ -22206,6 +22755,7 @@
         <a:solidFill>
           <a:srgbClr val="1B2333"/>
         </a:solidFill>
+        <a:effectLst/>
       </p:bgPr>
     </p:bg>
     <p:spTree>
@@ -22243,11 +22793,11 @@
           <a:bodyPr wrap="square" rtlCol="0" anchor="ctr"/>
           <a:lstStyle/>
           <a:p>
-            <a:pPr indent="0" marL="0">
+            <a:pPr marL="0" indent="0">
               <a:buNone/>
             </a:pPr>
             <a:r>
-              <a:rPr lang="en-US" sz="1200" b="1" spc="200" kern="0" dirty="0">
+              <a:rPr lang="en-US" sz="1200" b="1" kern="0" spc="200" dirty="0">
                 <a:solidFill>
                   <a:srgbClr val="E8A33D"/>
                 </a:solidFill>
@@ -22282,7 +22832,7 @@
           <a:bodyPr wrap="square" rtlCol="0" anchor="ctr"/>
           <a:lstStyle/>
           <a:p>
-            <a:pPr indent="0" marL="0">
+            <a:pPr marL="0" indent="0">
               <a:buNone/>
             </a:pPr>
             <a:r>
@@ -22294,7 +22844,7 @@
                 <a:ea typeface="Cambria" pitchFamily="34" charset="-122"/>
                 <a:cs typeface="Cambria" pitchFamily="34" charset="-120"/>
               </a:rPr>
-              <a:t>17 ADR nuevos en 3 días (112 a 128)</a:t>
+              <a:t>18 ADR nuevos en 3 días (112 a 129)</a:t>
             </a:r>
             <a:endParaRPr lang="en-US" sz="2800" dirty="0"/>
           </a:p>
@@ -22321,6 +22871,13 @@
           </a:solidFill>
           <a:ln/>
         </p:spPr>
+        <p:txBody>
+          <a:bodyPr/>
+          <a:lstStyle/>
+          <a:p>
+            <a:endParaRPr lang="es-PE"/>
+          </a:p>
+        </p:txBody>
       </p:sp>
       <p:sp>
         <p:nvSpPr>
@@ -22343,7 +22900,7 @@
           <a:bodyPr wrap="square" rtlCol="0" anchor="ctr"/>
           <a:lstStyle/>
           <a:p>
-            <a:pPr indent="0" marL="0">
+            <a:pPr marL="0" indent="0">
               <a:buNone/>
             </a:pPr>
             <a:r>
@@ -22355,7 +22912,7 @@
                 <a:ea typeface="Cambria" pitchFamily="34" charset="-122"/>
                 <a:cs typeface="Cambria" pitchFamily="34" charset="-120"/>
               </a:rPr>
-              <a:t>8</a:t>
+              <a:t>9</a:t>
             </a:r>
             <a:endParaRPr lang="en-US" sz="3400" dirty="0"/>
           </a:p>
@@ -22382,7 +22939,7 @@
           <a:bodyPr wrap="square" rtlCol="0" anchor="ctr"/>
           <a:lstStyle/>
           <a:p>
-            <a:pPr indent="0" marL="0">
+            <a:pPr marL="0" indent="0">
               <a:buNone/>
             </a:pPr>
             <a:r>
@@ -22421,7 +22978,7 @@
           <a:bodyPr wrap="square" rtlCol="0" anchor="ctr"/>
           <a:lstStyle/>
           <a:p>
-            <a:pPr indent="0" marL="0">
+            <a:pPr marL="0" indent="0">
               <a:lnSpc>
                 <a:spcPct val="105000"/>
               </a:lnSpc>
@@ -22463,7 +23020,7 @@
           <a:bodyPr wrap="square" rtlCol="0" anchor="t"/>
           <a:lstStyle/>
           <a:p>
-            <a:pPr indent="0" marL="0">
+            <a:pPr marL="0" indent="0">
               <a:lnSpc>
                 <a:spcPct val="120000"/>
               </a:lnSpc>
@@ -22478,7 +23035,7 @@
                 <a:ea typeface="Calibri" pitchFamily="34" charset="-122"/>
                 <a:cs typeface="Calibri" pitchFamily="34" charset="-120"/>
               </a:rPr>
-              <a:t>Bot conversacional (menú, reclamos, IA), multilínea por área, administración de números, chat web persistente, RRHH y scoring de CVs.</a:t>
+              <a:t>Bot conversacional (menú, reclamos, IA), multilínea por área, administración de números, chat web persistente, RRHH y scoring de CVs. Ahora también en el widget web: adjuntos, CV y QR/OCR (ADR-129).</a:t>
             </a:r>
             <a:endParaRPr lang="en-US" sz="1000" dirty="0"/>
           </a:p>
@@ -22505,6 +23062,13 @@
           </a:solidFill>
           <a:ln/>
         </p:spPr>
+        <p:txBody>
+          <a:bodyPr/>
+          <a:lstStyle/>
+          <a:p>
+            <a:endParaRPr lang="es-PE"/>
+          </a:p>
+        </p:txBody>
       </p:sp>
       <p:sp>
         <p:nvSpPr>
@@ -22527,7 +23091,7 @@
           <a:bodyPr wrap="square" rtlCol="0" anchor="ctr"/>
           <a:lstStyle/>
           <a:p>
-            <a:pPr algn="ctr" indent="0" marL="0">
+            <a:pPr marL="0" indent="0" algn="ctr">
               <a:buNone/>
             </a:pPr>
             <a:r>
@@ -22566,7 +23130,7 @@
           <a:bodyPr wrap="square" rtlCol="0" anchor="ctr"/>
           <a:lstStyle/>
           <a:p>
-            <a:pPr indent="0" marL="0">
+            <a:pPr marL="0" indent="0">
               <a:buNone/>
             </a:pPr>
             <a:r>
@@ -22578,7 +23142,7 @@
                 <a:ea typeface="Calibri" pitchFamily="34" charset="-122"/>
                 <a:cs typeface="Calibri" pitchFamily="34" charset="-120"/>
               </a:rPr>
-              <a:t>ADR-112 a 118, 122</a:t>
+              <a:t>ADR-112 a 118, 122, 129</a:t>
             </a:r>
             <a:endParaRPr lang="en-US" sz="850" dirty="0"/>
           </a:p>
@@ -22605,6 +23169,13 @@
           </a:solidFill>
           <a:ln/>
         </p:spPr>
+        <p:txBody>
+          <a:bodyPr/>
+          <a:lstStyle/>
+          <a:p>
+            <a:endParaRPr lang="es-PE"/>
+          </a:p>
+        </p:txBody>
       </p:sp>
       <p:sp>
         <p:nvSpPr>
@@ -22627,7 +23198,7 @@
           <a:bodyPr wrap="square" rtlCol="0" anchor="ctr"/>
           <a:lstStyle/>
           <a:p>
-            <a:pPr indent="0" marL="0">
+            <a:pPr marL="0" indent="0">
               <a:buNone/>
             </a:pPr>
             <a:r>
@@ -22666,7 +23237,7 @@
           <a:bodyPr wrap="square" rtlCol="0" anchor="ctr"/>
           <a:lstStyle/>
           <a:p>
-            <a:pPr indent="0" marL="0">
+            <a:pPr marL="0" indent="0">
               <a:buNone/>
             </a:pPr>
             <a:r>
@@ -22705,7 +23276,7 @@
           <a:bodyPr wrap="square" rtlCol="0" anchor="ctr"/>
           <a:lstStyle/>
           <a:p>
-            <a:pPr indent="0" marL="0">
+            <a:pPr marL="0" indent="0">
               <a:lnSpc>
                 <a:spcPct val="105000"/>
               </a:lnSpc>
@@ -22747,7 +23318,7 @@
           <a:bodyPr wrap="square" rtlCol="0" anchor="t"/>
           <a:lstStyle/>
           <a:p>
-            <a:pPr indent="0" marL="0">
+            <a:pPr marL="0" indent="0">
               <a:lnSpc>
                 <a:spcPct val="120000"/>
               </a:lnSpc>
@@ -22789,7 +23360,7 @@
           <a:bodyPr wrap="square" rtlCol="0" anchor="ctr"/>
           <a:lstStyle/>
           <a:p>
-            <a:pPr indent="0" marL="0">
+            <a:pPr marL="0" indent="0">
               <a:buNone/>
             </a:pPr>
             <a:r>
@@ -22828,6 +23399,13 @@
           </a:solidFill>
           <a:ln/>
         </p:spPr>
+        <p:txBody>
+          <a:bodyPr/>
+          <a:lstStyle/>
+          <a:p>
+            <a:endParaRPr lang="es-PE"/>
+          </a:p>
+        </p:txBody>
       </p:sp>
       <p:sp>
         <p:nvSpPr>
@@ -22850,7 +23428,7 @@
           <a:bodyPr wrap="square" rtlCol="0" anchor="ctr"/>
           <a:lstStyle/>
           <a:p>
-            <a:pPr indent="0" marL="0">
+            <a:pPr marL="0" indent="0">
               <a:buNone/>
             </a:pPr>
             <a:r>
@@ -22889,7 +23467,7 @@
           <a:bodyPr wrap="square" rtlCol="0" anchor="ctr"/>
           <a:lstStyle/>
           <a:p>
-            <a:pPr indent="0" marL="0">
+            <a:pPr marL="0" indent="0">
               <a:buNone/>
             </a:pPr>
             <a:r>
@@ -22928,7 +23506,7 @@
           <a:bodyPr wrap="square" rtlCol="0" anchor="ctr"/>
           <a:lstStyle/>
           <a:p>
-            <a:pPr indent="0" marL="0">
+            <a:pPr marL="0" indent="0">
               <a:lnSpc>
                 <a:spcPct val="105000"/>
               </a:lnSpc>
@@ -22970,7 +23548,7 @@
           <a:bodyPr wrap="square" rtlCol="0" anchor="t"/>
           <a:lstStyle/>
           <a:p>
-            <a:pPr indent="0" marL="0">
+            <a:pPr marL="0" indent="0">
               <a:lnSpc>
                 <a:spcPct val="120000"/>
               </a:lnSpc>
@@ -23012,7 +23590,7 @@
           <a:bodyPr wrap="square" rtlCol="0" anchor="ctr"/>
           <a:lstStyle/>
           <a:p>
-            <a:pPr indent="0" marL="0">
+            <a:pPr marL="0" indent="0">
               <a:buNone/>
             </a:pPr>
             <a:r>
@@ -23051,6 +23629,13 @@
           </a:solidFill>
           <a:ln/>
         </p:spPr>
+        <p:txBody>
+          <a:bodyPr/>
+          <a:lstStyle/>
+          <a:p>
+            <a:endParaRPr lang="es-PE"/>
+          </a:p>
+        </p:txBody>
       </p:sp>
       <p:sp>
         <p:nvSpPr>
@@ -23073,7 +23658,7 @@
           <a:bodyPr wrap="square" rtlCol="0" anchor="ctr"/>
           <a:lstStyle/>
           <a:p>
-            <a:pPr indent="0" marL="0">
+            <a:pPr marL="0" indent="0">
               <a:buNone/>
             </a:pPr>
             <a:r>
@@ -23112,7 +23697,7 @@
           <a:bodyPr wrap="square" rtlCol="0" anchor="ctr"/>
           <a:lstStyle/>
           <a:p>
-            <a:pPr indent="0" marL="0">
+            <a:pPr marL="0" indent="0">
               <a:buNone/>
             </a:pPr>
             <a:r>
@@ -23151,7 +23736,7 @@
           <a:bodyPr wrap="square" rtlCol="0" anchor="ctr"/>
           <a:lstStyle/>
           <a:p>
-            <a:pPr indent="0" marL="0">
+            <a:pPr marL="0" indent="0">
               <a:lnSpc>
                 <a:spcPct val="105000"/>
               </a:lnSpc>
@@ -23193,7 +23778,7 @@
           <a:bodyPr wrap="square" rtlCol="0" anchor="t"/>
           <a:lstStyle/>
           <a:p>
-            <a:pPr indent="0" marL="0">
+            <a:pPr marL="0" indent="0">
               <a:lnSpc>
                 <a:spcPct val="120000"/>
               </a:lnSpc>
@@ -23235,7 +23820,7 @@
           <a:bodyPr wrap="square" rtlCol="0" anchor="ctr"/>
           <a:lstStyle/>
           <a:p>
-            <a:pPr indent="0" marL="0">
+            <a:pPr marL="0" indent="0">
               <a:buNone/>
             </a:pPr>
             <a:r>
@@ -23274,7 +23859,7 @@
           <a:bodyPr wrap="square" rtlCol="0" anchor="ctr"/>
           <a:lstStyle/>
           <a:p>
-            <a:pPr algn="l" indent="0" marL="0">
+            <a:pPr marL="0" indent="0" algn="l">
               <a:buNone/>
             </a:pPr>
             <a:r>
@@ -23313,7 +23898,7 @@
           <a:bodyPr wrap="square" rtlCol="0" anchor="ctr"/>
           <a:lstStyle/>
           <a:p>
-            <a:pPr algn="r" indent="0" marL="0">
+            <a:pPr marL="0" indent="0" algn="r">
               <a:buNone/>
             </a:pPr>
             <a:r>
@@ -23632,4 +24217,319 @@
     </a:ext>
   </a:extLst>
 </a:theme>
+</file>
+
+<file path=ppt/theme/theme2.xml><?xml version="1.0" encoding="utf-8"?>
+<a:theme xmlns:a="http://schemas.openxmlformats.org/drawingml/2006/main" name="Tema de Office">
+  <a:themeElements>
+    <a:clrScheme name="Office">
+      <a:dk1>
+        <a:sysClr val="windowText" lastClr="000000"/>
+      </a:dk1>
+      <a:lt1>
+        <a:sysClr val="window" lastClr="FFFFFF"/>
+      </a:lt1>
+      <a:dk2>
+        <a:srgbClr val="0E2841"/>
+      </a:dk2>
+      <a:lt2>
+        <a:srgbClr val="E8E8E8"/>
+      </a:lt2>
+      <a:accent1>
+        <a:srgbClr val="156082"/>
+      </a:accent1>
+      <a:accent2>
+        <a:srgbClr val="E97132"/>
+      </a:accent2>
+      <a:accent3>
+        <a:srgbClr val="196B24"/>
+      </a:accent3>
+      <a:accent4>
+        <a:srgbClr val="0F9ED5"/>
+      </a:accent4>
+      <a:accent5>
+        <a:srgbClr val="A02B93"/>
+      </a:accent5>
+      <a:accent6>
+        <a:srgbClr val="4EA72E"/>
+      </a:accent6>
+      <a:hlink>
+        <a:srgbClr val="467886"/>
+      </a:hlink>
+      <a:folHlink>
+        <a:srgbClr val="96607D"/>
+      </a:folHlink>
+    </a:clrScheme>
+    <a:fontScheme name="Office">
+      <a:majorFont>
+        <a:latin typeface="Aptos Display" panose="02110004020202020204"/>
+        <a:ea typeface=""/>
+        <a:cs typeface=""/>
+        <a:font script="Jpan" typeface="游ゴシック Light"/>
+        <a:font script="Hang" typeface="맑은 고딕"/>
+        <a:font script="Hans" typeface="等线 Light"/>
+        <a:font script="Hant" typeface="新細明體"/>
+        <a:font script="Arab" typeface="Times New Roman"/>
+        <a:font script="Hebr" typeface="Times New Roman"/>
+        <a:font script="Thai" typeface="Angsana New"/>
+        <a:font script="Ethi" typeface="Nyala"/>
+        <a:font script="Beng" typeface="Vrinda"/>
+        <a:font script="Gujr" typeface="Shruti"/>
+        <a:font script="Khmr" typeface="MoolBoran"/>
+        <a:font script="Knda" typeface="Tunga"/>
+        <a:font script="Guru" typeface="Raavi"/>
+        <a:font script="Cans" typeface="Euphemia"/>
+        <a:font script="Cher" typeface="Plantagenet Cherokee"/>
+        <a:font script="Yiii" typeface="Microsoft Yi Baiti"/>
+        <a:font script="Tibt" typeface="Microsoft Himalaya"/>
+        <a:font script="Thaa" typeface="MV Boli"/>
+        <a:font script="Deva" typeface="Mangal"/>
+        <a:font script="Telu" typeface="Gautami"/>
+        <a:font script="Taml" typeface="Latha"/>
+        <a:font script="Syrc" typeface="Estrangelo Edessa"/>
+        <a:font script="Orya" typeface="Kalinga"/>
+        <a:font script="Mlym" typeface="Kartika"/>
+        <a:font script="Laoo" typeface="DokChampa"/>
+        <a:font script="Sinh" typeface="Iskoola Pota"/>
+        <a:font script="Mong" typeface="Mongolian Baiti"/>
+        <a:font script="Viet" typeface="Times New Roman"/>
+        <a:font script="Uigh" typeface="Microsoft Uighur"/>
+        <a:font script="Geor" typeface="Sylfaen"/>
+        <a:font script="Armn" typeface="Arial"/>
+        <a:font script="Bugi" typeface="Leelawadee UI"/>
+        <a:font script="Bopo" typeface="Microsoft JhengHei"/>
+        <a:font script="Java" typeface="Javanese Text"/>
+        <a:font script="Lisu" typeface="Segoe UI"/>
+        <a:font script="Mymr" typeface="Myanmar Text"/>
+        <a:font script="Nkoo" typeface="Ebrima"/>
+        <a:font script="Olck" typeface="Nirmala UI"/>
+        <a:font script="Osma" typeface="Ebrima"/>
+        <a:font script="Phag" typeface="Phagspa"/>
+        <a:font script="Syrn" typeface="Estrangelo Edessa"/>
+        <a:font script="Syrj" typeface="Estrangelo Edessa"/>
+        <a:font script="Syre" typeface="Estrangelo Edessa"/>
+        <a:font script="Sora" typeface="Nirmala UI"/>
+        <a:font script="Tale" typeface="Microsoft Tai Le"/>
+        <a:font script="Talu" typeface="Microsoft New Tai Lue"/>
+        <a:font script="Tfng" typeface="Ebrima"/>
+      </a:majorFont>
+      <a:minorFont>
+        <a:latin typeface="Aptos" panose="02110004020202020204"/>
+        <a:ea typeface=""/>
+        <a:cs typeface=""/>
+        <a:font script="Jpan" typeface="游ゴシック"/>
+        <a:font script="Hang" typeface="맑은 고딕"/>
+        <a:font script="Hans" typeface="等线"/>
+        <a:font script="Hant" typeface="新細明體"/>
+        <a:font script="Arab" typeface="Arial"/>
+        <a:font script="Hebr" typeface="Arial"/>
+        <a:font script="Thai" typeface="Cordia New"/>
+        <a:font script="Ethi" typeface="Nyala"/>
+        <a:font script="Beng" typeface="Vrinda"/>
+        <a:font script="Gujr" typeface="Shruti"/>
+        <a:font script="Khmr" typeface="DaunPenh"/>
+        <a:font script="Knda" typeface="Tunga"/>
+        <a:font script="Guru" typeface="Raavi"/>
+        <a:font script="Cans" typeface="Euphemia"/>
+        <a:font script="Cher" typeface="Plantagenet Cherokee"/>
+        <a:font script="Yiii" typeface="Microsoft Yi Baiti"/>
+        <a:font script="Tibt" typeface="Microsoft Himalaya"/>
+        <a:font script="Thaa" typeface="MV Boli"/>
+        <a:font script="Deva" typeface="Mangal"/>
+        <a:font script="Telu" typeface="Gautami"/>
+        <a:font script="Taml" typeface="Latha"/>
+        <a:font script="Syrc" typeface="Estrangelo Edessa"/>
+        <a:font script="Orya" typeface="Kalinga"/>
+        <a:font script="Mlym" typeface="Kartika"/>
+        <a:font script="Laoo" typeface="DokChampa"/>
+        <a:font script="Sinh" typeface="Iskoola Pota"/>
+        <a:font script="Mong" typeface="Mongolian Baiti"/>
+        <a:font script="Viet" typeface="Arial"/>
+        <a:font script="Uigh" typeface="Microsoft Uighur"/>
+        <a:font script="Geor" typeface="Sylfaen"/>
+        <a:font script="Armn" typeface="Arial"/>
+        <a:font script="Bugi" typeface="Leelawadee UI"/>
+        <a:font script="Bopo" typeface="Microsoft JhengHei"/>
+        <a:font script="Java" typeface="Javanese Text"/>
+        <a:font script="Lisu" typeface="Segoe UI"/>
+        <a:font script="Mymr" typeface="Myanmar Text"/>
+        <a:font script="Nkoo" typeface="Ebrima"/>
+        <a:font script="Olck" typeface="Nirmala UI"/>
+        <a:font script="Osma" typeface="Ebrima"/>
+        <a:font script="Phag" typeface="Phagspa"/>
+        <a:font script="Syrn" typeface="Estrangelo Edessa"/>
+        <a:font script="Syrj" typeface="Estrangelo Edessa"/>
+        <a:font script="Syre" typeface="Estrangelo Edessa"/>
+        <a:font script="Sora" typeface="Nirmala UI"/>
+        <a:font script="Tale" typeface="Microsoft Tai Le"/>
+        <a:font script="Talu" typeface="Microsoft New Tai Lue"/>
+        <a:font script="Tfng" typeface="Ebrima"/>
+      </a:minorFont>
+    </a:fontScheme>
+    <a:fmtScheme name="Office">
+      <a:fillStyleLst>
+        <a:solidFill>
+          <a:schemeClr val="phClr"/>
+        </a:solidFill>
+        <a:gradFill rotWithShape="1">
+          <a:gsLst>
+            <a:gs pos="0">
+              <a:schemeClr val="phClr">
+                <a:lumMod val="110000"/>
+                <a:satMod val="105000"/>
+                <a:tint val="67000"/>
+              </a:schemeClr>
+            </a:gs>
+            <a:gs pos="50000">
+              <a:schemeClr val="phClr">
+                <a:lumMod val="105000"/>
+                <a:satMod val="103000"/>
+                <a:tint val="73000"/>
+              </a:schemeClr>
+            </a:gs>
+            <a:gs pos="100000">
+              <a:schemeClr val="phClr">
+                <a:lumMod val="105000"/>
+                <a:satMod val="109000"/>
+                <a:tint val="81000"/>
+              </a:schemeClr>
+            </a:gs>
+          </a:gsLst>
+          <a:lin ang="5400000" scaled="0"/>
+        </a:gradFill>
+        <a:gradFill rotWithShape="1">
+          <a:gsLst>
+            <a:gs pos="0">
+              <a:schemeClr val="phClr">
+                <a:satMod val="103000"/>
+                <a:lumMod val="102000"/>
+                <a:tint val="94000"/>
+              </a:schemeClr>
+            </a:gs>
+            <a:gs pos="50000">
+              <a:schemeClr val="phClr">
+                <a:satMod val="110000"/>
+                <a:lumMod val="100000"/>
+                <a:shade val="100000"/>
+              </a:schemeClr>
+            </a:gs>
+            <a:gs pos="100000">
+              <a:schemeClr val="phClr">
+                <a:lumMod val="99000"/>
+                <a:satMod val="120000"/>
+                <a:shade val="78000"/>
+              </a:schemeClr>
+            </a:gs>
+          </a:gsLst>
+          <a:lin ang="5400000" scaled="0"/>
+        </a:gradFill>
+      </a:fillStyleLst>
+      <a:lnStyleLst>
+        <a:ln w="12700" cap="flat" cmpd="sng" algn="ctr">
+          <a:solidFill>
+            <a:schemeClr val="phClr"/>
+          </a:solidFill>
+          <a:prstDash val="solid"/>
+          <a:miter lim="800000"/>
+        </a:ln>
+        <a:ln w="19050" cap="flat" cmpd="sng" algn="ctr">
+          <a:solidFill>
+            <a:schemeClr val="phClr"/>
+          </a:solidFill>
+          <a:prstDash val="solid"/>
+          <a:miter lim="800000"/>
+        </a:ln>
+        <a:ln w="25400" cap="flat" cmpd="sng" algn="ctr">
+          <a:solidFill>
+            <a:schemeClr val="phClr"/>
+          </a:solidFill>
+          <a:prstDash val="solid"/>
+          <a:miter lim="800000"/>
+        </a:ln>
+      </a:lnStyleLst>
+      <a:effectStyleLst>
+        <a:effectStyle>
+          <a:effectLst/>
+        </a:effectStyle>
+        <a:effectStyle>
+          <a:effectLst/>
+        </a:effectStyle>
+        <a:effectStyle>
+          <a:effectLst>
+            <a:outerShdw blurRad="57150" dist="19050" dir="5400000" algn="ctr" rotWithShape="0">
+              <a:srgbClr val="000000">
+                <a:alpha val="63000"/>
+              </a:srgbClr>
+            </a:outerShdw>
+          </a:effectLst>
+        </a:effectStyle>
+      </a:effectStyleLst>
+      <a:bgFillStyleLst>
+        <a:solidFill>
+          <a:schemeClr val="phClr"/>
+        </a:solidFill>
+        <a:solidFill>
+          <a:schemeClr val="phClr">
+            <a:tint val="95000"/>
+            <a:satMod val="170000"/>
+          </a:schemeClr>
+        </a:solidFill>
+        <a:gradFill rotWithShape="1">
+          <a:gsLst>
+            <a:gs pos="0">
+              <a:schemeClr val="phClr">
+                <a:tint val="93000"/>
+                <a:satMod val="150000"/>
+                <a:shade val="98000"/>
+                <a:lumMod val="102000"/>
+              </a:schemeClr>
+            </a:gs>
+            <a:gs pos="50000">
+              <a:schemeClr val="phClr">
+                <a:tint val="98000"/>
+                <a:satMod val="130000"/>
+                <a:shade val="90000"/>
+                <a:lumMod val="103000"/>
+              </a:schemeClr>
+            </a:gs>
+            <a:gs pos="100000">
+              <a:schemeClr val="phClr">
+                <a:shade val="63000"/>
+                <a:satMod val="120000"/>
+              </a:schemeClr>
+            </a:gs>
+          </a:gsLst>
+          <a:lin ang="5400000" scaled="0"/>
+        </a:gradFill>
+      </a:bgFillStyleLst>
+    </a:fmtScheme>
+  </a:themeElements>
+  <a:objectDefaults>
+    <a:lnDef>
+      <a:spPr/>
+      <a:bodyPr/>
+      <a:lstStyle/>
+      <a:style>
+        <a:lnRef idx="2">
+          <a:schemeClr val="accent1"/>
+        </a:lnRef>
+        <a:fillRef idx="0">
+          <a:schemeClr val="accent1"/>
+        </a:fillRef>
+        <a:effectRef idx="1">
+          <a:schemeClr val="accent1"/>
+        </a:effectRef>
+        <a:fontRef idx="minor">
+          <a:schemeClr val="tx1"/>
+        </a:fontRef>
+      </a:style>
+    </a:lnDef>
+  </a:objectDefaults>
+  <a:extraClrSchemeLst/>
+  <a:extLst>
+    <a:ext uri="{05A4C25C-085E-4340-85A3-A5531E510DB2}">
+      <thm15:themeFamily xmlns:thm15="http://schemas.microsoft.com/office/thememl/2012/main" name="Office Theme" id="{2E142A2C-CD16-42D6-873A-C26D2A0506FA}" vid="{1BDDFF52-6CD6-40A5-AB3C-68EB2F1E4D0A}"/>
+    </a:ext>
+  </a:extLst>
+</a:theme>
 </file>